--- a/output/wordlabs-educate-3day.pptx
+++ b/output/wordlabs-educate-3day.pptx
@@ -4240,7 +4240,7 @@
                 <a:ea typeface="Calibri" pitchFamily="34" charset="-122"/>
                 <a:cs typeface="Calibri" pitchFamily="34" charset="-120"/>
               </a:rPr>
-              <a:t>"to lead out knowledge"</a:t>
+              <a:t>"to lead out, teach"</a:t>
             </a:r>
             <a:endParaRPr lang="en-US" sz="2200" dirty="0"/>
           </a:p>
@@ -5288,7 +5288,7 @@
                 <a:ea typeface="Calibri" pitchFamily="34" charset="-122"/>
                 <a:cs typeface="Calibri" pitchFamily="34" charset="-120"/>
               </a:rPr>
-              <a:t>Word Labs  •  wordlabs.app  •  Root: 'educate' = to lead out knowledge</a:t>
+              <a:t>Word Labs  •  wordlabs.app  •  Root: 'educate' = to lead out, teach</a:t>
             </a:r>
             <a:endParaRPr lang="en-US" sz="800" dirty="0"/>
           </a:p>
@@ -5928,7 +5928,7 @@
                 <a:ea typeface="Calibri" pitchFamily="34" charset="-122"/>
                 <a:cs typeface="Calibri" pitchFamily="34" charset="-120"/>
               </a:rPr>
-              <a:t>Word Labs  •  wordlabs.app  •  Root: 'educate' = to lead out knowledge</a:t>
+              <a:t>Word Labs  •  wordlabs.app  •  Root: 'educate' = to lead out, teach</a:t>
             </a:r>
             <a:endParaRPr lang="en-US" sz="800" dirty="0"/>
           </a:p>
@@ -6071,7 +6071,7 @@
                 <a:ea typeface="Calibri" pitchFamily="34" charset="-122"/>
                 <a:cs typeface="Calibri" pitchFamily="34" charset="-120"/>
               </a:rPr>
-              <a:t> smiled as she handed out the </a:t>
+              <a:t> explained that a good </a:t>
             </a:r>
             <a:pPr algn="l" indent="0" marL="0">
               <a:buNone/>
@@ -6088,7 +6088,7 @@
                 <a:ea typeface="Calibri" pitchFamily="34" charset="-122"/>
                 <a:cs typeface="Calibri" pitchFamily="34" charset="-120"/>
               </a:rPr>
-              <a:t>educational</a:t>
+              <a:t>education</a:t>
             </a:r>
             <a:pPr algn="l" indent="0" marL="0">
               <a:buNone/>
@@ -6102,7 +6102,7 @@
                 <a:ea typeface="Calibri" pitchFamily="34" charset="-122"/>
                 <a:cs typeface="Calibri" pitchFamily="34" charset="-120"/>
               </a:rPr>
-              <a:t> worksheets to the class.</a:t>
+              <a:t> opens many doors in life.</a:t>
             </a:r>
             <a:endParaRPr lang="en-US" sz="1800" dirty="0"/>
           </a:p>
@@ -6385,7 +6385,7 @@
                 <a:ea typeface="Trebuchet MS" pitchFamily="34" charset="-122"/>
                 <a:cs typeface="Trebuchet MS" pitchFamily="34" charset="-120"/>
               </a:rPr>
-              <a:t>educational</a:t>
+              <a:t>education</a:t>
             </a:r>
             <a:endParaRPr lang="en-US" sz="1400" dirty="0"/>
           </a:p>
@@ -6716,7 +6716,7 @@
                 <a:ea typeface="Calibri" pitchFamily="34" charset="-122"/>
                 <a:cs typeface="Calibri" pitchFamily="34" charset="-120"/>
               </a:rPr>
-              <a:t>Word Labs  •  wordlabs.app  •  Root: 'educate' = to lead out knowledge</a:t>
+              <a:t>Word Labs  •  wordlabs.app  •  Root: 'educate' = to lead out, teach</a:t>
             </a:r>
             <a:endParaRPr lang="en-US" sz="800" dirty="0"/>
           </a:p>
@@ -7543,7 +7543,7 @@
                 <a:ea typeface="Calibri" pitchFamily="34" charset="-122"/>
                 <a:cs typeface="Calibri" pitchFamily="34" charset="-120"/>
               </a:rPr>
-              <a:t>Word Labs  •  wordlabs.app  •  Root: 'educate' = to lead out knowledge</a:t>
+              <a:t>Word Labs  •  wordlabs.app  •  Root: 'educate' = to lead out, teach</a:t>
             </a:r>
             <a:endParaRPr lang="en-US" sz="800" dirty="0"/>
           </a:p>
@@ -7860,7 +7860,7 @@
                 <a:ea typeface="Calibri" pitchFamily="34" charset="-122"/>
                 <a:cs typeface="Calibri" pitchFamily="34" charset="-120"/>
               </a:rPr>
-              <a:t>to lead out knowledge</a:t>
+              <a:t>to lead out, teach</a:t>
             </a:r>
             <a:endParaRPr lang="en-US" sz="850" dirty="0"/>
           </a:p>
@@ -8011,7 +8011,7 @@
                 <a:ea typeface="Calibri" pitchFamily="34" charset="-122"/>
                 <a:cs typeface="Calibri" pitchFamily="34" charset="-120"/>
               </a:rPr>
-              <a:t>person who does</a:t>
+              <a:t>person who does something</a:t>
             </a:r>
             <a:endParaRPr lang="en-US" sz="850" dirty="0"/>
           </a:p>
@@ -8567,7 +8567,7 @@
                 <a:ea typeface="Calibri" pitchFamily="34" charset="-122"/>
                 <a:cs typeface="Calibri" pitchFamily="34" charset="-120"/>
               </a:rPr>
-              <a:t>Word Labs  •  wordlabs.app  •  Root: 'educate' = to lead out knowledge</a:t>
+              <a:t>Word Labs  •  wordlabs.app  •  Root: 'educate' = to lead out, teach</a:t>
             </a:r>
             <a:endParaRPr lang="en-US" sz="800" dirty="0"/>
           </a:p>
@@ -8884,7 +8884,7 @@
                 <a:ea typeface="Calibri" pitchFamily="34" charset="-122"/>
                 <a:cs typeface="Calibri" pitchFamily="34" charset="-120"/>
               </a:rPr>
-              <a:t>to lead out knowledge</a:t>
+              <a:t>to lead out, teach</a:t>
             </a:r>
             <a:endParaRPr lang="en-US" sz="850" dirty="0"/>
           </a:p>
@@ -9035,7 +9035,7 @@
                 <a:ea typeface="Calibri" pitchFamily="34" charset="-122"/>
                 <a:cs typeface="Calibri" pitchFamily="34" charset="-120"/>
               </a:rPr>
-              <a:t>person who does</a:t>
+              <a:t>person who does something</a:t>
             </a:r>
             <a:endParaRPr lang="en-US" sz="850" dirty="0"/>
           </a:p>
@@ -9933,7 +9933,7 @@
                 <a:ea typeface="Calibri" pitchFamily="34" charset="-122"/>
                 <a:cs typeface="Calibri" pitchFamily="34" charset="-120"/>
               </a:rPr>
-              <a:t>Word Labs  •  wordlabs.app  •  Root: 'educate' = to lead out knowledge</a:t>
+              <a:t>Word Labs  •  wordlabs.app  •  Root: 'educate' = to lead out, teach</a:t>
             </a:r>
             <a:endParaRPr lang="en-US" sz="800" dirty="0"/>
           </a:p>
@@ -10250,7 +10250,7 @@
                 <a:ea typeface="Calibri" pitchFamily="34" charset="-122"/>
                 <a:cs typeface="Calibri" pitchFamily="34" charset="-120"/>
               </a:rPr>
-              <a:t>to lead out knowledge</a:t>
+              <a:t>to lead out, teach</a:t>
             </a:r>
             <a:endParaRPr lang="en-US" sz="850" dirty="0"/>
           </a:p>
@@ -10401,7 +10401,7 @@
                 <a:ea typeface="Calibri" pitchFamily="34" charset="-122"/>
                 <a:cs typeface="Calibri" pitchFamily="34" charset="-120"/>
               </a:rPr>
-              <a:t>person who does</a:t>
+              <a:t>person who does something</a:t>
             </a:r>
             <a:endParaRPr lang="en-US" sz="850" dirty="0"/>
           </a:p>
@@ -11761,7 +11761,7 @@
                 <a:ea typeface="Calibri" pitchFamily="34" charset="-122"/>
                 <a:cs typeface="Calibri" pitchFamily="34" charset="-120"/>
               </a:rPr>
-              <a:t>Word Labs  •  wordlabs.app  •  Root: 'educate' = to lead out knowledge</a:t>
+              <a:t>Word Labs  •  wordlabs.app  •  Root: 'educate' = to lead out, teach</a:t>
             </a:r>
             <a:endParaRPr lang="en-US" sz="800" dirty="0"/>
           </a:p>
@@ -11900,7 +11900,7 @@
                 <a:ea typeface="Trebuchet MS" pitchFamily="34" charset="-122"/>
                 <a:cs typeface="Trebuchet MS" pitchFamily="34" charset="-120"/>
               </a:rPr>
-              <a:t>educational</a:t>
+              <a:t>education</a:t>
             </a:r>
             <a:endParaRPr lang="en-US" sz="2800" dirty="0"/>
           </a:p>
@@ -12588,7 +12588,7 @@
                 <a:ea typeface="Calibri" pitchFamily="34" charset="-122"/>
                 <a:cs typeface="Calibri" pitchFamily="34" charset="-120"/>
               </a:rPr>
-              <a:t>Word Labs  •  wordlabs.app  •  Root: 'educate' = to lead out knowledge</a:t>
+              <a:t>Word Labs  •  wordlabs.app  •  Root: 'educate' = to lead out, teach</a:t>
             </a:r>
             <a:endParaRPr lang="en-US" sz="800" dirty="0"/>
           </a:p>
@@ -12727,7 +12727,7 @@
                 <a:ea typeface="Trebuchet MS" pitchFamily="34" charset="-122"/>
                 <a:cs typeface="Trebuchet MS" pitchFamily="34" charset="-120"/>
               </a:rPr>
-              <a:t>educational</a:t>
+              <a:t>education</a:t>
             </a:r>
             <a:endParaRPr lang="en-US" sz="2800" dirty="0"/>
           </a:p>
@@ -12905,7 +12905,7 @@
                 <a:ea typeface="Calibri" pitchFamily="34" charset="-122"/>
                 <a:cs typeface="Calibri" pitchFamily="34" charset="-120"/>
               </a:rPr>
-              <a:t>to lead out knowledge</a:t>
+              <a:t>to lead out, teach</a:t>
             </a:r>
             <a:endParaRPr lang="en-US" sz="850" dirty="0"/>
           </a:p>
@@ -13017,7 +13017,7 @@
                 <a:ea typeface="Trebuchet MS" pitchFamily="34" charset="-122"/>
                 <a:cs typeface="Trebuchet MS" pitchFamily="34" charset="-120"/>
               </a:rPr>
-              <a:t>ion</a:t>
+              <a:t>a</a:t>
             </a:r>
             <a:endParaRPr lang="en-US" sz="1300" dirty="0"/>
           </a:p>
@@ -13056,7 +13056,7 @@
                 <a:ea typeface="Calibri" pitchFamily="34" charset="-122"/>
                 <a:cs typeface="Calibri" pitchFamily="34" charset="-120"/>
               </a:rPr>
-              <a:t>act or process of</a:t>
+              <a:t>connecting vowel</a:t>
             </a:r>
             <a:endParaRPr lang="en-US" sz="850" dirty="0"/>
           </a:p>
@@ -13064,7 +13064,46 @@
       </p:sp>
       <p:sp>
         <p:nvSpPr>
-          <p:cNvPr id="23" name="Shape 21"/>
+          <p:cNvPr id="23" name="Text 21"/>
+          <p:cNvSpPr/>
+          <p:nvPr/>
+        </p:nvSpPr>
+        <p:spPr>
+          <a:xfrm>
+            <a:off x="4370832" y="2752344"/>
+            <a:ext cx="1828800" cy="182880"/>
+          </a:xfrm>
+          <a:prstGeom prst="rect">
+            <a:avLst/>
+          </a:prstGeom>
+          <a:noFill/>
+          <a:ln/>
+        </p:spPr>
+        <p:txBody>
+          <a:bodyPr wrap="square" lIns="0" tIns="0" rIns="0" bIns="0" rtlCol="0" anchor="t"/>
+          <a:lstStyle/>
+          <a:p>
+            <a:pPr algn="ctr" indent="0" marL="0">
+              <a:buNone/>
+            </a:pPr>
+            <a:r>
+              <a:rPr lang="en-US" sz="700" i="1" dirty="0">
+                <a:solidFill>
+                  <a:srgbClr val="94A3B8"/>
+                </a:solidFill>
+                <a:latin typeface="Calibri" pitchFamily="34" charset="0"/>
+                <a:ea typeface="Calibri" pitchFamily="34" charset="-122"/>
+                <a:cs typeface="Calibri" pitchFamily="34" charset="-120"/>
+              </a:rPr>
+              <a:t>links base to suffix</a:t>
+            </a:r>
+            <a:endParaRPr lang="en-US" sz="700" dirty="0"/>
+          </a:p>
+        </p:txBody>
+      </p:sp>
+      <p:sp>
+        <p:nvSpPr>
+          <p:cNvPr id="24" name="Shape 22"/>
           <p:cNvSpPr/>
           <p:nvPr/>
         </p:nvSpPr>
@@ -13098,7 +13137,7 @@
       </p:sp>
       <p:sp>
         <p:nvSpPr>
-          <p:cNvPr id="24" name="Text 22"/>
+          <p:cNvPr id="25" name="Text 23"/>
           <p:cNvSpPr/>
           <p:nvPr/>
         </p:nvSpPr>
@@ -13129,7 +13168,7 @@
                 <a:ea typeface="Trebuchet MS" pitchFamily="34" charset="-122"/>
                 <a:cs typeface="Trebuchet MS" pitchFamily="34" charset="-120"/>
               </a:rPr>
-              <a:t>al</a:t>
+              <a:t>tion</a:t>
             </a:r>
             <a:endParaRPr lang="en-US" sz="1300" dirty="0"/>
           </a:p>
@@ -13137,7 +13176,7 @@
       </p:sp>
       <p:sp>
         <p:nvSpPr>
-          <p:cNvPr id="25" name="Text 23"/>
+          <p:cNvPr id="26" name="Text 24"/>
           <p:cNvSpPr/>
           <p:nvPr/>
         </p:nvSpPr>
@@ -13168,7 +13207,7 @@
                 <a:ea typeface="Calibri" pitchFamily="34" charset="-122"/>
                 <a:cs typeface="Calibri" pitchFamily="34" charset="-120"/>
               </a:rPr>
-              <a:t>relating to</a:t>
+              <a:t>act or process of</a:t>
             </a:r>
             <a:endParaRPr lang="en-US" sz="850" dirty="0"/>
           </a:p>
@@ -13176,7 +13215,7 @@
       </p:sp>
       <p:sp>
         <p:nvSpPr>
-          <p:cNvPr id="26" name="Shape 24"/>
+          <p:cNvPr id="27" name="Shape 25"/>
           <p:cNvSpPr/>
           <p:nvPr/>
         </p:nvSpPr>
@@ -13203,7 +13242,7 @@
       </p:sp>
       <p:sp>
         <p:nvSpPr>
-          <p:cNvPr id="27" name="Text 25"/>
+          <p:cNvPr id="28" name="Text 26"/>
           <p:cNvSpPr/>
           <p:nvPr/>
         </p:nvSpPr>
@@ -13242,7 +13281,7 @@
       </p:sp>
       <p:sp>
         <p:nvSpPr>
-          <p:cNvPr id="28" name="Shape 26"/>
+          <p:cNvPr id="29" name="Shape 27"/>
           <p:cNvSpPr/>
           <p:nvPr/>
         </p:nvSpPr>
@@ -13269,7 +13308,7 @@
       </p:sp>
       <p:sp>
         <p:nvSpPr>
-          <p:cNvPr id="29" name="Text 27"/>
+          <p:cNvPr id="30" name="Text 28"/>
           <p:cNvSpPr/>
           <p:nvPr/>
         </p:nvSpPr>
@@ -13308,7 +13347,7 @@
       </p:sp>
       <p:sp>
         <p:nvSpPr>
-          <p:cNvPr id="30" name="Shape 28"/>
+          <p:cNvPr id="31" name="Shape 29"/>
           <p:cNvSpPr/>
           <p:nvPr/>
         </p:nvSpPr>
@@ -13335,7 +13374,7 @@
       </p:sp>
       <p:sp>
         <p:nvSpPr>
-          <p:cNvPr id="31" name="Text 29"/>
+          <p:cNvPr id="32" name="Text 30"/>
           <p:cNvSpPr/>
           <p:nvPr/>
         </p:nvSpPr>
@@ -13374,7 +13413,7 @@
       </p:sp>
       <p:sp>
         <p:nvSpPr>
-          <p:cNvPr id="32" name="Shape 30"/>
+          <p:cNvPr id="33" name="Shape 31"/>
           <p:cNvSpPr/>
           <p:nvPr/>
         </p:nvSpPr>
@@ -13401,7 +13440,7 @@
       </p:sp>
       <p:sp>
         <p:nvSpPr>
-          <p:cNvPr id="33" name="Text 31"/>
+          <p:cNvPr id="34" name="Text 32"/>
           <p:cNvSpPr/>
           <p:nvPr/>
         </p:nvSpPr>
@@ -13724,7 +13763,7 @@
                 <a:ea typeface="Calibri" pitchFamily="34" charset="-122"/>
                 <a:cs typeface="Calibri" pitchFamily="34" charset="-120"/>
               </a:rPr>
-              <a:t>Word Labs  •  wordlabs.app  •  Root: 'educate' = to lead out knowledge</a:t>
+              <a:t>Word Labs  •  wordlabs.app  •  Root: 'educate' = to lead out, teach</a:t>
             </a:r>
             <a:endParaRPr lang="en-US" sz="800" dirty="0"/>
           </a:p>
@@ -13863,7 +13902,7 @@
                 <a:ea typeface="Trebuchet MS" pitchFamily="34" charset="-122"/>
                 <a:cs typeface="Trebuchet MS" pitchFamily="34" charset="-120"/>
               </a:rPr>
-              <a:t>educational</a:t>
+              <a:t>education</a:t>
             </a:r>
             <a:endParaRPr lang="en-US" sz="2800" dirty="0"/>
           </a:p>
@@ -14041,7 +14080,7 @@
                 <a:ea typeface="Calibri" pitchFamily="34" charset="-122"/>
                 <a:cs typeface="Calibri" pitchFamily="34" charset="-120"/>
               </a:rPr>
-              <a:t>to lead out knowledge</a:t>
+              <a:t>to lead out, teach</a:t>
             </a:r>
             <a:endParaRPr lang="en-US" sz="850" dirty="0"/>
           </a:p>
@@ -14153,7 +14192,7 @@
                 <a:ea typeface="Trebuchet MS" pitchFamily="34" charset="-122"/>
                 <a:cs typeface="Trebuchet MS" pitchFamily="34" charset="-120"/>
               </a:rPr>
-              <a:t>ion</a:t>
+              <a:t>a</a:t>
             </a:r>
             <a:endParaRPr lang="en-US" sz="1300" dirty="0"/>
           </a:p>
@@ -14192,7 +14231,7 @@
                 <a:ea typeface="Calibri" pitchFamily="34" charset="-122"/>
                 <a:cs typeface="Calibri" pitchFamily="34" charset="-120"/>
               </a:rPr>
-              <a:t>act or process of</a:t>
+              <a:t>connecting vowel</a:t>
             </a:r>
             <a:endParaRPr lang="en-US" sz="850" dirty="0"/>
           </a:p>
@@ -14200,7 +14239,46 @@
       </p:sp>
       <p:sp>
         <p:nvSpPr>
-          <p:cNvPr id="23" name="Shape 21"/>
+          <p:cNvPr id="23" name="Text 21"/>
+          <p:cNvSpPr/>
+          <p:nvPr/>
+        </p:nvSpPr>
+        <p:spPr>
+          <a:xfrm>
+            <a:off x="4370832" y="2752344"/>
+            <a:ext cx="1828800" cy="182880"/>
+          </a:xfrm>
+          <a:prstGeom prst="rect">
+            <a:avLst/>
+          </a:prstGeom>
+          <a:noFill/>
+          <a:ln/>
+        </p:spPr>
+        <p:txBody>
+          <a:bodyPr wrap="square" lIns="0" tIns="0" rIns="0" bIns="0" rtlCol="0" anchor="t"/>
+          <a:lstStyle/>
+          <a:p>
+            <a:pPr algn="ctr" indent="0" marL="0">
+              <a:buNone/>
+            </a:pPr>
+            <a:r>
+              <a:rPr lang="en-US" sz="700" i="1" dirty="0">
+                <a:solidFill>
+                  <a:srgbClr val="94A3B8"/>
+                </a:solidFill>
+                <a:latin typeface="Calibri" pitchFamily="34" charset="0"/>
+                <a:ea typeface="Calibri" pitchFamily="34" charset="-122"/>
+                <a:cs typeface="Calibri" pitchFamily="34" charset="-120"/>
+              </a:rPr>
+              <a:t>links base to suffix</a:t>
+            </a:r>
+            <a:endParaRPr lang="en-US" sz="700" dirty="0"/>
+          </a:p>
+        </p:txBody>
+      </p:sp>
+      <p:sp>
+        <p:nvSpPr>
+          <p:cNvPr id="24" name="Shape 22"/>
           <p:cNvSpPr/>
           <p:nvPr/>
         </p:nvSpPr>
@@ -14234,7 +14312,7 @@
       </p:sp>
       <p:sp>
         <p:nvSpPr>
-          <p:cNvPr id="24" name="Text 22"/>
+          <p:cNvPr id="25" name="Text 23"/>
           <p:cNvSpPr/>
           <p:nvPr/>
         </p:nvSpPr>
@@ -14265,7 +14343,7 @@
                 <a:ea typeface="Trebuchet MS" pitchFamily="34" charset="-122"/>
                 <a:cs typeface="Trebuchet MS" pitchFamily="34" charset="-120"/>
               </a:rPr>
-              <a:t>al</a:t>
+              <a:t>tion</a:t>
             </a:r>
             <a:endParaRPr lang="en-US" sz="1300" dirty="0"/>
           </a:p>
@@ -14273,7 +14351,7 @@
       </p:sp>
       <p:sp>
         <p:nvSpPr>
-          <p:cNvPr id="25" name="Text 23"/>
+          <p:cNvPr id="26" name="Text 24"/>
           <p:cNvSpPr/>
           <p:nvPr/>
         </p:nvSpPr>
@@ -14304,7 +14382,7 @@
                 <a:ea typeface="Calibri" pitchFamily="34" charset="-122"/>
                 <a:cs typeface="Calibri" pitchFamily="34" charset="-120"/>
               </a:rPr>
-              <a:t>relating to</a:t>
+              <a:t>act or process of</a:t>
             </a:r>
             <a:endParaRPr lang="en-US" sz="850" dirty="0"/>
           </a:p>
@@ -14312,7 +14390,7 @@
       </p:sp>
       <p:sp>
         <p:nvSpPr>
-          <p:cNvPr id="26" name="Shape 24"/>
+          <p:cNvPr id="27" name="Shape 25"/>
           <p:cNvSpPr/>
           <p:nvPr/>
         </p:nvSpPr>
@@ -14339,7 +14417,7 @@
       </p:sp>
       <p:sp>
         <p:nvSpPr>
-          <p:cNvPr id="27" name="Text 25"/>
+          <p:cNvPr id="28" name="Text 26"/>
           <p:cNvSpPr/>
           <p:nvPr/>
         </p:nvSpPr>
@@ -14378,7 +14456,7 @@
       </p:sp>
       <p:sp>
         <p:nvSpPr>
-          <p:cNvPr id="28" name="Shape 26"/>
+          <p:cNvPr id="29" name="Shape 27"/>
           <p:cNvSpPr/>
           <p:nvPr/>
         </p:nvSpPr>
@@ -14405,14 +14483,14 @@
       </p:sp>
       <p:sp>
         <p:nvSpPr>
-          <p:cNvPr id="29" name="Shape 27"/>
-          <p:cNvSpPr/>
-          <p:nvPr/>
-        </p:nvSpPr>
-        <p:spPr>
-          <a:xfrm>
-            <a:off x="1978152" y="3364992"/>
-            <a:ext cx="1225296" cy="475488"/>
+          <p:cNvPr id="30" name="Shape 28"/>
+          <p:cNvSpPr/>
+          <p:nvPr/>
+        </p:nvSpPr>
+        <p:spPr>
+          <a:xfrm>
+            <a:off x="1975104" y="3364992"/>
+            <a:ext cx="1554480" cy="475488"/>
           </a:xfrm>
           <a:prstGeom prst="rect">
             <a:avLst>
@@ -14432,14 +14510,14 @@
       </p:sp>
       <p:sp>
         <p:nvSpPr>
-          <p:cNvPr id="30" name="Text 28"/>
-          <p:cNvSpPr/>
-          <p:nvPr/>
-        </p:nvSpPr>
-        <p:spPr>
-          <a:xfrm>
-            <a:off x="1978152" y="3364992"/>
-            <a:ext cx="1225296" cy="475488"/>
+          <p:cNvPr id="31" name="Text 29"/>
+          <p:cNvSpPr/>
+          <p:nvPr/>
+        </p:nvSpPr>
+        <p:spPr>
+          <a:xfrm>
+            <a:off x="1975104" y="3364992"/>
+            <a:ext cx="1554480" cy="475488"/>
           </a:xfrm>
           <a:prstGeom prst="rect">
             <a:avLst/>
@@ -14471,14 +14549,14 @@
       </p:sp>
       <p:sp>
         <p:nvSpPr>
-          <p:cNvPr id="31" name="Text 29"/>
-          <p:cNvSpPr/>
-          <p:nvPr/>
-        </p:nvSpPr>
-        <p:spPr>
-          <a:xfrm>
-            <a:off x="3203448" y="3364992"/>
-            <a:ext cx="76200" cy="475488"/>
+          <p:cNvPr id="32" name="Text 30"/>
+          <p:cNvSpPr/>
+          <p:nvPr/>
+        </p:nvSpPr>
+        <p:spPr>
+          <a:xfrm>
+            <a:off x="3529584" y="3364992"/>
+            <a:ext cx="73152" cy="475488"/>
           </a:xfrm>
           <a:prstGeom prst="rect">
             <a:avLst/>
@@ -14510,14 +14588,14 @@
       </p:sp>
       <p:sp>
         <p:nvSpPr>
-          <p:cNvPr id="32" name="Shape 30"/>
-          <p:cNvSpPr/>
-          <p:nvPr/>
-        </p:nvSpPr>
-        <p:spPr>
-          <a:xfrm>
-            <a:off x="3279648" y="3364992"/>
-            <a:ext cx="1225296" cy="475488"/>
+          <p:cNvPr id="33" name="Shape 31"/>
+          <p:cNvSpPr/>
+          <p:nvPr/>
+        </p:nvSpPr>
+        <p:spPr>
+          <a:xfrm>
+            <a:off x="3602736" y="3364992"/>
+            <a:ext cx="1554480" cy="475488"/>
           </a:xfrm>
           <a:prstGeom prst="rect">
             <a:avLst>
@@ -14537,14 +14615,14 @@
       </p:sp>
       <p:sp>
         <p:nvSpPr>
-          <p:cNvPr id="33" name="Text 31"/>
-          <p:cNvSpPr/>
-          <p:nvPr/>
-        </p:nvSpPr>
-        <p:spPr>
-          <a:xfrm>
-            <a:off x="3279648" y="3364992"/>
-            <a:ext cx="1225296" cy="475488"/>
+          <p:cNvPr id="34" name="Text 32"/>
+          <p:cNvSpPr/>
+          <p:nvPr/>
+        </p:nvSpPr>
+        <p:spPr>
+          <a:xfrm>
+            <a:off x="3602736" y="3364992"/>
+            <a:ext cx="1554480" cy="475488"/>
           </a:xfrm>
           <a:prstGeom prst="rect">
             <a:avLst/>
@@ -14576,14 +14654,14 @@
       </p:sp>
       <p:sp>
         <p:nvSpPr>
-          <p:cNvPr id="34" name="Text 32"/>
-          <p:cNvSpPr/>
-          <p:nvPr/>
-        </p:nvSpPr>
-        <p:spPr>
-          <a:xfrm>
-            <a:off x="4504944" y="3364992"/>
-            <a:ext cx="76200" cy="475488"/>
+          <p:cNvPr id="35" name="Text 33"/>
+          <p:cNvSpPr/>
+          <p:nvPr/>
+        </p:nvSpPr>
+        <p:spPr>
+          <a:xfrm>
+            <a:off x="5157216" y="3364992"/>
+            <a:ext cx="73152" cy="475488"/>
           </a:xfrm>
           <a:prstGeom prst="rect">
             <a:avLst/>
@@ -14615,14 +14693,14 @@
       </p:sp>
       <p:sp>
         <p:nvSpPr>
-          <p:cNvPr id="35" name="Shape 33"/>
-          <p:cNvSpPr/>
-          <p:nvPr/>
-        </p:nvSpPr>
-        <p:spPr>
-          <a:xfrm>
-            <a:off x="4581144" y="3364992"/>
-            <a:ext cx="1225296" cy="475488"/>
+          <p:cNvPr id="36" name="Shape 34"/>
+          <p:cNvSpPr/>
+          <p:nvPr/>
+        </p:nvSpPr>
+        <p:spPr>
+          <a:xfrm>
+            <a:off x="5230368" y="3364992"/>
+            <a:ext cx="1554480" cy="475488"/>
           </a:xfrm>
           <a:prstGeom prst="rect">
             <a:avLst>
@@ -14642,14 +14720,14 @@
       </p:sp>
       <p:sp>
         <p:nvSpPr>
-          <p:cNvPr id="36" name="Text 34"/>
-          <p:cNvSpPr/>
-          <p:nvPr/>
-        </p:nvSpPr>
-        <p:spPr>
-          <a:xfrm>
-            <a:off x="4581144" y="3364992"/>
-            <a:ext cx="1225296" cy="475488"/>
+          <p:cNvPr id="37" name="Text 35"/>
+          <p:cNvSpPr/>
+          <p:nvPr/>
+        </p:nvSpPr>
+        <p:spPr>
+          <a:xfrm>
+            <a:off x="5230368" y="3364992"/>
+            <a:ext cx="1554480" cy="475488"/>
           </a:xfrm>
           <a:prstGeom prst="rect">
             <a:avLst/>
@@ -14681,14 +14759,14 @@
       </p:sp>
       <p:sp>
         <p:nvSpPr>
-          <p:cNvPr id="37" name="Text 35"/>
-          <p:cNvSpPr/>
-          <p:nvPr/>
-        </p:nvSpPr>
-        <p:spPr>
-          <a:xfrm>
-            <a:off x="5806440" y="3364992"/>
-            <a:ext cx="76200" cy="475488"/>
+          <p:cNvPr id="38" name="Text 36"/>
+          <p:cNvSpPr/>
+          <p:nvPr/>
+        </p:nvSpPr>
+        <p:spPr>
+          <a:xfrm>
+            <a:off x="6784848" y="3364992"/>
+            <a:ext cx="73152" cy="475488"/>
           </a:xfrm>
           <a:prstGeom prst="rect">
             <a:avLst/>
@@ -14720,14 +14798,14 @@
       </p:sp>
       <p:sp>
         <p:nvSpPr>
-          <p:cNvPr id="38" name="Shape 36"/>
-          <p:cNvSpPr/>
-          <p:nvPr/>
-        </p:nvSpPr>
-        <p:spPr>
-          <a:xfrm>
-            <a:off x="5882640" y="3364992"/>
-            <a:ext cx="1225296" cy="475488"/>
+          <p:cNvPr id="39" name="Shape 37"/>
+          <p:cNvSpPr/>
+          <p:nvPr/>
+        </p:nvSpPr>
+        <p:spPr>
+          <a:xfrm>
+            <a:off x="6858000" y="3364992"/>
+            <a:ext cx="1554480" cy="475488"/>
           </a:xfrm>
           <a:prstGeom prst="rect">
             <a:avLst>
@@ -14747,14 +14825,14 @@
       </p:sp>
       <p:sp>
         <p:nvSpPr>
-          <p:cNvPr id="39" name="Text 37"/>
-          <p:cNvSpPr/>
-          <p:nvPr/>
-        </p:nvSpPr>
-        <p:spPr>
-          <a:xfrm>
-            <a:off x="5882640" y="3364992"/>
-            <a:ext cx="1225296" cy="475488"/>
+          <p:cNvPr id="40" name="Text 38"/>
+          <p:cNvSpPr/>
+          <p:nvPr/>
+        </p:nvSpPr>
+        <p:spPr>
+          <a:xfrm>
+            <a:off x="6858000" y="3364992"/>
+            <a:ext cx="1554480" cy="475488"/>
           </a:xfrm>
           <a:prstGeom prst="rect">
             <a:avLst/>
@@ -14786,106 +14864,67 @@
       </p:sp>
       <p:sp>
         <p:nvSpPr>
-          <p:cNvPr id="40" name="Text 38"/>
-          <p:cNvSpPr/>
-          <p:nvPr/>
-        </p:nvSpPr>
-        <p:spPr>
-          <a:xfrm>
-            <a:off x="7107936" y="3364992"/>
-            <a:ext cx="76200" cy="475488"/>
-          </a:xfrm>
-          <a:prstGeom prst="rect">
-            <a:avLst/>
-          </a:prstGeom>
-          <a:noFill/>
-          <a:ln/>
-        </p:spPr>
-        <p:txBody>
-          <a:bodyPr wrap="square" lIns="0" tIns="0" rIns="0" bIns="0" rtlCol="0" anchor="ctr"/>
-          <a:lstStyle/>
-          <a:p>
-            <a:pPr algn="ctr" indent="0" marL="0">
-              <a:buNone/>
-            </a:pPr>
-            <a:r>
-              <a:rPr lang="en-US" sz="1600" b="1" dirty="0">
-                <a:solidFill>
-                  <a:srgbClr val="0D9488"/>
+          <p:cNvPr id="41" name="Shape 39"/>
+          <p:cNvSpPr/>
+          <p:nvPr/>
+        </p:nvSpPr>
+        <p:spPr>
+          <a:xfrm>
+            <a:off x="365760" y="4096512"/>
+            <a:ext cx="1371600" cy="804672"/>
+          </a:xfrm>
+          <a:prstGeom prst="rect">
+            <a:avLst>
+              <a:gd name="adj" fmla="val 6818"/>
+            </a:avLst>
+          </a:prstGeom>
+          <a:solidFill>
+            <a:srgbClr val="E2E8F0"/>
+          </a:solidFill>
+          <a:ln w="12700">
+            <a:solidFill>
+              <a:srgbClr val="E2E8F0"/>
+            </a:solidFill>
+            <a:prstDash val="solid"/>
+          </a:ln>
+        </p:spPr>
+      </p:sp>
+      <p:sp>
+        <p:nvSpPr>
+          <p:cNvPr id="42" name="Text 40"/>
+          <p:cNvSpPr/>
+          <p:nvPr/>
+        </p:nvSpPr>
+        <p:spPr>
+          <a:xfrm>
+            <a:off x="365760" y="4096512"/>
+            <a:ext cx="1371600" cy="804672"/>
+          </a:xfrm>
+          <a:prstGeom prst="rect">
+            <a:avLst/>
+          </a:prstGeom>
+          <a:noFill/>
+          <a:ln/>
+        </p:spPr>
+        <p:txBody>
+          <a:bodyPr wrap="square" lIns="0" tIns="0" rIns="0" bIns="0" rtlCol="0" anchor="ctr"/>
+          <a:lstStyle/>
+          <a:p>
+            <a:pPr algn="ctr" indent="0" marL="0">
+              <a:buNone/>
+            </a:pPr>
+            <a:r>
+              <a:rPr lang="en-US" sz="1100" b="1" dirty="0">
+                <a:solidFill>
+                  <a:srgbClr val="475569"/>
                 </a:solidFill>
                 <a:latin typeface="Trebuchet MS" pitchFamily="34" charset="0"/>
                 <a:ea typeface="Trebuchet MS" pitchFamily="34" charset="-122"/>
                 <a:cs typeface="Trebuchet MS" pitchFamily="34" charset="-120"/>
               </a:rPr>
-              <a:t>·</a:t>
-            </a:r>
-            <a:endParaRPr lang="en-US" sz="1600" dirty="0"/>
-          </a:p>
-        </p:txBody>
-      </p:sp>
-      <p:sp>
-        <p:nvSpPr>
-          <p:cNvPr id="41" name="Shape 39"/>
-          <p:cNvSpPr/>
-          <p:nvPr/>
-        </p:nvSpPr>
-        <p:spPr>
-          <a:xfrm>
-            <a:off x="7184136" y="3364992"/>
-            <a:ext cx="1225296" cy="475488"/>
-          </a:xfrm>
-          <a:prstGeom prst="rect">
-            <a:avLst>
-              <a:gd name="adj" fmla="val 9615"/>
-            </a:avLst>
-          </a:prstGeom>
-          <a:solidFill>
-            <a:srgbClr val="FFFFFF"/>
-          </a:solidFill>
-          <a:ln w="12700">
-            <a:solidFill>
-              <a:srgbClr val="0D9488"/>
-            </a:solidFill>
-            <a:prstDash val="solid"/>
-          </a:ln>
-        </p:spPr>
-      </p:sp>
-      <p:sp>
-        <p:nvSpPr>
-          <p:cNvPr id="42" name="Text 40"/>
-          <p:cNvSpPr/>
-          <p:nvPr/>
-        </p:nvSpPr>
-        <p:spPr>
-          <a:xfrm>
-            <a:off x="7184136" y="3364992"/>
-            <a:ext cx="1225296" cy="475488"/>
-          </a:xfrm>
-          <a:prstGeom prst="rect">
-            <a:avLst/>
-          </a:prstGeom>
-          <a:noFill/>
-          <a:ln/>
-        </p:spPr>
-        <p:txBody>
-          <a:bodyPr wrap="square" lIns="0" tIns="0" rIns="0" bIns="0" rtlCol="0" anchor="ctr"/>
-          <a:lstStyle/>
-          <a:p>
-            <a:pPr algn="ctr" indent="0" marL="0">
-              <a:buNone/>
-            </a:pPr>
-            <a:r>
-              <a:rPr lang="en-US" sz="1400" b="1" dirty="0">
-                <a:solidFill>
-                  <a:srgbClr val="0D9488"/>
-                </a:solidFill>
-                <a:latin typeface="Trebuchet MS" pitchFamily="34" charset="0"/>
-                <a:ea typeface="Trebuchet MS" pitchFamily="34" charset="-122"/>
-                <a:cs typeface="Trebuchet MS" pitchFamily="34" charset="-120"/>
-              </a:rPr>
-              <a:t>al</a:t>
-            </a:r>
-            <a:endParaRPr lang="en-US" sz="1400" dirty="0"/>
+              <a:t>Phonemes</a:t>
+            </a:r>
+            <a:endParaRPr lang="en-US" sz="1100" dirty="0"/>
           </a:p>
         </p:txBody>
       </p:sp>
@@ -14897,8 +14936,8 @@
         </p:nvSpPr>
         <p:spPr>
           <a:xfrm>
-            <a:off x="365760" y="4096512"/>
-            <a:ext cx="1371600" cy="804672"/>
+            <a:off x="1874520" y="4096512"/>
+            <a:ext cx="6903720" cy="804672"/>
           </a:xfrm>
           <a:prstGeom prst="rect">
             <a:avLst>
@@ -14906,85 +14945,19 @@
             </a:avLst>
           </a:prstGeom>
           <a:solidFill>
-            <a:srgbClr val="E2E8F0"/>
+            <a:srgbClr val="F8FAFC"/>
           </a:solidFill>
           <a:ln w="12700">
             <a:solidFill>
               <a:srgbClr val="E2E8F0"/>
             </a:solidFill>
-            <a:prstDash val="solid"/>
+            <a:prstDash val="dash"/>
           </a:ln>
         </p:spPr>
       </p:sp>
       <p:sp>
         <p:nvSpPr>
           <p:cNvPr id="44" name="Text 42"/>
-          <p:cNvSpPr/>
-          <p:nvPr/>
-        </p:nvSpPr>
-        <p:spPr>
-          <a:xfrm>
-            <a:off x="365760" y="4096512"/>
-            <a:ext cx="1371600" cy="804672"/>
-          </a:xfrm>
-          <a:prstGeom prst="rect">
-            <a:avLst/>
-          </a:prstGeom>
-          <a:noFill/>
-          <a:ln/>
-        </p:spPr>
-        <p:txBody>
-          <a:bodyPr wrap="square" lIns="0" tIns="0" rIns="0" bIns="0" rtlCol="0" anchor="ctr"/>
-          <a:lstStyle/>
-          <a:p>
-            <a:pPr algn="ctr" indent="0" marL="0">
-              <a:buNone/>
-            </a:pPr>
-            <a:r>
-              <a:rPr lang="en-US" sz="1100" b="1" dirty="0">
-                <a:solidFill>
-                  <a:srgbClr val="475569"/>
-                </a:solidFill>
-                <a:latin typeface="Trebuchet MS" pitchFamily="34" charset="0"/>
-                <a:ea typeface="Trebuchet MS" pitchFamily="34" charset="-122"/>
-                <a:cs typeface="Trebuchet MS" pitchFamily="34" charset="-120"/>
-              </a:rPr>
-              <a:t>Phonemes</a:t>
-            </a:r>
-            <a:endParaRPr lang="en-US" sz="1100" dirty="0"/>
-          </a:p>
-        </p:txBody>
-      </p:sp>
-      <p:sp>
-        <p:nvSpPr>
-          <p:cNvPr id="45" name="Shape 43"/>
-          <p:cNvSpPr/>
-          <p:nvPr/>
-        </p:nvSpPr>
-        <p:spPr>
-          <a:xfrm>
-            <a:off x="1874520" y="4096512"/>
-            <a:ext cx="6903720" cy="804672"/>
-          </a:xfrm>
-          <a:prstGeom prst="rect">
-            <a:avLst>
-              <a:gd name="adj" fmla="val 6818"/>
-            </a:avLst>
-          </a:prstGeom>
-          <a:solidFill>
-            <a:srgbClr val="F8FAFC"/>
-          </a:solidFill>
-          <a:ln w="12700">
-            <a:solidFill>
-              <a:srgbClr val="E2E8F0"/>
-            </a:solidFill>
-            <a:prstDash val="dash"/>
-          </a:ln>
-        </p:spPr>
-      </p:sp>
-      <p:sp>
-        <p:nvSpPr>
-          <p:cNvPr id="46" name="Text 44"/>
           <p:cNvSpPr/>
           <p:nvPr/>
         </p:nvSpPr>
@@ -15216,7 +15189,7 @@
                 <a:ea typeface="Calibri" pitchFamily="34" charset="-122"/>
                 <a:cs typeface="Calibri" pitchFamily="34" charset="-120"/>
               </a:rPr>
-              <a:t>Root 'educate' — to lead out knowledge</a:t>
+              <a:t>Root 'educate' — to lead out, teach</a:t>
             </a:r>
             <a:endParaRPr lang="en-US" sz="1600" dirty="0"/>
           </a:p>
@@ -15572,7 +15545,7 @@
                 <a:ea typeface="Calibri" pitchFamily="34" charset="-122"/>
                 <a:cs typeface="Calibri" pitchFamily="34" charset="-120"/>
               </a:rPr>
-              <a:t>Word Labs  •  wordlabs.app  •  Root: 'educate' = to lead out knowledge</a:t>
+              <a:t>Word Labs  •  wordlabs.app  •  Root: 'educate' = to lead out, teach</a:t>
             </a:r>
             <a:endParaRPr lang="en-US" sz="800" dirty="0"/>
           </a:p>
@@ -15711,7 +15684,7 @@
                 <a:ea typeface="Trebuchet MS" pitchFamily="34" charset="-122"/>
                 <a:cs typeface="Trebuchet MS" pitchFamily="34" charset="-120"/>
               </a:rPr>
-              <a:t>educational</a:t>
+              <a:t>education</a:t>
             </a:r>
             <a:endParaRPr lang="en-US" sz="2800" dirty="0"/>
           </a:p>
@@ -15889,7 +15862,7 @@
                 <a:ea typeface="Calibri" pitchFamily="34" charset="-122"/>
                 <a:cs typeface="Calibri" pitchFamily="34" charset="-120"/>
               </a:rPr>
-              <a:t>to lead out knowledge</a:t>
+              <a:t>to lead out, teach</a:t>
             </a:r>
             <a:endParaRPr lang="en-US" sz="850" dirty="0"/>
           </a:p>
@@ -16001,7 +15974,7 @@
                 <a:ea typeface="Trebuchet MS" pitchFamily="34" charset="-122"/>
                 <a:cs typeface="Trebuchet MS" pitchFamily="34" charset="-120"/>
               </a:rPr>
-              <a:t>ion</a:t>
+              <a:t>a</a:t>
             </a:r>
             <a:endParaRPr lang="en-US" sz="1300" dirty="0"/>
           </a:p>
@@ -16040,7 +16013,7 @@
                 <a:ea typeface="Calibri" pitchFamily="34" charset="-122"/>
                 <a:cs typeface="Calibri" pitchFamily="34" charset="-120"/>
               </a:rPr>
-              <a:t>act or process of</a:t>
+              <a:t>connecting vowel</a:t>
             </a:r>
             <a:endParaRPr lang="en-US" sz="850" dirty="0"/>
           </a:p>
@@ -16048,7 +16021,46 @@
       </p:sp>
       <p:sp>
         <p:nvSpPr>
-          <p:cNvPr id="23" name="Shape 21"/>
+          <p:cNvPr id="23" name="Text 21"/>
+          <p:cNvSpPr/>
+          <p:nvPr/>
+        </p:nvSpPr>
+        <p:spPr>
+          <a:xfrm>
+            <a:off x="4370832" y="2752344"/>
+            <a:ext cx="1828800" cy="182880"/>
+          </a:xfrm>
+          <a:prstGeom prst="rect">
+            <a:avLst/>
+          </a:prstGeom>
+          <a:noFill/>
+          <a:ln/>
+        </p:spPr>
+        <p:txBody>
+          <a:bodyPr wrap="square" lIns="0" tIns="0" rIns="0" bIns="0" rtlCol="0" anchor="t"/>
+          <a:lstStyle/>
+          <a:p>
+            <a:pPr algn="ctr" indent="0" marL="0">
+              <a:buNone/>
+            </a:pPr>
+            <a:r>
+              <a:rPr lang="en-US" sz="700" i="1" dirty="0">
+                <a:solidFill>
+                  <a:srgbClr val="94A3B8"/>
+                </a:solidFill>
+                <a:latin typeface="Calibri" pitchFamily="34" charset="0"/>
+                <a:ea typeface="Calibri" pitchFamily="34" charset="-122"/>
+                <a:cs typeface="Calibri" pitchFamily="34" charset="-120"/>
+              </a:rPr>
+              <a:t>links base to suffix</a:t>
+            </a:r>
+            <a:endParaRPr lang="en-US" sz="700" dirty="0"/>
+          </a:p>
+        </p:txBody>
+      </p:sp>
+      <p:sp>
+        <p:nvSpPr>
+          <p:cNvPr id="24" name="Shape 22"/>
           <p:cNvSpPr/>
           <p:nvPr/>
         </p:nvSpPr>
@@ -16082,7 +16094,7 @@
       </p:sp>
       <p:sp>
         <p:nvSpPr>
-          <p:cNvPr id="24" name="Text 22"/>
+          <p:cNvPr id="25" name="Text 23"/>
           <p:cNvSpPr/>
           <p:nvPr/>
         </p:nvSpPr>
@@ -16113,7 +16125,7 @@
                 <a:ea typeface="Trebuchet MS" pitchFamily="34" charset="-122"/>
                 <a:cs typeface="Trebuchet MS" pitchFamily="34" charset="-120"/>
               </a:rPr>
-              <a:t>al</a:t>
+              <a:t>tion</a:t>
             </a:r>
             <a:endParaRPr lang="en-US" sz="1300" dirty="0"/>
           </a:p>
@@ -16121,7 +16133,7 @@
       </p:sp>
       <p:sp>
         <p:nvSpPr>
-          <p:cNvPr id="25" name="Text 23"/>
+          <p:cNvPr id="26" name="Text 24"/>
           <p:cNvSpPr/>
           <p:nvPr/>
         </p:nvSpPr>
@@ -16152,7 +16164,7 @@
                 <a:ea typeface="Calibri" pitchFamily="34" charset="-122"/>
                 <a:cs typeface="Calibri" pitchFamily="34" charset="-120"/>
               </a:rPr>
-              <a:t>relating to</a:t>
+              <a:t>act or process of</a:t>
             </a:r>
             <a:endParaRPr lang="en-US" sz="850" dirty="0"/>
           </a:p>
@@ -16160,7 +16172,7 @@
       </p:sp>
       <p:sp>
         <p:nvSpPr>
-          <p:cNvPr id="26" name="Shape 24"/>
+          <p:cNvPr id="27" name="Shape 25"/>
           <p:cNvSpPr/>
           <p:nvPr/>
         </p:nvSpPr>
@@ -16187,7 +16199,7 @@
       </p:sp>
       <p:sp>
         <p:nvSpPr>
-          <p:cNvPr id="27" name="Text 25"/>
+          <p:cNvPr id="28" name="Text 26"/>
           <p:cNvSpPr/>
           <p:nvPr/>
         </p:nvSpPr>
@@ -16226,7 +16238,7 @@
       </p:sp>
       <p:sp>
         <p:nvSpPr>
-          <p:cNvPr id="28" name="Shape 26"/>
+          <p:cNvPr id="29" name="Shape 27"/>
           <p:cNvSpPr/>
           <p:nvPr/>
         </p:nvSpPr>
@@ -16253,14 +16265,14 @@
       </p:sp>
       <p:sp>
         <p:nvSpPr>
-          <p:cNvPr id="29" name="Shape 27"/>
-          <p:cNvSpPr/>
-          <p:nvPr/>
-        </p:nvSpPr>
-        <p:spPr>
-          <a:xfrm>
-            <a:off x="1978152" y="3364992"/>
-            <a:ext cx="1225296" cy="475488"/>
+          <p:cNvPr id="30" name="Shape 28"/>
+          <p:cNvSpPr/>
+          <p:nvPr/>
+        </p:nvSpPr>
+        <p:spPr>
+          <a:xfrm>
+            <a:off x="1975104" y="3364992"/>
+            <a:ext cx="1554480" cy="475488"/>
           </a:xfrm>
           <a:prstGeom prst="rect">
             <a:avLst>
@@ -16280,14 +16292,14 @@
       </p:sp>
       <p:sp>
         <p:nvSpPr>
-          <p:cNvPr id="30" name="Text 28"/>
-          <p:cNvSpPr/>
-          <p:nvPr/>
-        </p:nvSpPr>
-        <p:spPr>
-          <a:xfrm>
-            <a:off x="1978152" y="3364992"/>
-            <a:ext cx="1225296" cy="475488"/>
+          <p:cNvPr id="31" name="Text 29"/>
+          <p:cNvSpPr/>
+          <p:nvPr/>
+        </p:nvSpPr>
+        <p:spPr>
+          <a:xfrm>
+            <a:off x="1975104" y="3364992"/>
+            <a:ext cx="1554480" cy="475488"/>
           </a:xfrm>
           <a:prstGeom prst="rect">
             <a:avLst/>
@@ -16319,14 +16331,14 @@
       </p:sp>
       <p:sp>
         <p:nvSpPr>
-          <p:cNvPr id="31" name="Text 29"/>
-          <p:cNvSpPr/>
-          <p:nvPr/>
-        </p:nvSpPr>
-        <p:spPr>
-          <a:xfrm>
-            <a:off x="3203448" y="3364992"/>
-            <a:ext cx="76200" cy="475488"/>
+          <p:cNvPr id="32" name="Text 30"/>
+          <p:cNvSpPr/>
+          <p:nvPr/>
+        </p:nvSpPr>
+        <p:spPr>
+          <a:xfrm>
+            <a:off x="3529584" y="3364992"/>
+            <a:ext cx="73152" cy="475488"/>
           </a:xfrm>
           <a:prstGeom prst="rect">
             <a:avLst/>
@@ -16358,14 +16370,14 @@
       </p:sp>
       <p:sp>
         <p:nvSpPr>
-          <p:cNvPr id="32" name="Shape 30"/>
-          <p:cNvSpPr/>
-          <p:nvPr/>
-        </p:nvSpPr>
-        <p:spPr>
-          <a:xfrm>
-            <a:off x="3279648" y="3364992"/>
-            <a:ext cx="1225296" cy="475488"/>
+          <p:cNvPr id="33" name="Shape 31"/>
+          <p:cNvSpPr/>
+          <p:nvPr/>
+        </p:nvSpPr>
+        <p:spPr>
+          <a:xfrm>
+            <a:off x="3602736" y="3364992"/>
+            <a:ext cx="1554480" cy="475488"/>
           </a:xfrm>
           <a:prstGeom prst="rect">
             <a:avLst>
@@ -16385,14 +16397,14 @@
       </p:sp>
       <p:sp>
         <p:nvSpPr>
-          <p:cNvPr id="33" name="Text 31"/>
-          <p:cNvSpPr/>
-          <p:nvPr/>
-        </p:nvSpPr>
-        <p:spPr>
-          <a:xfrm>
-            <a:off x="3279648" y="3364992"/>
-            <a:ext cx="1225296" cy="475488"/>
+          <p:cNvPr id="34" name="Text 32"/>
+          <p:cNvSpPr/>
+          <p:nvPr/>
+        </p:nvSpPr>
+        <p:spPr>
+          <a:xfrm>
+            <a:off x="3602736" y="3364992"/>
+            <a:ext cx="1554480" cy="475488"/>
           </a:xfrm>
           <a:prstGeom prst="rect">
             <a:avLst/>
@@ -16424,14 +16436,14 @@
       </p:sp>
       <p:sp>
         <p:nvSpPr>
-          <p:cNvPr id="34" name="Text 32"/>
-          <p:cNvSpPr/>
-          <p:nvPr/>
-        </p:nvSpPr>
-        <p:spPr>
-          <a:xfrm>
-            <a:off x="4504944" y="3364992"/>
-            <a:ext cx="76200" cy="475488"/>
+          <p:cNvPr id="35" name="Text 33"/>
+          <p:cNvSpPr/>
+          <p:nvPr/>
+        </p:nvSpPr>
+        <p:spPr>
+          <a:xfrm>
+            <a:off x="5157216" y="3364992"/>
+            <a:ext cx="73152" cy="475488"/>
           </a:xfrm>
           <a:prstGeom prst="rect">
             <a:avLst/>
@@ -16463,14 +16475,14 @@
       </p:sp>
       <p:sp>
         <p:nvSpPr>
-          <p:cNvPr id="35" name="Shape 33"/>
-          <p:cNvSpPr/>
-          <p:nvPr/>
-        </p:nvSpPr>
-        <p:spPr>
-          <a:xfrm>
-            <a:off x="4581144" y="3364992"/>
-            <a:ext cx="1225296" cy="475488"/>
+          <p:cNvPr id="36" name="Shape 34"/>
+          <p:cNvSpPr/>
+          <p:nvPr/>
+        </p:nvSpPr>
+        <p:spPr>
+          <a:xfrm>
+            <a:off x="5230368" y="3364992"/>
+            <a:ext cx="1554480" cy="475488"/>
           </a:xfrm>
           <a:prstGeom prst="rect">
             <a:avLst>
@@ -16490,14 +16502,14 @@
       </p:sp>
       <p:sp>
         <p:nvSpPr>
-          <p:cNvPr id="36" name="Text 34"/>
-          <p:cNvSpPr/>
-          <p:nvPr/>
-        </p:nvSpPr>
-        <p:spPr>
-          <a:xfrm>
-            <a:off x="4581144" y="3364992"/>
-            <a:ext cx="1225296" cy="475488"/>
+          <p:cNvPr id="37" name="Text 35"/>
+          <p:cNvSpPr/>
+          <p:nvPr/>
+        </p:nvSpPr>
+        <p:spPr>
+          <a:xfrm>
+            <a:off x="5230368" y="3364992"/>
+            <a:ext cx="1554480" cy="475488"/>
           </a:xfrm>
           <a:prstGeom prst="rect">
             <a:avLst/>
@@ -16529,14 +16541,14 @@
       </p:sp>
       <p:sp>
         <p:nvSpPr>
-          <p:cNvPr id="37" name="Text 35"/>
-          <p:cNvSpPr/>
-          <p:nvPr/>
-        </p:nvSpPr>
-        <p:spPr>
-          <a:xfrm>
-            <a:off x="5806440" y="3364992"/>
-            <a:ext cx="76200" cy="475488"/>
+          <p:cNvPr id="38" name="Text 36"/>
+          <p:cNvSpPr/>
+          <p:nvPr/>
+        </p:nvSpPr>
+        <p:spPr>
+          <a:xfrm>
+            <a:off x="6784848" y="3364992"/>
+            <a:ext cx="73152" cy="475488"/>
           </a:xfrm>
           <a:prstGeom prst="rect">
             <a:avLst/>
@@ -16568,14 +16580,14 @@
       </p:sp>
       <p:sp>
         <p:nvSpPr>
-          <p:cNvPr id="38" name="Shape 36"/>
-          <p:cNvSpPr/>
-          <p:nvPr/>
-        </p:nvSpPr>
-        <p:spPr>
-          <a:xfrm>
-            <a:off x="5882640" y="3364992"/>
-            <a:ext cx="1225296" cy="475488"/>
+          <p:cNvPr id="39" name="Shape 37"/>
+          <p:cNvSpPr/>
+          <p:nvPr/>
+        </p:nvSpPr>
+        <p:spPr>
+          <a:xfrm>
+            <a:off x="6858000" y="3364992"/>
+            <a:ext cx="1554480" cy="475488"/>
           </a:xfrm>
           <a:prstGeom prst="rect">
             <a:avLst>
@@ -16595,14 +16607,14 @@
       </p:sp>
       <p:sp>
         <p:nvSpPr>
-          <p:cNvPr id="39" name="Text 37"/>
-          <p:cNvSpPr/>
-          <p:nvPr/>
-        </p:nvSpPr>
-        <p:spPr>
-          <a:xfrm>
-            <a:off x="5882640" y="3364992"/>
-            <a:ext cx="1225296" cy="475488"/>
+          <p:cNvPr id="40" name="Text 38"/>
+          <p:cNvSpPr/>
+          <p:nvPr/>
+        </p:nvSpPr>
+        <p:spPr>
+          <a:xfrm>
+            <a:off x="6858000" y="3364992"/>
+            <a:ext cx="1554480" cy="475488"/>
           </a:xfrm>
           <a:prstGeom prst="rect">
             <a:avLst/>
@@ -16634,212 +16646,239 @@
       </p:sp>
       <p:sp>
         <p:nvSpPr>
-          <p:cNvPr id="40" name="Text 38"/>
-          <p:cNvSpPr/>
-          <p:nvPr/>
-        </p:nvSpPr>
-        <p:spPr>
-          <a:xfrm>
-            <a:off x="7107936" y="3364992"/>
-            <a:ext cx="76200" cy="475488"/>
-          </a:xfrm>
-          <a:prstGeom prst="rect">
-            <a:avLst/>
-          </a:prstGeom>
-          <a:noFill/>
-          <a:ln/>
-        </p:spPr>
-        <p:txBody>
-          <a:bodyPr wrap="square" lIns="0" tIns="0" rIns="0" bIns="0" rtlCol="0" anchor="ctr"/>
-          <a:lstStyle/>
-          <a:p>
-            <a:pPr algn="ctr" indent="0" marL="0">
-              <a:buNone/>
-            </a:pPr>
-            <a:r>
-              <a:rPr lang="en-US" sz="1600" b="1" dirty="0">
-                <a:solidFill>
-                  <a:srgbClr val="0D9488"/>
+          <p:cNvPr id="41" name="Shape 39"/>
+          <p:cNvSpPr/>
+          <p:nvPr/>
+        </p:nvSpPr>
+        <p:spPr>
+          <a:xfrm>
+            <a:off x="365760" y="4096512"/>
+            <a:ext cx="1371600" cy="804672"/>
+          </a:xfrm>
+          <a:prstGeom prst="rect">
+            <a:avLst>
+              <a:gd name="adj" fmla="val 6818"/>
+            </a:avLst>
+          </a:prstGeom>
+          <a:solidFill>
+            <a:srgbClr val="E2E8F0"/>
+          </a:solidFill>
+          <a:ln w="12700">
+            <a:solidFill>
+              <a:srgbClr val="E2E8F0"/>
+            </a:solidFill>
+            <a:prstDash val="solid"/>
+          </a:ln>
+        </p:spPr>
+      </p:sp>
+      <p:sp>
+        <p:nvSpPr>
+          <p:cNvPr id="42" name="Text 40"/>
+          <p:cNvSpPr/>
+          <p:nvPr/>
+        </p:nvSpPr>
+        <p:spPr>
+          <a:xfrm>
+            <a:off x="365760" y="4096512"/>
+            <a:ext cx="1371600" cy="804672"/>
+          </a:xfrm>
+          <a:prstGeom prst="rect">
+            <a:avLst/>
+          </a:prstGeom>
+          <a:noFill/>
+          <a:ln/>
+        </p:spPr>
+        <p:txBody>
+          <a:bodyPr wrap="square" lIns="0" tIns="0" rIns="0" bIns="0" rtlCol="0" anchor="ctr"/>
+          <a:lstStyle/>
+          <a:p>
+            <a:pPr algn="ctr" indent="0" marL="0">
+              <a:buNone/>
+            </a:pPr>
+            <a:r>
+              <a:rPr lang="en-US" sz="1100" b="1" dirty="0">
+                <a:solidFill>
+                  <a:srgbClr val="475569"/>
                 </a:solidFill>
                 <a:latin typeface="Trebuchet MS" pitchFamily="34" charset="0"/>
                 <a:ea typeface="Trebuchet MS" pitchFamily="34" charset="-122"/>
                 <a:cs typeface="Trebuchet MS" pitchFamily="34" charset="-120"/>
               </a:rPr>
-              <a:t>·</a:t>
-            </a:r>
-            <a:endParaRPr lang="en-US" sz="1600" dirty="0"/>
-          </a:p>
-        </p:txBody>
-      </p:sp>
-      <p:sp>
-        <p:nvSpPr>
-          <p:cNvPr id="41" name="Shape 39"/>
-          <p:cNvSpPr/>
-          <p:nvPr/>
-        </p:nvSpPr>
-        <p:spPr>
-          <a:xfrm>
-            <a:off x="7184136" y="3364992"/>
-            <a:ext cx="1225296" cy="475488"/>
+              <a:t>Phonemes</a:t>
+            </a:r>
+            <a:endParaRPr lang="en-US" sz="1100" dirty="0"/>
+          </a:p>
+        </p:txBody>
+      </p:sp>
+      <p:sp>
+        <p:nvSpPr>
+          <p:cNvPr id="43" name="Shape 41"/>
+          <p:cNvSpPr/>
+          <p:nvPr/>
+        </p:nvSpPr>
+        <p:spPr>
+          <a:xfrm>
+            <a:off x="1874520" y="4096512"/>
+            <a:ext cx="6903720" cy="804672"/>
           </a:xfrm>
           <a:prstGeom prst="rect">
             <a:avLst>
-              <a:gd name="adj" fmla="val 9615"/>
+              <a:gd name="adj" fmla="val 6818"/>
             </a:avLst>
           </a:prstGeom>
           <a:solidFill>
+            <a:srgbClr val="FCE7F3"/>
+          </a:solidFill>
+          <a:ln w="12700">
+            <a:solidFill>
+              <a:srgbClr val="DB2777"/>
+            </a:solidFill>
+            <a:prstDash val="solid"/>
+          </a:ln>
+        </p:spPr>
+      </p:sp>
+      <p:sp>
+        <p:nvSpPr>
+          <p:cNvPr id="44" name="Shape 42"/>
+          <p:cNvSpPr/>
+          <p:nvPr/>
+        </p:nvSpPr>
+        <p:spPr>
+          <a:xfrm>
+            <a:off x="2023872" y="4169664"/>
+            <a:ext cx="685800" cy="384048"/>
+          </a:xfrm>
+          <a:prstGeom prst="rect">
+            <a:avLst>
+              <a:gd name="adj" fmla="val 9524"/>
+            </a:avLst>
+          </a:prstGeom>
+          <a:solidFill>
             <a:srgbClr val="FFFFFF"/>
           </a:solidFill>
           <a:ln w="12700">
             <a:solidFill>
-              <a:srgbClr val="0D9488"/>
-            </a:solidFill>
-            <a:prstDash val="solid"/>
-          </a:ln>
-        </p:spPr>
-      </p:sp>
-      <p:sp>
-        <p:nvSpPr>
-          <p:cNvPr id="42" name="Text 40"/>
-          <p:cNvSpPr/>
-          <p:nvPr/>
-        </p:nvSpPr>
-        <p:spPr>
-          <a:xfrm>
-            <a:off x="7184136" y="3364992"/>
-            <a:ext cx="1225296" cy="475488"/>
-          </a:xfrm>
-          <a:prstGeom prst="rect">
-            <a:avLst/>
-          </a:prstGeom>
-          <a:noFill/>
-          <a:ln/>
-        </p:spPr>
-        <p:txBody>
-          <a:bodyPr wrap="square" lIns="0" tIns="0" rIns="0" bIns="0" rtlCol="0" anchor="ctr"/>
-          <a:lstStyle/>
-          <a:p>
-            <a:pPr algn="ctr" indent="0" marL="0">
-              <a:buNone/>
-            </a:pPr>
-            <a:r>
-              <a:rPr lang="en-US" sz="1400" b="1" dirty="0">
-                <a:solidFill>
-                  <a:srgbClr val="0D9488"/>
+              <a:srgbClr val="DB2777"/>
+            </a:solidFill>
+            <a:prstDash val="solid"/>
+          </a:ln>
+        </p:spPr>
+      </p:sp>
+      <p:sp>
+        <p:nvSpPr>
+          <p:cNvPr id="45" name="Text 43"/>
+          <p:cNvSpPr/>
+          <p:nvPr/>
+        </p:nvSpPr>
+        <p:spPr>
+          <a:xfrm>
+            <a:off x="2023872" y="4169664"/>
+            <a:ext cx="685800" cy="384048"/>
+          </a:xfrm>
+          <a:prstGeom prst="rect">
+            <a:avLst/>
+          </a:prstGeom>
+          <a:noFill/>
+          <a:ln/>
+        </p:spPr>
+        <p:txBody>
+          <a:bodyPr wrap="square" lIns="0" tIns="0" rIns="0" bIns="0" rtlCol="0" anchor="ctr"/>
+          <a:lstStyle/>
+          <a:p>
+            <a:pPr algn="ctr" indent="0" marL="0">
+              <a:buNone/>
+            </a:pPr>
+            <a:r>
+              <a:rPr lang="en-US" sz="900" b="1" dirty="0">
+                <a:solidFill>
+                  <a:srgbClr val="9D174D"/>
                 </a:solidFill>
                 <a:latin typeface="Trebuchet MS" pitchFamily="34" charset="0"/>
                 <a:ea typeface="Trebuchet MS" pitchFamily="34" charset="-122"/>
                 <a:cs typeface="Trebuchet MS" pitchFamily="34" charset="-120"/>
               </a:rPr>
-              <a:t>al</a:t>
-            </a:r>
-            <a:endParaRPr lang="en-US" sz="1400" dirty="0"/>
-          </a:p>
-        </p:txBody>
-      </p:sp>
-      <p:sp>
-        <p:nvSpPr>
-          <p:cNvPr id="43" name="Shape 41"/>
-          <p:cNvSpPr/>
-          <p:nvPr/>
-        </p:nvSpPr>
-        <p:spPr>
-          <a:xfrm>
-            <a:off x="365760" y="4096512"/>
-            <a:ext cx="1371600" cy="804672"/>
+              <a:t>e</a:t>
+            </a:r>
+            <a:endParaRPr lang="en-US" sz="900" dirty="0"/>
+          </a:p>
+        </p:txBody>
+      </p:sp>
+      <p:sp>
+        <p:nvSpPr>
+          <p:cNvPr id="46" name="Shape 44"/>
+          <p:cNvSpPr/>
+          <p:nvPr/>
+        </p:nvSpPr>
+        <p:spPr>
+          <a:xfrm>
+            <a:off x="2831592" y="4169664"/>
+            <a:ext cx="685800" cy="384048"/>
           </a:xfrm>
           <a:prstGeom prst="rect">
             <a:avLst>
-              <a:gd name="adj" fmla="val 6818"/>
+              <a:gd name="adj" fmla="val 9524"/>
             </a:avLst>
           </a:prstGeom>
           <a:solidFill>
-            <a:srgbClr val="E2E8F0"/>
-          </a:solidFill>
-          <a:ln w="12700">
-            <a:solidFill>
-              <a:srgbClr val="E2E8F0"/>
-            </a:solidFill>
-            <a:prstDash val="solid"/>
-          </a:ln>
-        </p:spPr>
-      </p:sp>
-      <p:sp>
-        <p:nvSpPr>
-          <p:cNvPr id="44" name="Text 42"/>
-          <p:cNvSpPr/>
-          <p:nvPr/>
-        </p:nvSpPr>
-        <p:spPr>
-          <a:xfrm>
-            <a:off x="365760" y="4096512"/>
-            <a:ext cx="1371600" cy="804672"/>
-          </a:xfrm>
-          <a:prstGeom prst="rect">
-            <a:avLst/>
-          </a:prstGeom>
-          <a:noFill/>
-          <a:ln/>
-        </p:spPr>
-        <p:txBody>
-          <a:bodyPr wrap="square" lIns="0" tIns="0" rIns="0" bIns="0" rtlCol="0" anchor="ctr"/>
-          <a:lstStyle/>
-          <a:p>
-            <a:pPr algn="ctr" indent="0" marL="0">
-              <a:buNone/>
-            </a:pPr>
-            <a:r>
-              <a:rPr lang="en-US" sz="1100" b="1" dirty="0">
-                <a:solidFill>
-                  <a:srgbClr val="475569"/>
+            <a:srgbClr val="FFFFFF"/>
+          </a:solidFill>
+          <a:ln w="12700">
+            <a:solidFill>
+              <a:srgbClr val="DB2777"/>
+            </a:solidFill>
+            <a:prstDash val="solid"/>
+          </a:ln>
+        </p:spPr>
+      </p:sp>
+      <p:sp>
+        <p:nvSpPr>
+          <p:cNvPr id="47" name="Text 45"/>
+          <p:cNvSpPr/>
+          <p:nvPr/>
+        </p:nvSpPr>
+        <p:spPr>
+          <a:xfrm>
+            <a:off x="2831592" y="4169664"/>
+            <a:ext cx="685800" cy="384048"/>
+          </a:xfrm>
+          <a:prstGeom prst="rect">
+            <a:avLst/>
+          </a:prstGeom>
+          <a:noFill/>
+          <a:ln/>
+        </p:spPr>
+        <p:txBody>
+          <a:bodyPr wrap="square" lIns="0" tIns="0" rIns="0" bIns="0" rtlCol="0" anchor="ctr"/>
+          <a:lstStyle/>
+          <a:p>
+            <a:pPr algn="ctr" indent="0" marL="0">
+              <a:buNone/>
+            </a:pPr>
+            <a:r>
+              <a:rPr lang="en-US" sz="900" b="1" dirty="0">
+                <a:solidFill>
+                  <a:srgbClr val="9D174D"/>
                 </a:solidFill>
                 <a:latin typeface="Trebuchet MS" pitchFamily="34" charset="0"/>
                 <a:ea typeface="Trebuchet MS" pitchFamily="34" charset="-122"/>
                 <a:cs typeface="Trebuchet MS" pitchFamily="34" charset="-120"/>
               </a:rPr>
-              <a:t>Phonemes</a:t>
-            </a:r>
-            <a:endParaRPr lang="en-US" sz="1100" dirty="0"/>
-          </a:p>
-        </p:txBody>
-      </p:sp>
-      <p:sp>
-        <p:nvSpPr>
-          <p:cNvPr id="45" name="Shape 43"/>
-          <p:cNvSpPr/>
-          <p:nvPr/>
-        </p:nvSpPr>
-        <p:spPr>
-          <a:xfrm>
-            <a:off x="1874520" y="4096512"/>
-            <a:ext cx="6903720" cy="804672"/>
-          </a:xfrm>
-          <a:prstGeom prst="rect">
-            <a:avLst>
-              <a:gd name="adj" fmla="val 6818"/>
-            </a:avLst>
-          </a:prstGeom>
-          <a:solidFill>
-            <a:srgbClr val="FCE7F3"/>
-          </a:solidFill>
-          <a:ln w="12700">
-            <a:solidFill>
-              <a:srgbClr val="DB2777"/>
-            </a:solidFill>
-            <a:prstDash val="solid"/>
-          </a:ln>
-        </p:spPr>
-      </p:sp>
-      <p:sp>
-        <p:nvSpPr>
-          <p:cNvPr id="46" name="Shape 44"/>
-          <p:cNvSpPr/>
-          <p:nvPr/>
-        </p:nvSpPr>
-        <p:spPr>
-          <a:xfrm>
-            <a:off x="1951828" y="4169664"/>
-            <a:ext cx="603504" cy="384048"/>
+              <a:t>d</a:t>
+            </a:r>
+            <a:endParaRPr lang="en-US" sz="900" dirty="0"/>
+          </a:p>
+        </p:txBody>
+      </p:sp>
+      <p:sp>
+        <p:nvSpPr>
+          <p:cNvPr id="48" name="Shape 46"/>
+          <p:cNvSpPr/>
+          <p:nvPr/>
+        </p:nvSpPr>
+        <p:spPr>
+          <a:xfrm>
+            <a:off x="3639312" y="4169664"/>
+            <a:ext cx="685800" cy="384048"/>
           </a:xfrm>
           <a:prstGeom prst="rect">
             <a:avLst>
@@ -16859,14 +16898,14 @@
       </p:sp>
       <p:sp>
         <p:nvSpPr>
-          <p:cNvPr id="47" name="Text 45"/>
-          <p:cNvSpPr/>
-          <p:nvPr/>
-        </p:nvSpPr>
-        <p:spPr>
-          <a:xfrm>
-            <a:off x="1951828" y="4169664"/>
-            <a:ext cx="603504" cy="384048"/>
+          <p:cNvPr id="49" name="Text 47"/>
+          <p:cNvSpPr/>
+          <p:nvPr/>
+        </p:nvSpPr>
+        <p:spPr>
+          <a:xfrm>
+            <a:off x="3639312" y="4169664"/>
+            <a:ext cx="685800" cy="384048"/>
           </a:xfrm>
           <a:prstGeom prst="rect">
             <a:avLst/>
@@ -16890,7 +16929,7 @@
                 <a:ea typeface="Trebuchet MS" pitchFamily="34" charset="-122"/>
                 <a:cs typeface="Trebuchet MS" pitchFamily="34" charset="-120"/>
               </a:rPr>
-              <a:t>e</a:t>
+              <a:t>u</a:t>
             </a:r>
             <a:endParaRPr lang="en-US" sz="900" dirty="0"/>
           </a:p>
@@ -16898,14 +16937,14 @@
       </p:sp>
       <p:sp>
         <p:nvSpPr>
-          <p:cNvPr id="48" name="Shape 46"/>
-          <p:cNvSpPr/>
-          <p:nvPr/>
-        </p:nvSpPr>
-        <p:spPr>
-          <a:xfrm>
-            <a:off x="2605209" y="4169664"/>
-            <a:ext cx="603504" cy="384048"/>
+          <p:cNvPr id="50" name="Shape 48"/>
+          <p:cNvSpPr/>
+          <p:nvPr/>
+        </p:nvSpPr>
+        <p:spPr>
+          <a:xfrm>
+            <a:off x="4447032" y="4169664"/>
+            <a:ext cx="685800" cy="384048"/>
           </a:xfrm>
           <a:prstGeom prst="rect">
             <a:avLst>
@@ -16925,14 +16964,14 @@
       </p:sp>
       <p:sp>
         <p:nvSpPr>
-          <p:cNvPr id="49" name="Text 47"/>
-          <p:cNvSpPr/>
-          <p:nvPr/>
-        </p:nvSpPr>
-        <p:spPr>
-          <a:xfrm>
-            <a:off x="2605209" y="4169664"/>
-            <a:ext cx="603504" cy="384048"/>
+          <p:cNvPr id="51" name="Text 49"/>
+          <p:cNvSpPr/>
+          <p:nvPr/>
+        </p:nvSpPr>
+        <p:spPr>
+          <a:xfrm>
+            <a:off x="4447032" y="4169664"/>
+            <a:ext cx="685800" cy="384048"/>
           </a:xfrm>
           <a:prstGeom prst="rect">
             <a:avLst/>
@@ -16956,7 +16995,7 @@
                 <a:ea typeface="Trebuchet MS" pitchFamily="34" charset="-122"/>
                 <a:cs typeface="Trebuchet MS" pitchFamily="34" charset="-120"/>
               </a:rPr>
-              <a:t>d</a:t>
+              <a:t>c</a:t>
             </a:r>
             <a:endParaRPr lang="en-US" sz="900" dirty="0"/>
           </a:p>
@@ -16964,14 +17003,53 @@
       </p:sp>
       <p:sp>
         <p:nvSpPr>
-          <p:cNvPr id="50" name="Shape 48"/>
-          <p:cNvSpPr/>
-          <p:nvPr/>
-        </p:nvSpPr>
-        <p:spPr>
-          <a:xfrm>
-            <a:off x="3258589" y="4169664"/>
-            <a:ext cx="603504" cy="384048"/>
+          <p:cNvPr id="52" name="Text 50"/>
+          <p:cNvSpPr/>
+          <p:nvPr/>
+        </p:nvSpPr>
+        <p:spPr>
+          <a:xfrm>
+            <a:off x="4447032" y="4572000"/>
+            <a:ext cx="685800" cy="219456"/>
+          </a:xfrm>
+          <a:prstGeom prst="rect">
+            <a:avLst/>
+          </a:prstGeom>
+          <a:noFill/>
+          <a:ln/>
+        </p:spPr>
+        <p:txBody>
+          <a:bodyPr wrap="square" lIns="0" tIns="0" rIns="0" bIns="0" rtlCol="0" anchor="t"/>
+          <a:lstStyle/>
+          <a:p>
+            <a:pPr algn="ctr" indent="0" marL="0">
+              <a:buNone/>
+            </a:pPr>
+            <a:r>
+              <a:rPr lang="en-US" sz="750" i="1" dirty="0">
+                <a:solidFill>
+                  <a:srgbClr val="94A3B8"/>
+                </a:solidFill>
+                <a:latin typeface="Calibri" pitchFamily="34" charset="0"/>
+                <a:ea typeface="Calibri" pitchFamily="34" charset="-122"/>
+                <a:cs typeface="Calibri" pitchFamily="34" charset="-120"/>
+              </a:rPr>
+              <a:t>/k/</a:t>
+            </a:r>
+            <a:endParaRPr lang="en-US" sz="750" dirty="0"/>
+          </a:p>
+        </p:txBody>
+      </p:sp>
+      <p:sp>
+        <p:nvSpPr>
+          <p:cNvPr id="53" name="Shape 51"/>
+          <p:cNvSpPr/>
+          <p:nvPr/>
+        </p:nvSpPr>
+        <p:spPr>
+          <a:xfrm>
+            <a:off x="5254752" y="4169664"/>
+            <a:ext cx="685800" cy="384048"/>
           </a:xfrm>
           <a:prstGeom prst="rect">
             <a:avLst>
@@ -16991,14 +17069,14 @@
       </p:sp>
       <p:sp>
         <p:nvSpPr>
-          <p:cNvPr id="51" name="Text 49"/>
-          <p:cNvSpPr/>
-          <p:nvPr/>
-        </p:nvSpPr>
-        <p:spPr>
-          <a:xfrm>
-            <a:off x="3258589" y="4169664"/>
-            <a:ext cx="603504" cy="384048"/>
+          <p:cNvPr id="54" name="Text 52"/>
+          <p:cNvSpPr/>
+          <p:nvPr/>
+        </p:nvSpPr>
+        <p:spPr>
+          <a:xfrm>
+            <a:off x="5254752" y="4169664"/>
+            <a:ext cx="685800" cy="384048"/>
           </a:xfrm>
           <a:prstGeom prst="rect">
             <a:avLst/>
@@ -17022,7 +17100,7 @@
                 <a:ea typeface="Trebuchet MS" pitchFamily="34" charset="-122"/>
                 <a:cs typeface="Trebuchet MS" pitchFamily="34" charset="-120"/>
               </a:rPr>
-              <a:t>u</a:t>
+              <a:t>a</a:t>
             </a:r>
             <a:endParaRPr lang="en-US" sz="900" dirty="0"/>
           </a:p>
@@ -17030,14 +17108,14 @@
       </p:sp>
       <p:sp>
         <p:nvSpPr>
-          <p:cNvPr id="52" name="Shape 50"/>
-          <p:cNvSpPr/>
-          <p:nvPr/>
-        </p:nvSpPr>
-        <p:spPr>
-          <a:xfrm>
-            <a:off x="3911969" y="4169664"/>
-            <a:ext cx="603504" cy="384048"/>
+          <p:cNvPr id="55" name="Shape 53"/>
+          <p:cNvSpPr/>
+          <p:nvPr/>
+        </p:nvSpPr>
+        <p:spPr>
+          <a:xfrm>
+            <a:off x="6062472" y="4169664"/>
+            <a:ext cx="685800" cy="384048"/>
           </a:xfrm>
           <a:prstGeom prst="rect">
             <a:avLst>
@@ -17057,14 +17135,14 @@
       </p:sp>
       <p:sp>
         <p:nvSpPr>
-          <p:cNvPr id="53" name="Text 51"/>
-          <p:cNvSpPr/>
-          <p:nvPr/>
-        </p:nvSpPr>
-        <p:spPr>
-          <a:xfrm>
-            <a:off x="3911969" y="4169664"/>
-            <a:ext cx="603504" cy="384048"/>
+          <p:cNvPr id="56" name="Text 54"/>
+          <p:cNvSpPr/>
+          <p:nvPr/>
+        </p:nvSpPr>
+        <p:spPr>
+          <a:xfrm>
+            <a:off x="6062472" y="4169664"/>
+            <a:ext cx="685800" cy="384048"/>
           </a:xfrm>
           <a:prstGeom prst="rect">
             <a:avLst/>
@@ -17088,7 +17166,7 @@
                 <a:ea typeface="Trebuchet MS" pitchFamily="34" charset="-122"/>
                 <a:cs typeface="Trebuchet MS" pitchFamily="34" charset="-120"/>
               </a:rPr>
-              <a:t>c</a:t>
+              <a:t>t</a:t>
             </a:r>
             <a:endParaRPr lang="en-US" sz="900" dirty="0"/>
           </a:p>
@@ -17096,14 +17174,14 @@
       </p:sp>
       <p:sp>
         <p:nvSpPr>
-          <p:cNvPr id="54" name="Text 52"/>
-          <p:cNvSpPr/>
-          <p:nvPr/>
-        </p:nvSpPr>
-        <p:spPr>
-          <a:xfrm>
-            <a:off x="3911969" y="4572000"/>
-            <a:ext cx="603504" cy="219456"/>
+          <p:cNvPr id="57" name="Text 55"/>
+          <p:cNvSpPr/>
+          <p:nvPr/>
+        </p:nvSpPr>
+        <p:spPr>
+          <a:xfrm>
+            <a:off x="6062472" y="4572000"/>
+            <a:ext cx="685800" cy="219456"/>
           </a:xfrm>
           <a:prstGeom prst="rect">
             <a:avLst/>
@@ -17127,7 +17205,7 @@
                 <a:ea typeface="Calibri" pitchFamily="34" charset="-122"/>
                 <a:cs typeface="Calibri" pitchFamily="34" charset="-120"/>
               </a:rPr>
-              <a:t>/k/</a:t>
+              <a:t>/sh/</a:t>
             </a:r>
             <a:endParaRPr lang="en-US" sz="750" dirty="0"/>
           </a:p>
@@ -17135,14 +17213,14 @@
       </p:sp>
       <p:sp>
         <p:nvSpPr>
-          <p:cNvPr id="55" name="Shape 53"/>
-          <p:cNvSpPr/>
-          <p:nvPr/>
-        </p:nvSpPr>
-        <p:spPr>
-          <a:xfrm>
-            <a:off x="4565350" y="4169664"/>
-            <a:ext cx="603504" cy="384048"/>
+          <p:cNvPr id="58" name="Shape 56"/>
+          <p:cNvSpPr/>
+          <p:nvPr/>
+        </p:nvSpPr>
+        <p:spPr>
+          <a:xfrm>
+            <a:off x="6870192" y="4169664"/>
+            <a:ext cx="685800" cy="384048"/>
           </a:xfrm>
           <a:prstGeom prst="rect">
             <a:avLst>
@@ -17162,14 +17240,14 @@
       </p:sp>
       <p:sp>
         <p:nvSpPr>
-          <p:cNvPr id="56" name="Text 54"/>
-          <p:cNvSpPr/>
-          <p:nvPr/>
-        </p:nvSpPr>
-        <p:spPr>
-          <a:xfrm>
-            <a:off x="4565350" y="4169664"/>
-            <a:ext cx="603504" cy="384048"/>
+          <p:cNvPr id="59" name="Text 57"/>
+          <p:cNvSpPr/>
+          <p:nvPr/>
+        </p:nvSpPr>
+        <p:spPr>
+          <a:xfrm>
+            <a:off x="6870192" y="4169664"/>
+            <a:ext cx="685800" cy="384048"/>
           </a:xfrm>
           <a:prstGeom prst="rect">
             <a:avLst/>
@@ -17193,7 +17271,7 @@
                 <a:ea typeface="Trebuchet MS" pitchFamily="34" charset="-122"/>
                 <a:cs typeface="Trebuchet MS" pitchFamily="34" charset="-120"/>
               </a:rPr>
-              <a:t>a</a:t>
+              <a:t>io</a:t>
             </a:r>
             <a:endParaRPr lang="en-US" sz="900" dirty="0"/>
           </a:p>
@@ -17201,14 +17279,14 @@
       </p:sp>
       <p:sp>
         <p:nvSpPr>
-          <p:cNvPr id="57" name="Shape 55"/>
-          <p:cNvSpPr/>
-          <p:nvPr/>
-        </p:nvSpPr>
-        <p:spPr>
-          <a:xfrm>
-            <a:off x="5218730" y="4169664"/>
-            <a:ext cx="603504" cy="384048"/>
+          <p:cNvPr id="60" name="Shape 58"/>
+          <p:cNvSpPr/>
+          <p:nvPr/>
+        </p:nvSpPr>
+        <p:spPr>
+          <a:xfrm>
+            <a:off x="7677912" y="4169664"/>
+            <a:ext cx="685800" cy="384048"/>
           </a:xfrm>
           <a:prstGeom prst="rect">
             <a:avLst>
@@ -17228,14 +17306,14 @@
       </p:sp>
       <p:sp>
         <p:nvSpPr>
-          <p:cNvPr id="58" name="Text 56"/>
-          <p:cNvSpPr/>
-          <p:nvPr/>
-        </p:nvSpPr>
-        <p:spPr>
-          <a:xfrm>
-            <a:off x="5218730" y="4169664"/>
-            <a:ext cx="603504" cy="384048"/>
+          <p:cNvPr id="61" name="Text 59"/>
+          <p:cNvSpPr/>
+          <p:nvPr/>
+        </p:nvSpPr>
+        <p:spPr>
+          <a:xfrm>
+            <a:off x="7677912" y="4169664"/>
+            <a:ext cx="685800" cy="384048"/>
           </a:xfrm>
           <a:prstGeom prst="rect">
             <a:avLst/>
@@ -17259,310 +17337,7 @@
                 <a:ea typeface="Trebuchet MS" pitchFamily="34" charset="-122"/>
                 <a:cs typeface="Trebuchet MS" pitchFamily="34" charset="-120"/>
               </a:rPr>
-              <a:t>t</a:t>
-            </a:r>
-            <a:endParaRPr lang="en-US" sz="900" dirty="0"/>
-          </a:p>
-        </p:txBody>
-      </p:sp>
-      <p:sp>
-        <p:nvSpPr>
-          <p:cNvPr id="59" name="Text 57"/>
-          <p:cNvSpPr/>
-          <p:nvPr/>
-        </p:nvSpPr>
-        <p:spPr>
-          <a:xfrm>
-            <a:off x="5218730" y="4572000"/>
-            <a:ext cx="603504" cy="219456"/>
-          </a:xfrm>
-          <a:prstGeom prst="rect">
-            <a:avLst/>
-          </a:prstGeom>
-          <a:noFill/>
-          <a:ln/>
-        </p:spPr>
-        <p:txBody>
-          <a:bodyPr wrap="square" lIns="0" tIns="0" rIns="0" bIns="0" rtlCol="0" anchor="t"/>
-          <a:lstStyle/>
-          <a:p>
-            <a:pPr algn="ctr" indent="0" marL="0">
-              <a:buNone/>
-            </a:pPr>
-            <a:r>
-              <a:rPr lang="en-US" sz="750" i="1" dirty="0">
-                <a:solidFill>
-                  <a:srgbClr val="94A3B8"/>
-                </a:solidFill>
-                <a:latin typeface="Calibri" pitchFamily="34" charset="0"/>
-                <a:ea typeface="Calibri" pitchFamily="34" charset="-122"/>
-                <a:cs typeface="Calibri" pitchFamily="34" charset="-120"/>
-              </a:rPr>
-              <a:t>/sh/</a:t>
-            </a:r>
-            <a:endParaRPr lang="en-US" sz="750" dirty="0"/>
-          </a:p>
-        </p:txBody>
-      </p:sp>
-      <p:sp>
-        <p:nvSpPr>
-          <p:cNvPr id="60" name="Shape 58"/>
-          <p:cNvSpPr/>
-          <p:nvPr/>
-        </p:nvSpPr>
-        <p:spPr>
-          <a:xfrm>
-            <a:off x="5872111" y="4169664"/>
-            <a:ext cx="603504" cy="384048"/>
-          </a:xfrm>
-          <a:prstGeom prst="rect">
-            <a:avLst>
-              <a:gd name="adj" fmla="val 9524"/>
-            </a:avLst>
-          </a:prstGeom>
-          <a:solidFill>
-            <a:srgbClr val="FFFFFF"/>
-          </a:solidFill>
-          <a:ln w="12700">
-            <a:solidFill>
-              <a:srgbClr val="DB2777"/>
-            </a:solidFill>
-            <a:prstDash val="solid"/>
-          </a:ln>
-        </p:spPr>
-      </p:sp>
-      <p:sp>
-        <p:nvSpPr>
-          <p:cNvPr id="61" name="Text 59"/>
-          <p:cNvSpPr/>
-          <p:nvPr/>
-        </p:nvSpPr>
-        <p:spPr>
-          <a:xfrm>
-            <a:off x="5872111" y="4169664"/>
-            <a:ext cx="603504" cy="384048"/>
-          </a:xfrm>
-          <a:prstGeom prst="rect">
-            <a:avLst/>
-          </a:prstGeom>
-          <a:noFill/>
-          <a:ln/>
-        </p:spPr>
-        <p:txBody>
-          <a:bodyPr wrap="square" lIns="0" tIns="0" rIns="0" bIns="0" rtlCol="0" anchor="ctr"/>
-          <a:lstStyle/>
-          <a:p>
-            <a:pPr algn="ctr" indent="0" marL="0">
-              <a:buNone/>
-            </a:pPr>
-            <a:r>
-              <a:rPr lang="en-US" sz="900" b="1" dirty="0">
-                <a:solidFill>
-                  <a:srgbClr val="9D174D"/>
-                </a:solidFill>
-                <a:latin typeface="Trebuchet MS" pitchFamily="34" charset="0"/>
-                <a:ea typeface="Trebuchet MS" pitchFamily="34" charset="-122"/>
-                <a:cs typeface="Trebuchet MS" pitchFamily="34" charset="-120"/>
-              </a:rPr>
-              <a:t>io</a:t>
-            </a:r>
-            <a:endParaRPr lang="en-US" sz="900" dirty="0"/>
-          </a:p>
-        </p:txBody>
-      </p:sp>
-      <p:sp>
-        <p:nvSpPr>
-          <p:cNvPr id="62" name="Shape 60"/>
-          <p:cNvSpPr/>
-          <p:nvPr/>
-        </p:nvSpPr>
-        <p:spPr>
-          <a:xfrm>
-            <a:off x="6525491" y="4169664"/>
-            <a:ext cx="603504" cy="384048"/>
-          </a:xfrm>
-          <a:prstGeom prst="rect">
-            <a:avLst>
-              <a:gd name="adj" fmla="val 9524"/>
-            </a:avLst>
-          </a:prstGeom>
-          <a:solidFill>
-            <a:srgbClr val="FFFFFF"/>
-          </a:solidFill>
-          <a:ln w="12700">
-            <a:solidFill>
-              <a:srgbClr val="DB2777"/>
-            </a:solidFill>
-            <a:prstDash val="solid"/>
-          </a:ln>
-        </p:spPr>
-      </p:sp>
-      <p:sp>
-        <p:nvSpPr>
-          <p:cNvPr id="63" name="Text 61"/>
-          <p:cNvSpPr/>
-          <p:nvPr/>
-        </p:nvSpPr>
-        <p:spPr>
-          <a:xfrm>
-            <a:off x="6525491" y="4169664"/>
-            <a:ext cx="603504" cy="384048"/>
-          </a:xfrm>
-          <a:prstGeom prst="rect">
-            <a:avLst/>
-          </a:prstGeom>
-          <a:noFill/>
-          <a:ln/>
-        </p:spPr>
-        <p:txBody>
-          <a:bodyPr wrap="square" lIns="0" tIns="0" rIns="0" bIns="0" rtlCol="0" anchor="ctr"/>
-          <a:lstStyle/>
-          <a:p>
-            <a:pPr algn="ctr" indent="0" marL="0">
-              <a:buNone/>
-            </a:pPr>
-            <a:r>
-              <a:rPr lang="en-US" sz="900" b="1" dirty="0">
-                <a:solidFill>
-                  <a:srgbClr val="9D174D"/>
-                </a:solidFill>
-                <a:latin typeface="Trebuchet MS" pitchFamily="34" charset="0"/>
-                <a:ea typeface="Trebuchet MS" pitchFamily="34" charset="-122"/>
-                <a:cs typeface="Trebuchet MS" pitchFamily="34" charset="-120"/>
-              </a:rPr>
               <a:t>n</a:t>
-            </a:r>
-            <a:endParaRPr lang="en-US" sz="900" dirty="0"/>
-          </a:p>
-        </p:txBody>
-      </p:sp>
-      <p:sp>
-        <p:nvSpPr>
-          <p:cNvPr id="64" name="Shape 62"/>
-          <p:cNvSpPr/>
-          <p:nvPr/>
-        </p:nvSpPr>
-        <p:spPr>
-          <a:xfrm>
-            <a:off x="7178871" y="4169664"/>
-            <a:ext cx="603504" cy="384048"/>
-          </a:xfrm>
-          <a:prstGeom prst="rect">
-            <a:avLst>
-              <a:gd name="adj" fmla="val 9524"/>
-            </a:avLst>
-          </a:prstGeom>
-          <a:solidFill>
-            <a:srgbClr val="FFFFFF"/>
-          </a:solidFill>
-          <a:ln w="12700">
-            <a:solidFill>
-              <a:srgbClr val="DB2777"/>
-            </a:solidFill>
-            <a:prstDash val="solid"/>
-          </a:ln>
-        </p:spPr>
-      </p:sp>
-      <p:sp>
-        <p:nvSpPr>
-          <p:cNvPr id="65" name="Text 63"/>
-          <p:cNvSpPr/>
-          <p:nvPr/>
-        </p:nvSpPr>
-        <p:spPr>
-          <a:xfrm>
-            <a:off x="7178871" y="4169664"/>
-            <a:ext cx="603504" cy="384048"/>
-          </a:xfrm>
-          <a:prstGeom prst="rect">
-            <a:avLst/>
-          </a:prstGeom>
-          <a:noFill/>
-          <a:ln/>
-        </p:spPr>
-        <p:txBody>
-          <a:bodyPr wrap="square" lIns="0" tIns="0" rIns="0" bIns="0" rtlCol="0" anchor="ctr"/>
-          <a:lstStyle/>
-          <a:p>
-            <a:pPr algn="ctr" indent="0" marL="0">
-              <a:buNone/>
-            </a:pPr>
-            <a:r>
-              <a:rPr lang="en-US" sz="900" b="1" dirty="0">
-                <a:solidFill>
-                  <a:srgbClr val="9D174D"/>
-                </a:solidFill>
-                <a:latin typeface="Trebuchet MS" pitchFamily="34" charset="0"/>
-                <a:ea typeface="Trebuchet MS" pitchFamily="34" charset="-122"/>
-                <a:cs typeface="Trebuchet MS" pitchFamily="34" charset="-120"/>
-              </a:rPr>
-              <a:t>a</a:t>
-            </a:r>
-            <a:endParaRPr lang="en-US" sz="900" dirty="0"/>
-          </a:p>
-        </p:txBody>
-      </p:sp>
-      <p:sp>
-        <p:nvSpPr>
-          <p:cNvPr id="66" name="Shape 64"/>
-          <p:cNvSpPr/>
-          <p:nvPr/>
-        </p:nvSpPr>
-        <p:spPr>
-          <a:xfrm>
-            <a:off x="7832252" y="4169664"/>
-            <a:ext cx="603504" cy="384048"/>
-          </a:xfrm>
-          <a:prstGeom prst="rect">
-            <a:avLst>
-              <a:gd name="adj" fmla="val 9524"/>
-            </a:avLst>
-          </a:prstGeom>
-          <a:solidFill>
-            <a:srgbClr val="FFFFFF"/>
-          </a:solidFill>
-          <a:ln w="12700">
-            <a:solidFill>
-              <a:srgbClr val="DB2777"/>
-            </a:solidFill>
-            <a:prstDash val="solid"/>
-          </a:ln>
-        </p:spPr>
-      </p:sp>
-      <p:sp>
-        <p:nvSpPr>
-          <p:cNvPr id="67" name="Text 65"/>
-          <p:cNvSpPr/>
-          <p:nvPr/>
-        </p:nvSpPr>
-        <p:spPr>
-          <a:xfrm>
-            <a:off x="7832252" y="4169664"/>
-            <a:ext cx="603504" cy="384048"/>
-          </a:xfrm>
-          <a:prstGeom prst="rect">
-            <a:avLst/>
-          </a:prstGeom>
-          <a:noFill/>
-          <a:ln/>
-        </p:spPr>
-        <p:txBody>
-          <a:bodyPr wrap="square" lIns="0" tIns="0" rIns="0" bIns="0" rtlCol="0" anchor="ctr"/>
-          <a:lstStyle/>
-          <a:p>
-            <a:pPr algn="ctr" indent="0" marL="0">
-              <a:buNone/>
-            </a:pPr>
-            <a:r>
-              <a:rPr lang="en-US" sz="900" b="1" dirty="0">
-                <a:solidFill>
-                  <a:srgbClr val="9D174D"/>
-                </a:solidFill>
-                <a:latin typeface="Trebuchet MS" pitchFamily="34" charset="0"/>
-                <a:ea typeface="Trebuchet MS" pitchFamily="34" charset="-122"/>
-                <a:cs typeface="Trebuchet MS" pitchFamily="34" charset="-120"/>
-              </a:rPr>
-              <a:t>l</a:t>
             </a:r>
             <a:endParaRPr lang="en-US" sz="900" dirty="0"/>
           </a:p>
@@ -18136,7 +17911,7 @@
                 <a:ea typeface="Calibri" pitchFamily="34" charset="-122"/>
                 <a:cs typeface="Calibri" pitchFamily="34" charset="-120"/>
               </a:rPr>
-              <a:t>Word Labs  •  wordlabs.app  •  Root: 'educate' = to lead out knowledge</a:t>
+              <a:t>Word Labs  •  wordlabs.app  •  Root: 'educate' = to lead out, teach</a:t>
             </a:r>
             <a:endParaRPr lang="en-US" sz="800" dirty="0"/>
           </a:p>
@@ -18470,7 +18245,7 @@
                 <a:ea typeface="Trebuchet MS" pitchFamily="34" charset="-122"/>
                 <a:cs typeface="Trebuchet MS" pitchFamily="34" charset="-120"/>
               </a:rPr>
-              <a:t>2</a:t>
+              <a:t>1</a:t>
             </a:r>
             <a:pPr algn="ctr" indent="0" marL="0">
               <a:buNone/>
@@ -18484,7 +18259,7 @@
                 <a:ea typeface="Trebuchet MS" pitchFamily="34" charset="-122"/>
                 <a:cs typeface="Trebuchet MS" pitchFamily="34" charset="-120"/>
               </a:rPr>
-              <a:t>  punctuation marks</a:t>
+              <a:t>  punctuation mark</a:t>
             </a:r>
             <a:endParaRPr lang="en-US" sz="2800" dirty="0"/>
           </a:p>
@@ -18776,7 +18551,7 @@
                 <a:ea typeface="Calibri" pitchFamily="34" charset="-122"/>
                 <a:cs typeface="Calibri" pitchFamily="34" charset="-120"/>
               </a:rPr>
-              <a:t>Word Labs  •  wordlabs.app  •  Root: 'educate' = to lead out knowledge</a:t>
+              <a:t>Word Labs  •  wordlabs.app  •  Root: 'educate' = to lead out, teach</a:t>
             </a:r>
             <a:endParaRPr lang="en-US" sz="800" dirty="0"/>
           </a:p>
@@ -18880,20 +18655,6 @@
               <a:buNone/>
             </a:pPr>
             <a:r>
-              <a:rPr lang="en-US" sz="1800" dirty="0">
-                <a:solidFill>
-                  <a:srgbClr val="0F172A"/>
-                </a:solidFill>
-                <a:latin typeface="Calibri" pitchFamily="34" charset="0"/>
-                <a:ea typeface="Calibri" pitchFamily="34" charset="-122"/>
-                <a:cs typeface="Calibri" pitchFamily="34" charset="-120"/>
-              </a:rPr>
-              <a:t>A good </a:t>
-            </a:r>
-            <a:pPr algn="l" indent="0" marL="0">
-              <a:buNone/>
-            </a:pPr>
-            <a:r>
               <a:rPr lang="en-US" sz="1800" b="1" dirty="0">
                 <a:solidFill>
                   <a:srgbClr val="0D9488"/>
@@ -18905,7 +18666,7 @@
                 <a:ea typeface="Calibri" pitchFamily="34" charset="-122"/>
                 <a:cs typeface="Calibri" pitchFamily="34" charset="-120"/>
               </a:rPr>
-              <a:t>education</a:t>
+              <a:t>Reeducating</a:t>
             </a:r>
             <a:pPr algn="l" indent="0" marL="0">
               <a:buNone/>
@@ -18919,7 +18680,7 @@
                 <a:ea typeface="Calibri" pitchFamily="34" charset="-122"/>
                 <a:cs typeface="Calibri" pitchFamily="34" charset="-120"/>
               </a:rPr>
-              <a:t> can </a:t>
+              <a:t> the community was important, but </a:t>
             </a:r>
             <a:pPr algn="l" indent="0" marL="0">
               <a:buNone/>
@@ -18936,7 +18697,7 @@
                 <a:ea typeface="Calibri" pitchFamily="34" charset="-122"/>
                 <a:cs typeface="Calibri" pitchFamily="34" charset="-120"/>
               </a:rPr>
-              <a:t>reeducate</a:t>
+              <a:t>uneducated</a:t>
             </a:r>
             <a:pPr algn="l" indent="0" marL="0">
               <a:buNone/>
@@ -18950,7 +18711,7 @@
                 <a:ea typeface="Calibri" pitchFamily="34" charset="-122"/>
                 <a:cs typeface="Calibri" pitchFamily="34" charset="-120"/>
               </a:rPr>
-              <a:t> your thinking, and every </a:t>
+              <a:t> people also needed </a:t>
             </a:r>
             <a:pPr algn="l" indent="0" marL="0">
               <a:buNone/>
@@ -18981,7 +18742,7 @@
                 <a:ea typeface="Calibri" pitchFamily="34" charset="-122"/>
                 <a:cs typeface="Calibri" pitchFamily="34" charset="-120"/>
               </a:rPr>
-              <a:t> experience helps you grow.</a:t>
+              <a:t> support.</a:t>
             </a:r>
             <a:endParaRPr lang="en-US" sz="1800" dirty="0"/>
           </a:p>
@@ -19136,7 +18897,7 @@
                 <a:ea typeface="Trebuchet MS" pitchFamily="34" charset="-122"/>
                 <a:cs typeface="Trebuchet MS" pitchFamily="34" charset="-120"/>
               </a:rPr>
-              <a:t>education</a:t>
+              <a:t>reeducating</a:t>
             </a:r>
             <a:endParaRPr lang="en-US" sz="1400" dirty="0"/>
           </a:p>
@@ -19264,7 +19025,7 @@
                 <a:ea typeface="Trebuchet MS" pitchFamily="34" charset="-122"/>
                 <a:cs typeface="Trebuchet MS" pitchFamily="34" charset="-120"/>
               </a:rPr>
-              <a:t>reeducate</a:t>
+              <a:t>uneducated</a:t>
             </a:r>
             <a:endParaRPr lang="en-US" sz="1400" dirty="0"/>
           </a:p>
@@ -19723,7 +19484,7 @@
                 <a:ea typeface="Calibri" pitchFamily="34" charset="-122"/>
                 <a:cs typeface="Calibri" pitchFamily="34" charset="-120"/>
               </a:rPr>
-              <a:t>Word Labs  •  wordlabs.app  •  Root: 'educate' = to lead out knowledge</a:t>
+              <a:t>Word Labs  •  wordlabs.app  •  Root: 'educate' = to lead out, teach</a:t>
             </a:r>
             <a:endParaRPr lang="en-US" sz="800" dirty="0"/>
           </a:p>
@@ -19862,7 +19623,7 @@
                 <a:ea typeface="Trebuchet MS" pitchFamily="34" charset="-122"/>
                 <a:cs typeface="Trebuchet MS" pitchFamily="34" charset="-120"/>
               </a:rPr>
-              <a:t>education</a:t>
+              <a:t>reeducating</a:t>
             </a:r>
             <a:endParaRPr lang="en-US" sz="2800" dirty="0"/>
           </a:p>
@@ -20550,7 +20311,7 @@
                 <a:ea typeface="Calibri" pitchFamily="34" charset="-122"/>
                 <a:cs typeface="Calibri" pitchFamily="34" charset="-120"/>
               </a:rPr>
-              <a:t>Word Labs  •  wordlabs.app  •  Root: 'educate' = to lead out knowledge</a:t>
+              <a:t>Word Labs  •  wordlabs.app  •  Root: 'educate' = to lead out, teach</a:t>
             </a:r>
             <a:endParaRPr lang="en-US" sz="800" dirty="0"/>
           </a:p>
@@ -20689,7 +20450,7 @@
                 <a:ea typeface="Trebuchet MS" pitchFamily="34" charset="-122"/>
                 <a:cs typeface="Trebuchet MS" pitchFamily="34" charset="-120"/>
               </a:rPr>
-              <a:t>education</a:t>
+              <a:t>reeducating</a:t>
             </a:r>
             <a:endParaRPr lang="en-US" sz="2800" dirty="0"/>
           </a:p>
@@ -20769,7 +20530,7 @@
         </p:nvSpPr>
         <p:spPr>
           <a:xfrm>
-            <a:off x="2938272" y="2258568"/>
+            <a:off x="2221992" y="2258568"/>
             <a:ext cx="1828800" cy="292608"/>
           </a:xfrm>
           <a:prstGeom prst="rect">
@@ -20778,11 +20539,11 @@
             </a:avLst>
           </a:prstGeom>
           <a:solidFill>
-            <a:srgbClr val="CCFBF1"/>
+            <a:srgbClr val="DDD6FE"/>
           </a:solidFill>
           <a:ln w="19050">
             <a:solidFill>
-              <a:srgbClr val="0D9488"/>
+              <a:srgbClr val="7C3AED"/>
             </a:solidFill>
             <a:prstDash val="solid"/>
           </a:ln>
@@ -20803,7 +20564,7 @@
         </p:nvSpPr>
         <p:spPr>
           <a:xfrm>
-            <a:off x="2938272" y="2258568"/>
+            <a:off x="2221992" y="2258568"/>
             <a:ext cx="1828800" cy="292608"/>
           </a:xfrm>
           <a:prstGeom prst="rect">
@@ -20822,13 +20583,13 @@
             <a:r>
               <a:rPr lang="en-US" sz="1300" b="1" dirty="0">
                 <a:solidFill>
-                  <a:srgbClr val="0F766E"/>
+                  <a:srgbClr val="4C1D95"/>
                 </a:solidFill>
                 <a:latin typeface="Trebuchet MS" pitchFamily="34" charset="0"/>
                 <a:ea typeface="Trebuchet MS" pitchFamily="34" charset="-122"/>
                 <a:cs typeface="Trebuchet MS" pitchFamily="34" charset="-120"/>
               </a:rPr>
-              <a:t>educate</a:t>
+              <a:t>re</a:t>
             </a:r>
             <a:endParaRPr lang="en-US" sz="1300" dirty="0"/>
           </a:p>
@@ -20842,7 +20603,7 @@
         </p:nvSpPr>
         <p:spPr>
           <a:xfrm>
-            <a:off x="2938272" y="2569464"/>
+            <a:off x="2221992" y="2569464"/>
             <a:ext cx="1828800" cy="201168"/>
           </a:xfrm>
           <a:prstGeom prst="rect">
@@ -20867,7 +20628,7 @@
                 <a:ea typeface="Calibri" pitchFamily="34" charset="-122"/>
                 <a:cs typeface="Calibri" pitchFamily="34" charset="-120"/>
               </a:rPr>
-              <a:t>to lead out knowledge</a:t>
+              <a:t>again</a:t>
             </a:r>
             <a:endParaRPr lang="en-US" sz="850" dirty="0"/>
           </a:p>
@@ -20875,52 +20636,13 @@
       </p:sp>
       <p:sp>
         <p:nvSpPr>
-          <p:cNvPr id="19" name="Text 17"/>
-          <p:cNvSpPr/>
-          <p:nvPr/>
-        </p:nvSpPr>
-        <p:spPr>
-          <a:xfrm>
-            <a:off x="2938272" y="2752344"/>
-            <a:ext cx="1828800" cy="182880"/>
-          </a:xfrm>
-          <a:prstGeom prst="rect">
-            <a:avLst/>
-          </a:prstGeom>
-          <a:noFill/>
-          <a:ln/>
-        </p:spPr>
-        <p:txBody>
-          <a:bodyPr wrap="square" lIns="0" tIns="0" rIns="0" bIns="0" rtlCol="0" anchor="t"/>
-          <a:lstStyle/>
-          <a:p>
-            <a:pPr algn="ctr" indent="0" marL="0">
-              <a:buNone/>
-            </a:pPr>
-            <a:r>
-              <a:rPr lang="en-US" sz="700" i="1" dirty="0">
-                <a:solidFill>
-                  <a:srgbClr val="94A3B8"/>
-                </a:solidFill>
-                <a:latin typeface="Calibri" pitchFamily="34" charset="0"/>
-                <a:ea typeface="Calibri" pitchFamily="34" charset="-122"/>
-                <a:cs typeface="Calibri" pitchFamily="34" charset="-120"/>
-              </a:rPr>
-              <a:t>'e' dropped before vowel suffix</a:t>
-            </a:r>
-            <a:endParaRPr lang="en-US" sz="700" dirty="0"/>
-          </a:p>
-        </p:txBody>
-      </p:sp>
-      <p:sp>
-        <p:nvSpPr>
-          <p:cNvPr id="20" name="Shape 18"/>
-          <p:cNvSpPr/>
-          <p:nvPr/>
-        </p:nvSpPr>
-        <p:spPr>
-          <a:xfrm>
-            <a:off x="5803392" y="2258568"/>
+          <p:cNvPr id="19" name="Shape 17"/>
+          <p:cNvSpPr/>
+          <p:nvPr/>
+        </p:nvSpPr>
+        <p:spPr>
+          <a:xfrm>
+            <a:off x="4370832" y="2258568"/>
             <a:ext cx="1828800" cy="292608"/>
           </a:xfrm>
           <a:prstGeom prst="rect">
@@ -20929,11 +20651,11 @@
             </a:avLst>
           </a:prstGeom>
           <a:solidFill>
-            <a:srgbClr val="FCE7F3"/>
+            <a:srgbClr val="CCFBF1"/>
           </a:solidFill>
           <a:ln w="19050">
             <a:solidFill>
-              <a:srgbClr val="DB2777"/>
+              <a:srgbClr val="0D9488"/>
             </a:solidFill>
             <a:prstDash val="solid"/>
           </a:ln>
@@ -20948,13 +20670,13 @@
       </p:sp>
       <p:sp>
         <p:nvSpPr>
-          <p:cNvPr id="21" name="Text 19"/>
-          <p:cNvSpPr/>
-          <p:nvPr/>
-        </p:nvSpPr>
-        <p:spPr>
-          <a:xfrm>
-            <a:off x="5803392" y="2258568"/>
+          <p:cNvPr id="20" name="Text 18"/>
+          <p:cNvSpPr/>
+          <p:nvPr/>
+        </p:nvSpPr>
+        <p:spPr>
+          <a:xfrm>
+            <a:off x="4370832" y="2258568"/>
             <a:ext cx="1828800" cy="292608"/>
           </a:xfrm>
           <a:prstGeom prst="rect">
@@ -20973,13 +20695,13 @@
             <a:r>
               <a:rPr lang="en-US" sz="1300" b="1" dirty="0">
                 <a:solidFill>
-                  <a:srgbClr val="9D174D"/>
+                  <a:srgbClr val="0F766E"/>
                 </a:solidFill>
                 <a:latin typeface="Trebuchet MS" pitchFamily="34" charset="0"/>
                 <a:ea typeface="Trebuchet MS" pitchFamily="34" charset="-122"/>
                 <a:cs typeface="Trebuchet MS" pitchFamily="34" charset="-120"/>
               </a:rPr>
-              <a:t>ion</a:t>
+              <a:t>educate</a:t>
             </a:r>
             <a:endParaRPr lang="en-US" sz="1300" dirty="0"/>
           </a:p>
@@ -20987,13 +20709,13 @@
       </p:sp>
       <p:sp>
         <p:nvSpPr>
-          <p:cNvPr id="22" name="Text 20"/>
-          <p:cNvSpPr/>
-          <p:nvPr/>
-        </p:nvSpPr>
-        <p:spPr>
-          <a:xfrm>
-            <a:off x="5803392" y="2569464"/>
+          <p:cNvPr id="21" name="Text 19"/>
+          <p:cNvSpPr/>
+          <p:nvPr/>
+        </p:nvSpPr>
+        <p:spPr>
+          <a:xfrm>
+            <a:off x="4370832" y="2569464"/>
             <a:ext cx="1828800" cy="201168"/>
           </a:xfrm>
           <a:prstGeom prst="rect">
@@ -21018,7 +20740,7 @@
                 <a:ea typeface="Calibri" pitchFamily="34" charset="-122"/>
                 <a:cs typeface="Calibri" pitchFamily="34" charset="-120"/>
               </a:rPr>
-              <a:t>act or process of</a:t>
+              <a:t>to lead out, teach</a:t>
             </a:r>
             <a:endParaRPr lang="en-US" sz="850" dirty="0"/>
           </a:p>
@@ -21026,7 +20748,158 @@
       </p:sp>
       <p:sp>
         <p:nvSpPr>
+          <p:cNvPr id="22" name="Text 20"/>
+          <p:cNvSpPr/>
+          <p:nvPr/>
+        </p:nvSpPr>
+        <p:spPr>
+          <a:xfrm>
+            <a:off x="4370832" y="2752344"/>
+            <a:ext cx="1828800" cy="182880"/>
+          </a:xfrm>
+          <a:prstGeom prst="rect">
+            <a:avLst/>
+          </a:prstGeom>
+          <a:noFill/>
+          <a:ln/>
+        </p:spPr>
+        <p:txBody>
+          <a:bodyPr wrap="square" lIns="0" tIns="0" rIns="0" bIns="0" rtlCol="0" anchor="t"/>
+          <a:lstStyle/>
+          <a:p>
+            <a:pPr algn="ctr" indent="0" marL="0">
+              <a:buNone/>
+            </a:pPr>
+            <a:r>
+              <a:rPr lang="en-US" sz="700" i="1" dirty="0">
+                <a:solidFill>
+                  <a:srgbClr val="94A3B8"/>
+                </a:solidFill>
+                <a:latin typeface="Calibri" pitchFamily="34" charset="0"/>
+                <a:ea typeface="Calibri" pitchFamily="34" charset="-122"/>
+                <a:cs typeface="Calibri" pitchFamily="34" charset="-120"/>
+              </a:rPr>
+              <a:t>'e' dropped before vowel suffix</a:t>
+            </a:r>
+            <a:endParaRPr lang="en-US" sz="700" dirty="0"/>
+          </a:p>
+        </p:txBody>
+      </p:sp>
+      <p:sp>
+        <p:nvSpPr>
           <p:cNvPr id="23" name="Shape 21"/>
+          <p:cNvSpPr/>
+          <p:nvPr/>
+        </p:nvSpPr>
+        <p:spPr>
+          <a:xfrm>
+            <a:off x="6519672" y="2258568"/>
+            <a:ext cx="1828800" cy="292608"/>
+          </a:xfrm>
+          <a:prstGeom prst="rect">
+            <a:avLst>
+              <a:gd name="adj" fmla="val 25000"/>
+            </a:avLst>
+          </a:prstGeom>
+          <a:solidFill>
+            <a:srgbClr val="FCE7F3"/>
+          </a:solidFill>
+          <a:ln w="19050">
+            <a:solidFill>
+              <a:srgbClr val="DB2777"/>
+            </a:solidFill>
+            <a:prstDash val="solid"/>
+          </a:ln>
+          <a:effectLst>
+            <a:outerShdw sx="100000" sy="100000" kx="0" ky="0" algn="bl" rotWithShape="0" blurRad="101600" dist="38100" dir="8100000">
+              <a:srgbClr val="000000">
+                <a:alpha val="12000"/>
+              </a:srgbClr>
+            </a:outerShdw>
+          </a:effectLst>
+        </p:spPr>
+      </p:sp>
+      <p:sp>
+        <p:nvSpPr>
+          <p:cNvPr id="24" name="Text 22"/>
+          <p:cNvSpPr/>
+          <p:nvPr/>
+        </p:nvSpPr>
+        <p:spPr>
+          <a:xfrm>
+            <a:off x="6519672" y="2258568"/>
+            <a:ext cx="1828800" cy="292608"/>
+          </a:xfrm>
+          <a:prstGeom prst="rect">
+            <a:avLst/>
+          </a:prstGeom>
+          <a:noFill/>
+          <a:ln/>
+        </p:spPr>
+        <p:txBody>
+          <a:bodyPr wrap="square" lIns="0" tIns="0" rIns="0" bIns="0" rtlCol="0" anchor="ctr"/>
+          <a:lstStyle/>
+          <a:p>
+            <a:pPr algn="ctr" indent="0" marL="0">
+              <a:buNone/>
+            </a:pPr>
+            <a:r>
+              <a:rPr lang="en-US" sz="1300" b="1" dirty="0">
+                <a:solidFill>
+                  <a:srgbClr val="9D174D"/>
+                </a:solidFill>
+                <a:latin typeface="Trebuchet MS" pitchFamily="34" charset="0"/>
+                <a:ea typeface="Trebuchet MS" pitchFamily="34" charset="-122"/>
+                <a:cs typeface="Trebuchet MS" pitchFamily="34" charset="-120"/>
+              </a:rPr>
+              <a:t>ing</a:t>
+            </a:r>
+            <a:endParaRPr lang="en-US" sz="1300" dirty="0"/>
+          </a:p>
+        </p:txBody>
+      </p:sp>
+      <p:sp>
+        <p:nvSpPr>
+          <p:cNvPr id="25" name="Text 23"/>
+          <p:cNvSpPr/>
+          <p:nvPr/>
+        </p:nvSpPr>
+        <p:spPr>
+          <a:xfrm>
+            <a:off x="6519672" y="2569464"/>
+            <a:ext cx="1828800" cy="201168"/>
+          </a:xfrm>
+          <a:prstGeom prst="rect">
+            <a:avLst/>
+          </a:prstGeom>
+          <a:noFill/>
+          <a:ln/>
+        </p:spPr>
+        <p:txBody>
+          <a:bodyPr wrap="square" lIns="0" tIns="0" rIns="0" bIns="0" rtlCol="0" anchor="t"/>
+          <a:lstStyle/>
+          <a:p>
+            <a:pPr algn="ctr" indent="0" marL="0">
+              <a:buNone/>
+            </a:pPr>
+            <a:r>
+              <a:rPr lang="en-US" sz="850" dirty="0">
+                <a:solidFill>
+                  <a:srgbClr val="475569"/>
+                </a:solidFill>
+                <a:latin typeface="Calibri" pitchFamily="34" charset="0"/>
+                <a:ea typeface="Calibri" pitchFamily="34" charset="-122"/>
+                <a:cs typeface="Calibri" pitchFamily="34" charset="-120"/>
+              </a:rPr>
+              <a:t>ongoing action</a:t>
+            </a:r>
+            <a:endParaRPr lang="en-US" sz="850" dirty="0"/>
+          </a:p>
+        </p:txBody>
+      </p:sp>
+      <p:sp>
+        <p:nvSpPr>
+          <p:cNvPr id="26" name="Shape 24"/>
           <p:cNvSpPr/>
           <p:nvPr/>
         </p:nvSpPr>
@@ -21053,7 +20926,7 @@
       </p:sp>
       <p:sp>
         <p:nvSpPr>
-          <p:cNvPr id="24" name="Text 22"/>
+          <p:cNvPr id="27" name="Text 25"/>
           <p:cNvSpPr/>
           <p:nvPr/>
         </p:nvSpPr>
@@ -21092,7 +20965,7 @@
       </p:sp>
       <p:sp>
         <p:nvSpPr>
-          <p:cNvPr id="25" name="Shape 23"/>
+          <p:cNvPr id="28" name="Shape 26"/>
           <p:cNvSpPr/>
           <p:nvPr/>
         </p:nvSpPr>
@@ -21119,7 +20992,7 @@
       </p:sp>
       <p:sp>
         <p:nvSpPr>
-          <p:cNvPr id="26" name="Text 24"/>
+          <p:cNvPr id="29" name="Text 27"/>
           <p:cNvSpPr/>
           <p:nvPr/>
         </p:nvSpPr>
@@ -21158,7 +21031,7 @@
       </p:sp>
       <p:sp>
         <p:nvSpPr>
-          <p:cNvPr id="27" name="Shape 25"/>
+          <p:cNvPr id="30" name="Shape 28"/>
           <p:cNvSpPr/>
           <p:nvPr/>
         </p:nvSpPr>
@@ -21185,7 +21058,7 @@
       </p:sp>
       <p:sp>
         <p:nvSpPr>
-          <p:cNvPr id="28" name="Text 26"/>
+          <p:cNvPr id="31" name="Text 29"/>
           <p:cNvSpPr/>
           <p:nvPr/>
         </p:nvSpPr>
@@ -21224,7 +21097,7 @@
       </p:sp>
       <p:sp>
         <p:nvSpPr>
-          <p:cNvPr id="29" name="Shape 27"/>
+          <p:cNvPr id="32" name="Shape 30"/>
           <p:cNvSpPr/>
           <p:nvPr/>
         </p:nvSpPr>
@@ -21251,7 +21124,7 @@
       </p:sp>
       <p:sp>
         <p:nvSpPr>
-          <p:cNvPr id="30" name="Text 28"/>
+          <p:cNvPr id="33" name="Text 31"/>
           <p:cNvSpPr/>
           <p:nvPr/>
         </p:nvSpPr>
@@ -21574,7 +21447,7 @@
                 <a:ea typeface="Calibri" pitchFamily="34" charset="-122"/>
                 <a:cs typeface="Calibri" pitchFamily="34" charset="-120"/>
               </a:rPr>
-              <a:t>Word Labs  •  wordlabs.app  •  Root: 'educate' = to lead out knowledge</a:t>
+              <a:t>Word Labs  •  wordlabs.app  •  Root: 'educate' = to lead out, teach</a:t>
             </a:r>
             <a:endParaRPr lang="en-US" sz="800" dirty="0"/>
           </a:p>
@@ -21713,7 +21586,7 @@
                 <a:ea typeface="Trebuchet MS" pitchFamily="34" charset="-122"/>
                 <a:cs typeface="Trebuchet MS" pitchFamily="34" charset="-120"/>
               </a:rPr>
-              <a:t>education</a:t>
+              <a:t>reeducating</a:t>
             </a:r>
             <a:endParaRPr lang="en-US" sz="2800" dirty="0"/>
           </a:p>
@@ -21793,7 +21666,7 @@
         </p:nvSpPr>
         <p:spPr>
           <a:xfrm>
-            <a:off x="2938272" y="2258568"/>
+            <a:off x="2221992" y="2258568"/>
             <a:ext cx="1828800" cy="292608"/>
           </a:xfrm>
           <a:prstGeom prst="rect">
@@ -21802,11 +21675,11 @@
             </a:avLst>
           </a:prstGeom>
           <a:solidFill>
-            <a:srgbClr val="CCFBF1"/>
+            <a:srgbClr val="DDD6FE"/>
           </a:solidFill>
           <a:ln w="19050">
             <a:solidFill>
-              <a:srgbClr val="0D9488"/>
+              <a:srgbClr val="7C3AED"/>
             </a:solidFill>
             <a:prstDash val="solid"/>
           </a:ln>
@@ -21827,7 +21700,7 @@
         </p:nvSpPr>
         <p:spPr>
           <a:xfrm>
-            <a:off x="2938272" y="2258568"/>
+            <a:off x="2221992" y="2258568"/>
             <a:ext cx="1828800" cy="292608"/>
           </a:xfrm>
           <a:prstGeom prst="rect">
@@ -21846,13 +21719,13 @@
             <a:r>
               <a:rPr lang="en-US" sz="1300" b="1" dirty="0">
                 <a:solidFill>
-                  <a:srgbClr val="0F766E"/>
+                  <a:srgbClr val="4C1D95"/>
                 </a:solidFill>
                 <a:latin typeface="Trebuchet MS" pitchFamily="34" charset="0"/>
                 <a:ea typeface="Trebuchet MS" pitchFamily="34" charset="-122"/>
                 <a:cs typeface="Trebuchet MS" pitchFamily="34" charset="-120"/>
               </a:rPr>
-              <a:t>educate</a:t>
+              <a:t>re</a:t>
             </a:r>
             <a:endParaRPr lang="en-US" sz="1300" dirty="0"/>
           </a:p>
@@ -21866,7 +21739,7 @@
         </p:nvSpPr>
         <p:spPr>
           <a:xfrm>
-            <a:off x="2938272" y="2569464"/>
+            <a:off x="2221992" y="2569464"/>
             <a:ext cx="1828800" cy="201168"/>
           </a:xfrm>
           <a:prstGeom prst="rect">
@@ -21891,7 +21764,7 @@
                 <a:ea typeface="Calibri" pitchFamily="34" charset="-122"/>
                 <a:cs typeface="Calibri" pitchFamily="34" charset="-120"/>
               </a:rPr>
-              <a:t>to lead out knowledge</a:t>
+              <a:t>again</a:t>
             </a:r>
             <a:endParaRPr lang="en-US" sz="850" dirty="0"/>
           </a:p>
@@ -21899,52 +21772,13 @@
       </p:sp>
       <p:sp>
         <p:nvSpPr>
-          <p:cNvPr id="19" name="Text 17"/>
-          <p:cNvSpPr/>
-          <p:nvPr/>
-        </p:nvSpPr>
-        <p:spPr>
-          <a:xfrm>
-            <a:off x="2938272" y="2752344"/>
-            <a:ext cx="1828800" cy="182880"/>
-          </a:xfrm>
-          <a:prstGeom prst="rect">
-            <a:avLst/>
-          </a:prstGeom>
-          <a:noFill/>
-          <a:ln/>
-        </p:spPr>
-        <p:txBody>
-          <a:bodyPr wrap="square" lIns="0" tIns="0" rIns="0" bIns="0" rtlCol="0" anchor="t"/>
-          <a:lstStyle/>
-          <a:p>
-            <a:pPr algn="ctr" indent="0" marL="0">
-              <a:buNone/>
-            </a:pPr>
-            <a:r>
-              <a:rPr lang="en-US" sz="700" i="1" dirty="0">
-                <a:solidFill>
-                  <a:srgbClr val="94A3B8"/>
-                </a:solidFill>
-                <a:latin typeface="Calibri" pitchFamily="34" charset="0"/>
-                <a:ea typeface="Calibri" pitchFamily="34" charset="-122"/>
-                <a:cs typeface="Calibri" pitchFamily="34" charset="-120"/>
-              </a:rPr>
-              <a:t>'e' dropped before vowel suffix</a:t>
-            </a:r>
-            <a:endParaRPr lang="en-US" sz="700" dirty="0"/>
-          </a:p>
-        </p:txBody>
-      </p:sp>
-      <p:sp>
-        <p:nvSpPr>
-          <p:cNvPr id="20" name="Shape 18"/>
-          <p:cNvSpPr/>
-          <p:nvPr/>
-        </p:nvSpPr>
-        <p:spPr>
-          <a:xfrm>
-            <a:off x="5803392" y="2258568"/>
+          <p:cNvPr id="19" name="Shape 17"/>
+          <p:cNvSpPr/>
+          <p:nvPr/>
+        </p:nvSpPr>
+        <p:spPr>
+          <a:xfrm>
+            <a:off x="4370832" y="2258568"/>
             <a:ext cx="1828800" cy="292608"/>
           </a:xfrm>
           <a:prstGeom prst="rect">
@@ -21953,11 +21787,11 @@
             </a:avLst>
           </a:prstGeom>
           <a:solidFill>
-            <a:srgbClr val="FCE7F3"/>
+            <a:srgbClr val="CCFBF1"/>
           </a:solidFill>
           <a:ln w="19050">
             <a:solidFill>
-              <a:srgbClr val="DB2777"/>
+              <a:srgbClr val="0D9488"/>
             </a:solidFill>
             <a:prstDash val="solid"/>
           </a:ln>
@@ -21972,13 +21806,13 @@
       </p:sp>
       <p:sp>
         <p:nvSpPr>
-          <p:cNvPr id="21" name="Text 19"/>
-          <p:cNvSpPr/>
-          <p:nvPr/>
-        </p:nvSpPr>
-        <p:spPr>
-          <a:xfrm>
-            <a:off x="5803392" y="2258568"/>
+          <p:cNvPr id="20" name="Text 18"/>
+          <p:cNvSpPr/>
+          <p:nvPr/>
+        </p:nvSpPr>
+        <p:spPr>
+          <a:xfrm>
+            <a:off x="4370832" y="2258568"/>
             <a:ext cx="1828800" cy="292608"/>
           </a:xfrm>
           <a:prstGeom prst="rect">
@@ -21997,13 +21831,13 @@
             <a:r>
               <a:rPr lang="en-US" sz="1300" b="1" dirty="0">
                 <a:solidFill>
-                  <a:srgbClr val="9D174D"/>
+                  <a:srgbClr val="0F766E"/>
                 </a:solidFill>
                 <a:latin typeface="Trebuchet MS" pitchFamily="34" charset="0"/>
                 <a:ea typeface="Trebuchet MS" pitchFamily="34" charset="-122"/>
                 <a:cs typeface="Trebuchet MS" pitchFamily="34" charset="-120"/>
               </a:rPr>
-              <a:t>ion</a:t>
+              <a:t>educate</a:t>
             </a:r>
             <a:endParaRPr lang="en-US" sz="1300" dirty="0"/>
           </a:p>
@@ -22011,13 +21845,13 @@
       </p:sp>
       <p:sp>
         <p:nvSpPr>
-          <p:cNvPr id="22" name="Text 20"/>
-          <p:cNvSpPr/>
-          <p:nvPr/>
-        </p:nvSpPr>
-        <p:spPr>
-          <a:xfrm>
-            <a:off x="5803392" y="2569464"/>
+          <p:cNvPr id="21" name="Text 19"/>
+          <p:cNvSpPr/>
+          <p:nvPr/>
+        </p:nvSpPr>
+        <p:spPr>
+          <a:xfrm>
+            <a:off x="4370832" y="2569464"/>
             <a:ext cx="1828800" cy="201168"/>
           </a:xfrm>
           <a:prstGeom prst="rect">
@@ -22042,7 +21876,7 @@
                 <a:ea typeface="Calibri" pitchFamily="34" charset="-122"/>
                 <a:cs typeface="Calibri" pitchFamily="34" charset="-120"/>
               </a:rPr>
-              <a:t>act or process of</a:t>
+              <a:t>to lead out, teach</a:t>
             </a:r>
             <a:endParaRPr lang="en-US" sz="850" dirty="0"/>
           </a:p>
@@ -22050,7 +21884,158 @@
       </p:sp>
       <p:sp>
         <p:nvSpPr>
+          <p:cNvPr id="22" name="Text 20"/>
+          <p:cNvSpPr/>
+          <p:nvPr/>
+        </p:nvSpPr>
+        <p:spPr>
+          <a:xfrm>
+            <a:off x="4370832" y="2752344"/>
+            <a:ext cx="1828800" cy="182880"/>
+          </a:xfrm>
+          <a:prstGeom prst="rect">
+            <a:avLst/>
+          </a:prstGeom>
+          <a:noFill/>
+          <a:ln/>
+        </p:spPr>
+        <p:txBody>
+          <a:bodyPr wrap="square" lIns="0" tIns="0" rIns="0" bIns="0" rtlCol="0" anchor="t"/>
+          <a:lstStyle/>
+          <a:p>
+            <a:pPr algn="ctr" indent="0" marL="0">
+              <a:buNone/>
+            </a:pPr>
+            <a:r>
+              <a:rPr lang="en-US" sz="700" i="1" dirty="0">
+                <a:solidFill>
+                  <a:srgbClr val="94A3B8"/>
+                </a:solidFill>
+                <a:latin typeface="Calibri" pitchFamily="34" charset="0"/>
+                <a:ea typeface="Calibri" pitchFamily="34" charset="-122"/>
+                <a:cs typeface="Calibri" pitchFamily="34" charset="-120"/>
+              </a:rPr>
+              <a:t>'e' dropped before vowel suffix</a:t>
+            </a:r>
+            <a:endParaRPr lang="en-US" sz="700" dirty="0"/>
+          </a:p>
+        </p:txBody>
+      </p:sp>
+      <p:sp>
+        <p:nvSpPr>
           <p:cNvPr id="23" name="Shape 21"/>
+          <p:cNvSpPr/>
+          <p:nvPr/>
+        </p:nvSpPr>
+        <p:spPr>
+          <a:xfrm>
+            <a:off x="6519672" y="2258568"/>
+            <a:ext cx="1828800" cy="292608"/>
+          </a:xfrm>
+          <a:prstGeom prst="rect">
+            <a:avLst>
+              <a:gd name="adj" fmla="val 25000"/>
+            </a:avLst>
+          </a:prstGeom>
+          <a:solidFill>
+            <a:srgbClr val="FCE7F3"/>
+          </a:solidFill>
+          <a:ln w="19050">
+            <a:solidFill>
+              <a:srgbClr val="DB2777"/>
+            </a:solidFill>
+            <a:prstDash val="solid"/>
+          </a:ln>
+          <a:effectLst>
+            <a:outerShdw sx="100000" sy="100000" kx="0" ky="0" algn="bl" rotWithShape="0" blurRad="101600" dist="38100" dir="8100000">
+              <a:srgbClr val="000000">
+                <a:alpha val="12000"/>
+              </a:srgbClr>
+            </a:outerShdw>
+          </a:effectLst>
+        </p:spPr>
+      </p:sp>
+      <p:sp>
+        <p:nvSpPr>
+          <p:cNvPr id="24" name="Text 22"/>
+          <p:cNvSpPr/>
+          <p:nvPr/>
+        </p:nvSpPr>
+        <p:spPr>
+          <a:xfrm>
+            <a:off x="6519672" y="2258568"/>
+            <a:ext cx="1828800" cy="292608"/>
+          </a:xfrm>
+          <a:prstGeom prst="rect">
+            <a:avLst/>
+          </a:prstGeom>
+          <a:noFill/>
+          <a:ln/>
+        </p:spPr>
+        <p:txBody>
+          <a:bodyPr wrap="square" lIns="0" tIns="0" rIns="0" bIns="0" rtlCol="0" anchor="ctr"/>
+          <a:lstStyle/>
+          <a:p>
+            <a:pPr algn="ctr" indent="0" marL="0">
+              <a:buNone/>
+            </a:pPr>
+            <a:r>
+              <a:rPr lang="en-US" sz="1300" b="1" dirty="0">
+                <a:solidFill>
+                  <a:srgbClr val="9D174D"/>
+                </a:solidFill>
+                <a:latin typeface="Trebuchet MS" pitchFamily="34" charset="0"/>
+                <a:ea typeface="Trebuchet MS" pitchFamily="34" charset="-122"/>
+                <a:cs typeface="Trebuchet MS" pitchFamily="34" charset="-120"/>
+              </a:rPr>
+              <a:t>ing</a:t>
+            </a:r>
+            <a:endParaRPr lang="en-US" sz="1300" dirty="0"/>
+          </a:p>
+        </p:txBody>
+      </p:sp>
+      <p:sp>
+        <p:nvSpPr>
+          <p:cNvPr id="25" name="Text 23"/>
+          <p:cNvSpPr/>
+          <p:nvPr/>
+        </p:nvSpPr>
+        <p:spPr>
+          <a:xfrm>
+            <a:off x="6519672" y="2569464"/>
+            <a:ext cx="1828800" cy="201168"/>
+          </a:xfrm>
+          <a:prstGeom prst="rect">
+            <a:avLst/>
+          </a:prstGeom>
+          <a:noFill/>
+          <a:ln/>
+        </p:spPr>
+        <p:txBody>
+          <a:bodyPr wrap="square" lIns="0" tIns="0" rIns="0" bIns="0" rtlCol="0" anchor="t"/>
+          <a:lstStyle/>
+          <a:p>
+            <a:pPr algn="ctr" indent="0" marL="0">
+              <a:buNone/>
+            </a:pPr>
+            <a:r>
+              <a:rPr lang="en-US" sz="850" dirty="0">
+                <a:solidFill>
+                  <a:srgbClr val="475569"/>
+                </a:solidFill>
+                <a:latin typeface="Calibri" pitchFamily="34" charset="0"/>
+                <a:ea typeface="Calibri" pitchFamily="34" charset="-122"/>
+                <a:cs typeface="Calibri" pitchFamily="34" charset="-120"/>
+              </a:rPr>
+              <a:t>ongoing action</a:t>
+            </a:r>
+            <a:endParaRPr lang="en-US" sz="850" dirty="0"/>
+          </a:p>
+        </p:txBody>
+      </p:sp>
+      <p:sp>
+        <p:nvSpPr>
+          <p:cNvPr id="26" name="Shape 24"/>
           <p:cNvSpPr/>
           <p:nvPr/>
         </p:nvSpPr>
@@ -22077,7 +22062,7 @@
       </p:sp>
       <p:sp>
         <p:nvSpPr>
-          <p:cNvPr id="24" name="Text 22"/>
+          <p:cNvPr id="27" name="Text 25"/>
           <p:cNvSpPr/>
           <p:nvPr/>
         </p:nvSpPr>
@@ -22116,7 +22101,7 @@
       </p:sp>
       <p:sp>
         <p:nvSpPr>
-          <p:cNvPr id="25" name="Shape 23"/>
+          <p:cNvPr id="28" name="Shape 26"/>
           <p:cNvSpPr/>
           <p:nvPr/>
         </p:nvSpPr>
@@ -22143,14 +22128,14 @@
       </p:sp>
       <p:sp>
         <p:nvSpPr>
-          <p:cNvPr id="26" name="Shape 24"/>
-          <p:cNvSpPr/>
-          <p:nvPr/>
-        </p:nvSpPr>
-        <p:spPr>
-          <a:xfrm>
-            <a:off x="1975104" y="3364992"/>
-            <a:ext cx="1554480" cy="475488"/>
+          <p:cNvPr id="29" name="Shape 27"/>
+          <p:cNvSpPr/>
+          <p:nvPr/>
+        </p:nvSpPr>
+        <p:spPr>
+          <a:xfrm>
+            <a:off x="1978152" y="3364992"/>
+            <a:ext cx="1225296" cy="475488"/>
           </a:xfrm>
           <a:prstGeom prst="rect">
             <a:avLst>
@@ -22170,14 +22155,14 @@
       </p:sp>
       <p:sp>
         <p:nvSpPr>
-          <p:cNvPr id="27" name="Text 25"/>
-          <p:cNvSpPr/>
-          <p:nvPr/>
-        </p:nvSpPr>
-        <p:spPr>
-          <a:xfrm>
-            <a:off x="1975104" y="3364992"/>
-            <a:ext cx="1554480" cy="475488"/>
+          <p:cNvPr id="30" name="Text 28"/>
+          <p:cNvSpPr/>
+          <p:nvPr/>
+        </p:nvSpPr>
+        <p:spPr>
+          <a:xfrm>
+            <a:off x="1978152" y="3364992"/>
+            <a:ext cx="1225296" cy="475488"/>
           </a:xfrm>
           <a:prstGeom prst="rect">
             <a:avLst/>
@@ -22201,7 +22186,7 @@
                 <a:ea typeface="Trebuchet MS" pitchFamily="34" charset="-122"/>
                 <a:cs typeface="Trebuchet MS" pitchFamily="34" charset="-120"/>
               </a:rPr>
-              <a:t>ed</a:t>
+              <a:t>re</a:t>
             </a:r>
             <a:endParaRPr lang="en-US" sz="1400" dirty="0"/>
           </a:p>
@@ -22209,14 +22194,14 @@
       </p:sp>
       <p:sp>
         <p:nvSpPr>
-          <p:cNvPr id="28" name="Text 26"/>
-          <p:cNvSpPr/>
-          <p:nvPr/>
-        </p:nvSpPr>
-        <p:spPr>
-          <a:xfrm>
-            <a:off x="3529584" y="3364992"/>
-            <a:ext cx="73152" cy="475488"/>
+          <p:cNvPr id="31" name="Text 29"/>
+          <p:cNvSpPr/>
+          <p:nvPr/>
+        </p:nvSpPr>
+        <p:spPr>
+          <a:xfrm>
+            <a:off x="3203448" y="3364992"/>
+            <a:ext cx="76200" cy="475488"/>
           </a:xfrm>
           <a:prstGeom prst="rect">
             <a:avLst/>
@@ -22248,14 +22233,14 @@
       </p:sp>
       <p:sp>
         <p:nvSpPr>
-          <p:cNvPr id="29" name="Shape 27"/>
-          <p:cNvSpPr/>
-          <p:nvPr/>
-        </p:nvSpPr>
-        <p:spPr>
-          <a:xfrm>
-            <a:off x="3602736" y="3364992"/>
-            <a:ext cx="1554480" cy="475488"/>
+          <p:cNvPr id="32" name="Shape 30"/>
+          <p:cNvSpPr/>
+          <p:nvPr/>
+        </p:nvSpPr>
+        <p:spPr>
+          <a:xfrm>
+            <a:off x="3279648" y="3364992"/>
+            <a:ext cx="1225296" cy="475488"/>
           </a:xfrm>
           <a:prstGeom prst="rect">
             <a:avLst>
@@ -22275,14 +22260,14 @@
       </p:sp>
       <p:sp>
         <p:nvSpPr>
-          <p:cNvPr id="30" name="Text 28"/>
-          <p:cNvSpPr/>
-          <p:nvPr/>
-        </p:nvSpPr>
-        <p:spPr>
-          <a:xfrm>
-            <a:off x="3602736" y="3364992"/>
-            <a:ext cx="1554480" cy="475488"/>
+          <p:cNvPr id="33" name="Text 31"/>
+          <p:cNvSpPr/>
+          <p:nvPr/>
+        </p:nvSpPr>
+        <p:spPr>
+          <a:xfrm>
+            <a:off x="3279648" y="3364992"/>
+            <a:ext cx="1225296" cy="475488"/>
           </a:xfrm>
           <a:prstGeom prst="rect">
             <a:avLst/>
@@ -22306,7 +22291,7 @@
                 <a:ea typeface="Trebuchet MS" pitchFamily="34" charset="-122"/>
                 <a:cs typeface="Trebuchet MS" pitchFamily="34" charset="-120"/>
               </a:rPr>
-              <a:t>u</a:t>
+              <a:t>ed</a:t>
             </a:r>
             <a:endParaRPr lang="en-US" sz="1400" dirty="0"/>
           </a:p>
@@ -22314,14 +22299,14 @@
       </p:sp>
       <p:sp>
         <p:nvSpPr>
-          <p:cNvPr id="31" name="Text 29"/>
-          <p:cNvSpPr/>
-          <p:nvPr/>
-        </p:nvSpPr>
-        <p:spPr>
-          <a:xfrm>
-            <a:off x="5157216" y="3364992"/>
-            <a:ext cx="73152" cy="475488"/>
+          <p:cNvPr id="34" name="Text 32"/>
+          <p:cNvSpPr/>
+          <p:nvPr/>
+        </p:nvSpPr>
+        <p:spPr>
+          <a:xfrm>
+            <a:off x="4504944" y="3364992"/>
+            <a:ext cx="76200" cy="475488"/>
           </a:xfrm>
           <a:prstGeom prst="rect">
             <a:avLst/>
@@ -22353,14 +22338,14 @@
       </p:sp>
       <p:sp>
         <p:nvSpPr>
-          <p:cNvPr id="32" name="Shape 30"/>
-          <p:cNvSpPr/>
-          <p:nvPr/>
-        </p:nvSpPr>
-        <p:spPr>
-          <a:xfrm>
-            <a:off x="5230368" y="3364992"/>
-            <a:ext cx="1554480" cy="475488"/>
+          <p:cNvPr id="35" name="Shape 33"/>
+          <p:cNvSpPr/>
+          <p:nvPr/>
+        </p:nvSpPr>
+        <p:spPr>
+          <a:xfrm>
+            <a:off x="4581144" y="3364992"/>
+            <a:ext cx="1225296" cy="475488"/>
           </a:xfrm>
           <a:prstGeom prst="rect">
             <a:avLst>
@@ -22380,14 +22365,14 @@
       </p:sp>
       <p:sp>
         <p:nvSpPr>
-          <p:cNvPr id="33" name="Text 31"/>
-          <p:cNvSpPr/>
-          <p:nvPr/>
-        </p:nvSpPr>
-        <p:spPr>
-          <a:xfrm>
-            <a:off x="5230368" y="3364992"/>
-            <a:ext cx="1554480" cy="475488"/>
+          <p:cNvPr id="36" name="Text 34"/>
+          <p:cNvSpPr/>
+          <p:nvPr/>
+        </p:nvSpPr>
+        <p:spPr>
+          <a:xfrm>
+            <a:off x="4581144" y="3364992"/>
+            <a:ext cx="1225296" cy="475488"/>
           </a:xfrm>
           <a:prstGeom prst="rect">
             <a:avLst/>
@@ -22411,7 +22396,7 @@
                 <a:ea typeface="Trebuchet MS" pitchFamily="34" charset="-122"/>
                 <a:cs typeface="Trebuchet MS" pitchFamily="34" charset="-120"/>
               </a:rPr>
-              <a:t>ca</a:t>
+              <a:t>u</a:t>
             </a:r>
             <a:endParaRPr lang="en-US" sz="1400" dirty="0"/>
           </a:p>
@@ -22419,14 +22404,14 @@
       </p:sp>
       <p:sp>
         <p:nvSpPr>
-          <p:cNvPr id="34" name="Text 32"/>
-          <p:cNvSpPr/>
-          <p:nvPr/>
-        </p:nvSpPr>
-        <p:spPr>
-          <a:xfrm>
-            <a:off x="6784848" y="3364992"/>
-            <a:ext cx="73152" cy="475488"/>
+          <p:cNvPr id="37" name="Text 35"/>
+          <p:cNvSpPr/>
+          <p:nvPr/>
+        </p:nvSpPr>
+        <p:spPr>
+          <a:xfrm>
+            <a:off x="5806440" y="3364992"/>
+            <a:ext cx="76200" cy="475488"/>
           </a:xfrm>
           <a:prstGeom prst="rect">
             <a:avLst/>
@@ -22458,14 +22443,14 @@
       </p:sp>
       <p:sp>
         <p:nvSpPr>
-          <p:cNvPr id="35" name="Shape 33"/>
-          <p:cNvSpPr/>
-          <p:nvPr/>
-        </p:nvSpPr>
-        <p:spPr>
-          <a:xfrm>
-            <a:off x="6858000" y="3364992"/>
-            <a:ext cx="1554480" cy="475488"/>
+          <p:cNvPr id="38" name="Shape 36"/>
+          <p:cNvSpPr/>
+          <p:nvPr/>
+        </p:nvSpPr>
+        <p:spPr>
+          <a:xfrm>
+            <a:off x="5882640" y="3364992"/>
+            <a:ext cx="1225296" cy="475488"/>
           </a:xfrm>
           <a:prstGeom prst="rect">
             <a:avLst>
@@ -22485,14 +22470,14 @@
       </p:sp>
       <p:sp>
         <p:nvSpPr>
-          <p:cNvPr id="36" name="Text 34"/>
-          <p:cNvSpPr/>
-          <p:nvPr/>
-        </p:nvSpPr>
-        <p:spPr>
-          <a:xfrm>
-            <a:off x="6858000" y="3364992"/>
-            <a:ext cx="1554480" cy="475488"/>
+          <p:cNvPr id="39" name="Text 37"/>
+          <p:cNvSpPr/>
+          <p:nvPr/>
+        </p:nvSpPr>
+        <p:spPr>
+          <a:xfrm>
+            <a:off x="5882640" y="3364992"/>
+            <a:ext cx="1225296" cy="475488"/>
           </a:xfrm>
           <a:prstGeom prst="rect">
             <a:avLst/>
@@ -22516,7 +22501,7 @@
                 <a:ea typeface="Trebuchet MS" pitchFamily="34" charset="-122"/>
                 <a:cs typeface="Trebuchet MS" pitchFamily="34" charset="-120"/>
               </a:rPr>
-              <a:t>tion</a:t>
+              <a:t>ca</a:t>
             </a:r>
             <a:endParaRPr lang="en-US" sz="1400" dirty="0"/>
           </a:p>
@@ -22524,7 +22509,112 @@
       </p:sp>
       <p:sp>
         <p:nvSpPr>
-          <p:cNvPr id="37" name="Shape 35"/>
+          <p:cNvPr id="40" name="Text 38"/>
+          <p:cNvSpPr/>
+          <p:nvPr/>
+        </p:nvSpPr>
+        <p:spPr>
+          <a:xfrm>
+            <a:off x="7107936" y="3364992"/>
+            <a:ext cx="76200" cy="475488"/>
+          </a:xfrm>
+          <a:prstGeom prst="rect">
+            <a:avLst/>
+          </a:prstGeom>
+          <a:noFill/>
+          <a:ln/>
+        </p:spPr>
+        <p:txBody>
+          <a:bodyPr wrap="square" lIns="0" tIns="0" rIns="0" bIns="0" rtlCol="0" anchor="ctr"/>
+          <a:lstStyle/>
+          <a:p>
+            <a:pPr algn="ctr" indent="0" marL="0">
+              <a:buNone/>
+            </a:pPr>
+            <a:r>
+              <a:rPr lang="en-US" sz="1600" b="1" dirty="0">
+                <a:solidFill>
+                  <a:srgbClr val="0D9488"/>
+                </a:solidFill>
+                <a:latin typeface="Trebuchet MS" pitchFamily="34" charset="0"/>
+                <a:ea typeface="Trebuchet MS" pitchFamily="34" charset="-122"/>
+                <a:cs typeface="Trebuchet MS" pitchFamily="34" charset="-120"/>
+              </a:rPr>
+              <a:t>·</a:t>
+            </a:r>
+            <a:endParaRPr lang="en-US" sz="1600" dirty="0"/>
+          </a:p>
+        </p:txBody>
+      </p:sp>
+      <p:sp>
+        <p:nvSpPr>
+          <p:cNvPr id="41" name="Shape 39"/>
+          <p:cNvSpPr/>
+          <p:nvPr/>
+        </p:nvSpPr>
+        <p:spPr>
+          <a:xfrm>
+            <a:off x="7184136" y="3364992"/>
+            <a:ext cx="1225296" cy="475488"/>
+          </a:xfrm>
+          <a:prstGeom prst="rect">
+            <a:avLst>
+              <a:gd name="adj" fmla="val 9615"/>
+            </a:avLst>
+          </a:prstGeom>
+          <a:solidFill>
+            <a:srgbClr val="FFFFFF"/>
+          </a:solidFill>
+          <a:ln w="12700">
+            <a:solidFill>
+              <a:srgbClr val="0D9488"/>
+            </a:solidFill>
+            <a:prstDash val="solid"/>
+          </a:ln>
+        </p:spPr>
+      </p:sp>
+      <p:sp>
+        <p:nvSpPr>
+          <p:cNvPr id="42" name="Text 40"/>
+          <p:cNvSpPr/>
+          <p:nvPr/>
+        </p:nvSpPr>
+        <p:spPr>
+          <a:xfrm>
+            <a:off x="7184136" y="3364992"/>
+            <a:ext cx="1225296" cy="475488"/>
+          </a:xfrm>
+          <a:prstGeom prst="rect">
+            <a:avLst/>
+          </a:prstGeom>
+          <a:noFill/>
+          <a:ln/>
+        </p:spPr>
+        <p:txBody>
+          <a:bodyPr wrap="square" lIns="0" tIns="0" rIns="0" bIns="0" rtlCol="0" anchor="ctr"/>
+          <a:lstStyle/>
+          <a:p>
+            <a:pPr algn="ctr" indent="0" marL="0">
+              <a:buNone/>
+            </a:pPr>
+            <a:r>
+              <a:rPr lang="en-US" sz="1400" b="1" dirty="0">
+                <a:solidFill>
+                  <a:srgbClr val="0D9488"/>
+                </a:solidFill>
+                <a:latin typeface="Trebuchet MS" pitchFamily="34" charset="0"/>
+                <a:ea typeface="Trebuchet MS" pitchFamily="34" charset="-122"/>
+                <a:cs typeface="Trebuchet MS" pitchFamily="34" charset="-120"/>
+              </a:rPr>
+              <a:t>ting</a:t>
+            </a:r>
+            <a:endParaRPr lang="en-US" sz="1400" dirty="0"/>
+          </a:p>
+        </p:txBody>
+      </p:sp>
+      <p:sp>
+        <p:nvSpPr>
+          <p:cNvPr id="43" name="Shape 41"/>
           <p:cNvSpPr/>
           <p:nvPr/>
         </p:nvSpPr>
@@ -22551,7 +22641,7 @@
       </p:sp>
       <p:sp>
         <p:nvSpPr>
-          <p:cNvPr id="38" name="Text 36"/>
+          <p:cNvPr id="44" name="Text 42"/>
           <p:cNvSpPr/>
           <p:nvPr/>
         </p:nvSpPr>
@@ -22590,7 +22680,7 @@
       </p:sp>
       <p:sp>
         <p:nvSpPr>
-          <p:cNvPr id="39" name="Shape 37"/>
+          <p:cNvPr id="45" name="Shape 43"/>
           <p:cNvSpPr/>
           <p:nvPr/>
         </p:nvSpPr>
@@ -22617,7 +22707,7 @@
       </p:sp>
       <p:sp>
         <p:nvSpPr>
-          <p:cNvPr id="40" name="Text 38"/>
+          <p:cNvPr id="46" name="Text 44"/>
           <p:cNvSpPr/>
           <p:nvPr/>
         </p:nvSpPr>
@@ -22940,7 +23030,7 @@
                 <a:ea typeface="Calibri" pitchFamily="34" charset="-122"/>
                 <a:cs typeface="Calibri" pitchFamily="34" charset="-120"/>
               </a:rPr>
-              <a:t>Word Labs  •  wordlabs.app  •  Root: 'educate' = to lead out knowledge</a:t>
+              <a:t>Word Labs  •  wordlabs.app  •  Root: 'educate' = to lead out, teach</a:t>
             </a:r>
             <a:endParaRPr lang="en-US" sz="800" dirty="0"/>
           </a:p>
@@ -23079,7 +23169,7 @@
                 <a:ea typeface="Trebuchet MS" pitchFamily="34" charset="-122"/>
                 <a:cs typeface="Trebuchet MS" pitchFamily="34" charset="-120"/>
               </a:rPr>
-              <a:t>education</a:t>
+              <a:t>reeducating</a:t>
             </a:r>
             <a:endParaRPr lang="en-US" sz="2800" dirty="0"/>
           </a:p>
@@ -23159,7 +23249,7 @@
         </p:nvSpPr>
         <p:spPr>
           <a:xfrm>
-            <a:off x="2938272" y="2258568"/>
+            <a:off x="2221992" y="2258568"/>
             <a:ext cx="1828800" cy="292608"/>
           </a:xfrm>
           <a:prstGeom prst="rect">
@@ -23168,11 +23258,11 @@
             </a:avLst>
           </a:prstGeom>
           <a:solidFill>
-            <a:srgbClr val="CCFBF1"/>
+            <a:srgbClr val="DDD6FE"/>
           </a:solidFill>
           <a:ln w="19050">
             <a:solidFill>
-              <a:srgbClr val="0D9488"/>
+              <a:srgbClr val="7C3AED"/>
             </a:solidFill>
             <a:prstDash val="solid"/>
           </a:ln>
@@ -23193,7 +23283,7 @@
         </p:nvSpPr>
         <p:spPr>
           <a:xfrm>
-            <a:off x="2938272" y="2258568"/>
+            <a:off x="2221992" y="2258568"/>
             <a:ext cx="1828800" cy="292608"/>
           </a:xfrm>
           <a:prstGeom prst="rect">
@@ -23212,13 +23302,13 @@
             <a:r>
               <a:rPr lang="en-US" sz="1300" b="1" dirty="0">
                 <a:solidFill>
-                  <a:srgbClr val="0F766E"/>
+                  <a:srgbClr val="4C1D95"/>
                 </a:solidFill>
                 <a:latin typeface="Trebuchet MS" pitchFamily="34" charset="0"/>
                 <a:ea typeface="Trebuchet MS" pitchFamily="34" charset="-122"/>
                 <a:cs typeface="Trebuchet MS" pitchFamily="34" charset="-120"/>
               </a:rPr>
-              <a:t>educate</a:t>
+              <a:t>re</a:t>
             </a:r>
             <a:endParaRPr lang="en-US" sz="1300" dirty="0"/>
           </a:p>
@@ -23232,7 +23322,7 @@
         </p:nvSpPr>
         <p:spPr>
           <a:xfrm>
-            <a:off x="2938272" y="2569464"/>
+            <a:off x="2221992" y="2569464"/>
             <a:ext cx="1828800" cy="201168"/>
           </a:xfrm>
           <a:prstGeom prst="rect">
@@ -23257,7 +23347,7 @@
                 <a:ea typeface="Calibri" pitchFamily="34" charset="-122"/>
                 <a:cs typeface="Calibri" pitchFamily="34" charset="-120"/>
               </a:rPr>
-              <a:t>to lead out knowledge</a:t>
+              <a:t>again</a:t>
             </a:r>
             <a:endParaRPr lang="en-US" sz="850" dirty="0"/>
           </a:p>
@@ -23265,52 +23355,13 @@
       </p:sp>
       <p:sp>
         <p:nvSpPr>
-          <p:cNvPr id="19" name="Text 17"/>
-          <p:cNvSpPr/>
-          <p:nvPr/>
-        </p:nvSpPr>
-        <p:spPr>
-          <a:xfrm>
-            <a:off x="2938272" y="2752344"/>
-            <a:ext cx="1828800" cy="182880"/>
-          </a:xfrm>
-          <a:prstGeom prst="rect">
-            <a:avLst/>
-          </a:prstGeom>
-          <a:noFill/>
-          <a:ln/>
-        </p:spPr>
-        <p:txBody>
-          <a:bodyPr wrap="square" lIns="0" tIns="0" rIns="0" bIns="0" rtlCol="0" anchor="t"/>
-          <a:lstStyle/>
-          <a:p>
-            <a:pPr algn="ctr" indent="0" marL="0">
-              <a:buNone/>
-            </a:pPr>
-            <a:r>
-              <a:rPr lang="en-US" sz="700" i="1" dirty="0">
-                <a:solidFill>
-                  <a:srgbClr val="94A3B8"/>
-                </a:solidFill>
-                <a:latin typeface="Calibri" pitchFamily="34" charset="0"/>
-                <a:ea typeface="Calibri" pitchFamily="34" charset="-122"/>
-                <a:cs typeface="Calibri" pitchFamily="34" charset="-120"/>
-              </a:rPr>
-              <a:t>'e' dropped before vowel suffix</a:t>
-            </a:r>
-            <a:endParaRPr lang="en-US" sz="700" dirty="0"/>
-          </a:p>
-        </p:txBody>
-      </p:sp>
-      <p:sp>
-        <p:nvSpPr>
-          <p:cNvPr id="20" name="Shape 18"/>
-          <p:cNvSpPr/>
-          <p:nvPr/>
-        </p:nvSpPr>
-        <p:spPr>
-          <a:xfrm>
-            <a:off x="5803392" y="2258568"/>
+          <p:cNvPr id="19" name="Shape 17"/>
+          <p:cNvSpPr/>
+          <p:nvPr/>
+        </p:nvSpPr>
+        <p:spPr>
+          <a:xfrm>
+            <a:off x="4370832" y="2258568"/>
             <a:ext cx="1828800" cy="292608"/>
           </a:xfrm>
           <a:prstGeom prst="rect">
@@ -23319,11 +23370,11 @@
             </a:avLst>
           </a:prstGeom>
           <a:solidFill>
-            <a:srgbClr val="FCE7F3"/>
+            <a:srgbClr val="CCFBF1"/>
           </a:solidFill>
           <a:ln w="19050">
             <a:solidFill>
-              <a:srgbClr val="DB2777"/>
+              <a:srgbClr val="0D9488"/>
             </a:solidFill>
             <a:prstDash val="solid"/>
           </a:ln>
@@ -23338,13 +23389,13 @@
       </p:sp>
       <p:sp>
         <p:nvSpPr>
-          <p:cNvPr id="21" name="Text 19"/>
-          <p:cNvSpPr/>
-          <p:nvPr/>
-        </p:nvSpPr>
-        <p:spPr>
-          <a:xfrm>
-            <a:off x="5803392" y="2258568"/>
+          <p:cNvPr id="20" name="Text 18"/>
+          <p:cNvSpPr/>
+          <p:nvPr/>
+        </p:nvSpPr>
+        <p:spPr>
+          <a:xfrm>
+            <a:off x="4370832" y="2258568"/>
             <a:ext cx="1828800" cy="292608"/>
           </a:xfrm>
           <a:prstGeom prst="rect">
@@ -23363,13 +23414,13 @@
             <a:r>
               <a:rPr lang="en-US" sz="1300" b="1" dirty="0">
                 <a:solidFill>
-                  <a:srgbClr val="9D174D"/>
+                  <a:srgbClr val="0F766E"/>
                 </a:solidFill>
                 <a:latin typeface="Trebuchet MS" pitchFamily="34" charset="0"/>
                 <a:ea typeface="Trebuchet MS" pitchFamily="34" charset="-122"/>
                 <a:cs typeface="Trebuchet MS" pitchFamily="34" charset="-120"/>
               </a:rPr>
-              <a:t>ion</a:t>
+              <a:t>educate</a:t>
             </a:r>
             <a:endParaRPr lang="en-US" sz="1300" dirty="0"/>
           </a:p>
@@ -23377,13 +23428,13 @@
       </p:sp>
       <p:sp>
         <p:nvSpPr>
-          <p:cNvPr id="22" name="Text 20"/>
-          <p:cNvSpPr/>
-          <p:nvPr/>
-        </p:nvSpPr>
-        <p:spPr>
-          <a:xfrm>
-            <a:off x="5803392" y="2569464"/>
+          <p:cNvPr id="21" name="Text 19"/>
+          <p:cNvSpPr/>
+          <p:nvPr/>
+        </p:nvSpPr>
+        <p:spPr>
+          <a:xfrm>
+            <a:off x="4370832" y="2569464"/>
             <a:ext cx="1828800" cy="201168"/>
           </a:xfrm>
           <a:prstGeom prst="rect">
@@ -23408,7 +23459,7 @@
                 <a:ea typeface="Calibri" pitchFamily="34" charset="-122"/>
                 <a:cs typeface="Calibri" pitchFamily="34" charset="-120"/>
               </a:rPr>
-              <a:t>act or process of</a:t>
+              <a:t>to lead out, teach</a:t>
             </a:r>
             <a:endParaRPr lang="en-US" sz="850" dirty="0"/>
           </a:p>
@@ -23416,7 +23467,158 @@
       </p:sp>
       <p:sp>
         <p:nvSpPr>
+          <p:cNvPr id="22" name="Text 20"/>
+          <p:cNvSpPr/>
+          <p:nvPr/>
+        </p:nvSpPr>
+        <p:spPr>
+          <a:xfrm>
+            <a:off x="4370832" y="2752344"/>
+            <a:ext cx="1828800" cy="182880"/>
+          </a:xfrm>
+          <a:prstGeom prst="rect">
+            <a:avLst/>
+          </a:prstGeom>
+          <a:noFill/>
+          <a:ln/>
+        </p:spPr>
+        <p:txBody>
+          <a:bodyPr wrap="square" lIns="0" tIns="0" rIns="0" bIns="0" rtlCol="0" anchor="t"/>
+          <a:lstStyle/>
+          <a:p>
+            <a:pPr algn="ctr" indent="0" marL="0">
+              <a:buNone/>
+            </a:pPr>
+            <a:r>
+              <a:rPr lang="en-US" sz="700" i="1" dirty="0">
+                <a:solidFill>
+                  <a:srgbClr val="94A3B8"/>
+                </a:solidFill>
+                <a:latin typeface="Calibri" pitchFamily="34" charset="0"/>
+                <a:ea typeface="Calibri" pitchFamily="34" charset="-122"/>
+                <a:cs typeface="Calibri" pitchFamily="34" charset="-120"/>
+              </a:rPr>
+              <a:t>'e' dropped before vowel suffix</a:t>
+            </a:r>
+            <a:endParaRPr lang="en-US" sz="700" dirty="0"/>
+          </a:p>
+        </p:txBody>
+      </p:sp>
+      <p:sp>
+        <p:nvSpPr>
           <p:cNvPr id="23" name="Shape 21"/>
+          <p:cNvSpPr/>
+          <p:nvPr/>
+        </p:nvSpPr>
+        <p:spPr>
+          <a:xfrm>
+            <a:off x="6519672" y="2258568"/>
+            <a:ext cx="1828800" cy="292608"/>
+          </a:xfrm>
+          <a:prstGeom prst="rect">
+            <a:avLst>
+              <a:gd name="adj" fmla="val 25000"/>
+            </a:avLst>
+          </a:prstGeom>
+          <a:solidFill>
+            <a:srgbClr val="FCE7F3"/>
+          </a:solidFill>
+          <a:ln w="19050">
+            <a:solidFill>
+              <a:srgbClr val="DB2777"/>
+            </a:solidFill>
+            <a:prstDash val="solid"/>
+          </a:ln>
+          <a:effectLst>
+            <a:outerShdw sx="100000" sy="100000" kx="0" ky="0" algn="bl" rotWithShape="0" blurRad="101600" dist="38100" dir="8100000">
+              <a:srgbClr val="000000">
+                <a:alpha val="12000"/>
+              </a:srgbClr>
+            </a:outerShdw>
+          </a:effectLst>
+        </p:spPr>
+      </p:sp>
+      <p:sp>
+        <p:nvSpPr>
+          <p:cNvPr id="24" name="Text 22"/>
+          <p:cNvSpPr/>
+          <p:nvPr/>
+        </p:nvSpPr>
+        <p:spPr>
+          <a:xfrm>
+            <a:off x="6519672" y="2258568"/>
+            <a:ext cx="1828800" cy="292608"/>
+          </a:xfrm>
+          <a:prstGeom prst="rect">
+            <a:avLst/>
+          </a:prstGeom>
+          <a:noFill/>
+          <a:ln/>
+        </p:spPr>
+        <p:txBody>
+          <a:bodyPr wrap="square" lIns="0" tIns="0" rIns="0" bIns="0" rtlCol="0" anchor="ctr"/>
+          <a:lstStyle/>
+          <a:p>
+            <a:pPr algn="ctr" indent="0" marL="0">
+              <a:buNone/>
+            </a:pPr>
+            <a:r>
+              <a:rPr lang="en-US" sz="1300" b="1" dirty="0">
+                <a:solidFill>
+                  <a:srgbClr val="9D174D"/>
+                </a:solidFill>
+                <a:latin typeface="Trebuchet MS" pitchFamily="34" charset="0"/>
+                <a:ea typeface="Trebuchet MS" pitchFamily="34" charset="-122"/>
+                <a:cs typeface="Trebuchet MS" pitchFamily="34" charset="-120"/>
+              </a:rPr>
+              <a:t>ing</a:t>
+            </a:r>
+            <a:endParaRPr lang="en-US" sz="1300" dirty="0"/>
+          </a:p>
+        </p:txBody>
+      </p:sp>
+      <p:sp>
+        <p:nvSpPr>
+          <p:cNvPr id="25" name="Text 23"/>
+          <p:cNvSpPr/>
+          <p:nvPr/>
+        </p:nvSpPr>
+        <p:spPr>
+          <a:xfrm>
+            <a:off x="6519672" y="2569464"/>
+            <a:ext cx="1828800" cy="201168"/>
+          </a:xfrm>
+          <a:prstGeom prst="rect">
+            <a:avLst/>
+          </a:prstGeom>
+          <a:noFill/>
+          <a:ln/>
+        </p:spPr>
+        <p:txBody>
+          <a:bodyPr wrap="square" lIns="0" tIns="0" rIns="0" bIns="0" rtlCol="0" anchor="t"/>
+          <a:lstStyle/>
+          <a:p>
+            <a:pPr algn="ctr" indent="0" marL="0">
+              <a:buNone/>
+            </a:pPr>
+            <a:r>
+              <a:rPr lang="en-US" sz="850" dirty="0">
+                <a:solidFill>
+                  <a:srgbClr val="475569"/>
+                </a:solidFill>
+                <a:latin typeface="Calibri" pitchFamily="34" charset="0"/>
+                <a:ea typeface="Calibri" pitchFamily="34" charset="-122"/>
+                <a:cs typeface="Calibri" pitchFamily="34" charset="-120"/>
+              </a:rPr>
+              <a:t>ongoing action</a:t>
+            </a:r>
+            <a:endParaRPr lang="en-US" sz="850" dirty="0"/>
+          </a:p>
+        </p:txBody>
+      </p:sp>
+      <p:sp>
+        <p:nvSpPr>
+          <p:cNvPr id="26" name="Shape 24"/>
           <p:cNvSpPr/>
           <p:nvPr/>
         </p:nvSpPr>
@@ -23443,7 +23645,7 @@
       </p:sp>
       <p:sp>
         <p:nvSpPr>
-          <p:cNvPr id="24" name="Text 22"/>
+          <p:cNvPr id="27" name="Text 25"/>
           <p:cNvSpPr/>
           <p:nvPr/>
         </p:nvSpPr>
@@ -23482,7 +23684,7 @@
       </p:sp>
       <p:sp>
         <p:nvSpPr>
-          <p:cNvPr id="25" name="Shape 23"/>
+          <p:cNvPr id="28" name="Shape 26"/>
           <p:cNvSpPr/>
           <p:nvPr/>
         </p:nvSpPr>
@@ -23509,14 +23711,14 @@
       </p:sp>
       <p:sp>
         <p:nvSpPr>
-          <p:cNvPr id="26" name="Shape 24"/>
-          <p:cNvSpPr/>
-          <p:nvPr/>
-        </p:nvSpPr>
-        <p:spPr>
-          <a:xfrm>
-            <a:off x="1975104" y="3364992"/>
-            <a:ext cx="1554480" cy="475488"/>
+          <p:cNvPr id="29" name="Shape 27"/>
+          <p:cNvSpPr/>
+          <p:nvPr/>
+        </p:nvSpPr>
+        <p:spPr>
+          <a:xfrm>
+            <a:off x="1978152" y="3364992"/>
+            <a:ext cx="1225296" cy="475488"/>
           </a:xfrm>
           <a:prstGeom prst="rect">
             <a:avLst>
@@ -23536,14 +23738,14 @@
       </p:sp>
       <p:sp>
         <p:nvSpPr>
-          <p:cNvPr id="27" name="Text 25"/>
-          <p:cNvSpPr/>
-          <p:nvPr/>
-        </p:nvSpPr>
-        <p:spPr>
-          <a:xfrm>
-            <a:off x="1975104" y="3364992"/>
-            <a:ext cx="1554480" cy="475488"/>
+          <p:cNvPr id="30" name="Text 28"/>
+          <p:cNvSpPr/>
+          <p:nvPr/>
+        </p:nvSpPr>
+        <p:spPr>
+          <a:xfrm>
+            <a:off x="1978152" y="3364992"/>
+            <a:ext cx="1225296" cy="475488"/>
           </a:xfrm>
           <a:prstGeom prst="rect">
             <a:avLst/>
@@ -23567,7 +23769,7 @@
                 <a:ea typeface="Trebuchet MS" pitchFamily="34" charset="-122"/>
                 <a:cs typeface="Trebuchet MS" pitchFamily="34" charset="-120"/>
               </a:rPr>
-              <a:t>ed</a:t>
+              <a:t>re</a:t>
             </a:r>
             <a:endParaRPr lang="en-US" sz="1400" dirty="0"/>
           </a:p>
@@ -23575,14 +23777,14 @@
       </p:sp>
       <p:sp>
         <p:nvSpPr>
-          <p:cNvPr id="28" name="Text 26"/>
-          <p:cNvSpPr/>
-          <p:nvPr/>
-        </p:nvSpPr>
-        <p:spPr>
-          <a:xfrm>
-            <a:off x="3529584" y="3364992"/>
-            <a:ext cx="73152" cy="475488"/>
+          <p:cNvPr id="31" name="Text 29"/>
+          <p:cNvSpPr/>
+          <p:nvPr/>
+        </p:nvSpPr>
+        <p:spPr>
+          <a:xfrm>
+            <a:off x="3203448" y="3364992"/>
+            <a:ext cx="76200" cy="475488"/>
           </a:xfrm>
           <a:prstGeom prst="rect">
             <a:avLst/>
@@ -23614,14 +23816,14 @@
       </p:sp>
       <p:sp>
         <p:nvSpPr>
-          <p:cNvPr id="29" name="Shape 27"/>
-          <p:cNvSpPr/>
-          <p:nvPr/>
-        </p:nvSpPr>
-        <p:spPr>
-          <a:xfrm>
-            <a:off x="3602736" y="3364992"/>
-            <a:ext cx="1554480" cy="475488"/>
+          <p:cNvPr id="32" name="Shape 30"/>
+          <p:cNvSpPr/>
+          <p:nvPr/>
+        </p:nvSpPr>
+        <p:spPr>
+          <a:xfrm>
+            <a:off x="3279648" y="3364992"/>
+            <a:ext cx="1225296" cy="475488"/>
           </a:xfrm>
           <a:prstGeom prst="rect">
             <a:avLst>
@@ -23641,14 +23843,14 @@
       </p:sp>
       <p:sp>
         <p:nvSpPr>
-          <p:cNvPr id="30" name="Text 28"/>
-          <p:cNvSpPr/>
-          <p:nvPr/>
-        </p:nvSpPr>
-        <p:spPr>
-          <a:xfrm>
-            <a:off x="3602736" y="3364992"/>
-            <a:ext cx="1554480" cy="475488"/>
+          <p:cNvPr id="33" name="Text 31"/>
+          <p:cNvSpPr/>
+          <p:nvPr/>
+        </p:nvSpPr>
+        <p:spPr>
+          <a:xfrm>
+            <a:off x="3279648" y="3364992"/>
+            <a:ext cx="1225296" cy="475488"/>
           </a:xfrm>
           <a:prstGeom prst="rect">
             <a:avLst/>
@@ -23672,7 +23874,7 @@
                 <a:ea typeface="Trebuchet MS" pitchFamily="34" charset="-122"/>
                 <a:cs typeface="Trebuchet MS" pitchFamily="34" charset="-120"/>
               </a:rPr>
-              <a:t>u</a:t>
+              <a:t>ed</a:t>
             </a:r>
             <a:endParaRPr lang="en-US" sz="1400" dirty="0"/>
           </a:p>
@@ -23680,14 +23882,14 @@
       </p:sp>
       <p:sp>
         <p:nvSpPr>
-          <p:cNvPr id="31" name="Text 29"/>
-          <p:cNvSpPr/>
-          <p:nvPr/>
-        </p:nvSpPr>
-        <p:spPr>
-          <a:xfrm>
-            <a:off x="5157216" y="3364992"/>
-            <a:ext cx="73152" cy="475488"/>
+          <p:cNvPr id="34" name="Text 32"/>
+          <p:cNvSpPr/>
+          <p:nvPr/>
+        </p:nvSpPr>
+        <p:spPr>
+          <a:xfrm>
+            <a:off x="4504944" y="3364992"/>
+            <a:ext cx="76200" cy="475488"/>
           </a:xfrm>
           <a:prstGeom prst="rect">
             <a:avLst/>
@@ -23719,14 +23921,14 @@
       </p:sp>
       <p:sp>
         <p:nvSpPr>
-          <p:cNvPr id="32" name="Shape 30"/>
-          <p:cNvSpPr/>
-          <p:nvPr/>
-        </p:nvSpPr>
-        <p:spPr>
-          <a:xfrm>
-            <a:off x="5230368" y="3364992"/>
-            <a:ext cx="1554480" cy="475488"/>
+          <p:cNvPr id="35" name="Shape 33"/>
+          <p:cNvSpPr/>
+          <p:nvPr/>
+        </p:nvSpPr>
+        <p:spPr>
+          <a:xfrm>
+            <a:off x="4581144" y="3364992"/>
+            <a:ext cx="1225296" cy="475488"/>
           </a:xfrm>
           <a:prstGeom prst="rect">
             <a:avLst>
@@ -23746,14 +23948,14 @@
       </p:sp>
       <p:sp>
         <p:nvSpPr>
-          <p:cNvPr id="33" name="Text 31"/>
-          <p:cNvSpPr/>
-          <p:nvPr/>
-        </p:nvSpPr>
-        <p:spPr>
-          <a:xfrm>
-            <a:off x="5230368" y="3364992"/>
-            <a:ext cx="1554480" cy="475488"/>
+          <p:cNvPr id="36" name="Text 34"/>
+          <p:cNvSpPr/>
+          <p:nvPr/>
+        </p:nvSpPr>
+        <p:spPr>
+          <a:xfrm>
+            <a:off x="4581144" y="3364992"/>
+            <a:ext cx="1225296" cy="475488"/>
           </a:xfrm>
           <a:prstGeom prst="rect">
             <a:avLst/>
@@ -23777,7 +23979,7 @@
                 <a:ea typeface="Trebuchet MS" pitchFamily="34" charset="-122"/>
                 <a:cs typeface="Trebuchet MS" pitchFamily="34" charset="-120"/>
               </a:rPr>
-              <a:t>ca</a:t>
+              <a:t>u</a:t>
             </a:r>
             <a:endParaRPr lang="en-US" sz="1400" dirty="0"/>
           </a:p>
@@ -23785,14 +23987,14 @@
       </p:sp>
       <p:sp>
         <p:nvSpPr>
-          <p:cNvPr id="34" name="Text 32"/>
-          <p:cNvSpPr/>
-          <p:nvPr/>
-        </p:nvSpPr>
-        <p:spPr>
-          <a:xfrm>
-            <a:off x="6784848" y="3364992"/>
-            <a:ext cx="73152" cy="475488"/>
+          <p:cNvPr id="37" name="Text 35"/>
+          <p:cNvSpPr/>
+          <p:nvPr/>
+        </p:nvSpPr>
+        <p:spPr>
+          <a:xfrm>
+            <a:off x="5806440" y="3364992"/>
+            <a:ext cx="76200" cy="475488"/>
           </a:xfrm>
           <a:prstGeom prst="rect">
             <a:avLst/>
@@ -23824,14 +24026,14 @@
       </p:sp>
       <p:sp>
         <p:nvSpPr>
-          <p:cNvPr id="35" name="Shape 33"/>
-          <p:cNvSpPr/>
-          <p:nvPr/>
-        </p:nvSpPr>
-        <p:spPr>
-          <a:xfrm>
-            <a:off x="6858000" y="3364992"/>
-            <a:ext cx="1554480" cy="475488"/>
+          <p:cNvPr id="38" name="Shape 36"/>
+          <p:cNvSpPr/>
+          <p:nvPr/>
+        </p:nvSpPr>
+        <p:spPr>
+          <a:xfrm>
+            <a:off x="5882640" y="3364992"/>
+            <a:ext cx="1225296" cy="475488"/>
           </a:xfrm>
           <a:prstGeom prst="rect">
             <a:avLst>
@@ -23851,14 +24053,14 @@
       </p:sp>
       <p:sp>
         <p:nvSpPr>
-          <p:cNvPr id="36" name="Text 34"/>
-          <p:cNvSpPr/>
-          <p:nvPr/>
-        </p:nvSpPr>
-        <p:spPr>
-          <a:xfrm>
-            <a:off x="6858000" y="3364992"/>
-            <a:ext cx="1554480" cy="475488"/>
+          <p:cNvPr id="39" name="Text 37"/>
+          <p:cNvSpPr/>
+          <p:nvPr/>
+        </p:nvSpPr>
+        <p:spPr>
+          <a:xfrm>
+            <a:off x="5882640" y="3364992"/>
+            <a:ext cx="1225296" cy="475488"/>
           </a:xfrm>
           <a:prstGeom prst="rect">
             <a:avLst/>
@@ -23882,7 +24084,7 @@
                 <a:ea typeface="Trebuchet MS" pitchFamily="34" charset="-122"/>
                 <a:cs typeface="Trebuchet MS" pitchFamily="34" charset="-120"/>
               </a:rPr>
-              <a:t>tion</a:t>
+              <a:t>ca</a:t>
             </a:r>
             <a:endParaRPr lang="en-US" sz="1400" dirty="0"/>
           </a:p>
@@ -23890,7 +24092,112 @@
       </p:sp>
       <p:sp>
         <p:nvSpPr>
-          <p:cNvPr id="37" name="Shape 35"/>
+          <p:cNvPr id="40" name="Text 38"/>
+          <p:cNvSpPr/>
+          <p:nvPr/>
+        </p:nvSpPr>
+        <p:spPr>
+          <a:xfrm>
+            <a:off x="7107936" y="3364992"/>
+            <a:ext cx="76200" cy="475488"/>
+          </a:xfrm>
+          <a:prstGeom prst="rect">
+            <a:avLst/>
+          </a:prstGeom>
+          <a:noFill/>
+          <a:ln/>
+        </p:spPr>
+        <p:txBody>
+          <a:bodyPr wrap="square" lIns="0" tIns="0" rIns="0" bIns="0" rtlCol="0" anchor="ctr"/>
+          <a:lstStyle/>
+          <a:p>
+            <a:pPr algn="ctr" indent="0" marL="0">
+              <a:buNone/>
+            </a:pPr>
+            <a:r>
+              <a:rPr lang="en-US" sz="1600" b="1" dirty="0">
+                <a:solidFill>
+                  <a:srgbClr val="0D9488"/>
+                </a:solidFill>
+                <a:latin typeface="Trebuchet MS" pitchFamily="34" charset="0"/>
+                <a:ea typeface="Trebuchet MS" pitchFamily="34" charset="-122"/>
+                <a:cs typeface="Trebuchet MS" pitchFamily="34" charset="-120"/>
+              </a:rPr>
+              <a:t>·</a:t>
+            </a:r>
+            <a:endParaRPr lang="en-US" sz="1600" dirty="0"/>
+          </a:p>
+        </p:txBody>
+      </p:sp>
+      <p:sp>
+        <p:nvSpPr>
+          <p:cNvPr id="41" name="Shape 39"/>
+          <p:cNvSpPr/>
+          <p:nvPr/>
+        </p:nvSpPr>
+        <p:spPr>
+          <a:xfrm>
+            <a:off x="7184136" y="3364992"/>
+            <a:ext cx="1225296" cy="475488"/>
+          </a:xfrm>
+          <a:prstGeom prst="rect">
+            <a:avLst>
+              <a:gd name="adj" fmla="val 9615"/>
+            </a:avLst>
+          </a:prstGeom>
+          <a:solidFill>
+            <a:srgbClr val="FFFFFF"/>
+          </a:solidFill>
+          <a:ln w="12700">
+            <a:solidFill>
+              <a:srgbClr val="0D9488"/>
+            </a:solidFill>
+            <a:prstDash val="solid"/>
+          </a:ln>
+        </p:spPr>
+      </p:sp>
+      <p:sp>
+        <p:nvSpPr>
+          <p:cNvPr id="42" name="Text 40"/>
+          <p:cNvSpPr/>
+          <p:nvPr/>
+        </p:nvSpPr>
+        <p:spPr>
+          <a:xfrm>
+            <a:off x="7184136" y="3364992"/>
+            <a:ext cx="1225296" cy="475488"/>
+          </a:xfrm>
+          <a:prstGeom prst="rect">
+            <a:avLst/>
+          </a:prstGeom>
+          <a:noFill/>
+          <a:ln/>
+        </p:spPr>
+        <p:txBody>
+          <a:bodyPr wrap="square" lIns="0" tIns="0" rIns="0" bIns="0" rtlCol="0" anchor="ctr"/>
+          <a:lstStyle/>
+          <a:p>
+            <a:pPr algn="ctr" indent="0" marL="0">
+              <a:buNone/>
+            </a:pPr>
+            <a:r>
+              <a:rPr lang="en-US" sz="1400" b="1" dirty="0">
+                <a:solidFill>
+                  <a:srgbClr val="0D9488"/>
+                </a:solidFill>
+                <a:latin typeface="Trebuchet MS" pitchFamily="34" charset="0"/>
+                <a:ea typeface="Trebuchet MS" pitchFamily="34" charset="-122"/>
+                <a:cs typeface="Trebuchet MS" pitchFamily="34" charset="-120"/>
+              </a:rPr>
+              <a:t>ting</a:t>
+            </a:r>
+            <a:endParaRPr lang="en-US" sz="1400" dirty="0"/>
+          </a:p>
+        </p:txBody>
+      </p:sp>
+      <p:sp>
+        <p:nvSpPr>
+          <p:cNvPr id="43" name="Shape 41"/>
           <p:cNvSpPr/>
           <p:nvPr/>
         </p:nvSpPr>
@@ -23917,7 +24224,7 @@
       </p:sp>
       <p:sp>
         <p:nvSpPr>
-          <p:cNvPr id="38" name="Text 36"/>
+          <p:cNvPr id="44" name="Text 42"/>
           <p:cNvSpPr/>
           <p:nvPr/>
         </p:nvSpPr>
@@ -23956,7 +24263,7 @@
       </p:sp>
       <p:sp>
         <p:nvSpPr>
-          <p:cNvPr id="39" name="Shape 37"/>
+          <p:cNvPr id="45" name="Shape 43"/>
           <p:cNvSpPr/>
           <p:nvPr/>
         </p:nvSpPr>
@@ -23983,14 +24290,14 @@
       </p:sp>
       <p:sp>
         <p:nvSpPr>
-          <p:cNvPr id="40" name="Shape 38"/>
-          <p:cNvSpPr/>
-          <p:nvPr/>
-        </p:nvSpPr>
-        <p:spPr>
-          <a:xfrm>
-            <a:off x="2023872" y="4169664"/>
-            <a:ext cx="685800" cy="384048"/>
+          <p:cNvPr id="46" name="Shape 44"/>
+          <p:cNvSpPr/>
+          <p:nvPr/>
+        </p:nvSpPr>
+        <p:spPr>
+          <a:xfrm>
+            <a:off x="1951330" y="4169664"/>
+            <a:ext cx="676656" cy="384048"/>
           </a:xfrm>
           <a:prstGeom prst="rect">
             <a:avLst>
@@ -24010,14 +24317,14 @@
       </p:sp>
       <p:sp>
         <p:nvSpPr>
-          <p:cNvPr id="41" name="Text 39"/>
-          <p:cNvSpPr/>
-          <p:nvPr/>
-        </p:nvSpPr>
-        <p:spPr>
-          <a:xfrm>
-            <a:off x="2023872" y="4169664"/>
-            <a:ext cx="685800" cy="384048"/>
+          <p:cNvPr id="47" name="Text 45"/>
+          <p:cNvSpPr/>
+          <p:nvPr/>
+        </p:nvSpPr>
+        <p:spPr>
+          <a:xfrm>
+            <a:off x="1951330" y="4169664"/>
+            <a:ext cx="676656" cy="384048"/>
           </a:xfrm>
           <a:prstGeom prst="rect">
             <a:avLst/>
@@ -24041,7 +24348,7 @@
                 <a:ea typeface="Trebuchet MS" pitchFamily="34" charset="-122"/>
                 <a:cs typeface="Trebuchet MS" pitchFamily="34" charset="-120"/>
               </a:rPr>
-              <a:t>e</a:t>
+              <a:t>r</a:t>
             </a:r>
             <a:endParaRPr lang="en-US" sz="900" dirty="0"/>
           </a:p>
@@ -24049,14 +24356,14 @@
       </p:sp>
       <p:sp>
         <p:nvSpPr>
-          <p:cNvPr id="42" name="Shape 40"/>
-          <p:cNvSpPr/>
-          <p:nvPr/>
-        </p:nvSpPr>
-        <p:spPr>
-          <a:xfrm>
-            <a:off x="2831592" y="4169664"/>
-            <a:ext cx="685800" cy="384048"/>
+          <p:cNvPr id="48" name="Shape 46"/>
+          <p:cNvSpPr/>
+          <p:nvPr/>
+        </p:nvSpPr>
+        <p:spPr>
+          <a:xfrm>
+            <a:off x="2677363" y="4169664"/>
+            <a:ext cx="676656" cy="384048"/>
           </a:xfrm>
           <a:prstGeom prst="rect">
             <a:avLst>
@@ -24076,14 +24383,14 @@
       </p:sp>
       <p:sp>
         <p:nvSpPr>
-          <p:cNvPr id="43" name="Text 41"/>
-          <p:cNvSpPr/>
-          <p:nvPr/>
-        </p:nvSpPr>
-        <p:spPr>
-          <a:xfrm>
-            <a:off x="2831592" y="4169664"/>
-            <a:ext cx="685800" cy="384048"/>
+          <p:cNvPr id="49" name="Text 47"/>
+          <p:cNvSpPr/>
+          <p:nvPr/>
+        </p:nvSpPr>
+        <p:spPr>
+          <a:xfrm>
+            <a:off x="2677363" y="4169664"/>
+            <a:ext cx="676656" cy="384048"/>
           </a:xfrm>
           <a:prstGeom prst="rect">
             <a:avLst/>
@@ -24107,7 +24414,7 @@
                 <a:ea typeface="Trebuchet MS" pitchFamily="34" charset="-122"/>
                 <a:cs typeface="Trebuchet MS" pitchFamily="34" charset="-120"/>
               </a:rPr>
-              <a:t>d</a:t>
+              <a:t>e</a:t>
             </a:r>
             <a:endParaRPr lang="en-US" sz="900" dirty="0"/>
           </a:p>
@@ -24115,14 +24422,14 @@
       </p:sp>
       <p:sp>
         <p:nvSpPr>
-          <p:cNvPr id="44" name="Shape 42"/>
-          <p:cNvSpPr/>
-          <p:nvPr/>
-        </p:nvSpPr>
-        <p:spPr>
-          <a:xfrm>
-            <a:off x="3639312" y="4169664"/>
-            <a:ext cx="685800" cy="384048"/>
+          <p:cNvPr id="50" name="Shape 48"/>
+          <p:cNvSpPr/>
+          <p:nvPr/>
+        </p:nvSpPr>
+        <p:spPr>
+          <a:xfrm>
+            <a:off x="3403397" y="4169664"/>
+            <a:ext cx="676656" cy="384048"/>
           </a:xfrm>
           <a:prstGeom prst="rect">
             <a:avLst>
@@ -24142,14 +24449,14 @@
       </p:sp>
       <p:sp>
         <p:nvSpPr>
-          <p:cNvPr id="45" name="Text 43"/>
-          <p:cNvSpPr/>
-          <p:nvPr/>
-        </p:nvSpPr>
-        <p:spPr>
-          <a:xfrm>
-            <a:off x="3639312" y="4169664"/>
-            <a:ext cx="685800" cy="384048"/>
+          <p:cNvPr id="51" name="Text 49"/>
+          <p:cNvSpPr/>
+          <p:nvPr/>
+        </p:nvSpPr>
+        <p:spPr>
+          <a:xfrm>
+            <a:off x="3403397" y="4169664"/>
+            <a:ext cx="676656" cy="384048"/>
           </a:xfrm>
           <a:prstGeom prst="rect">
             <a:avLst/>
@@ -24173,7 +24480,7 @@
                 <a:ea typeface="Trebuchet MS" pitchFamily="34" charset="-122"/>
                 <a:cs typeface="Trebuchet MS" pitchFamily="34" charset="-120"/>
               </a:rPr>
-              <a:t>u</a:t>
+              <a:t>e</a:t>
             </a:r>
             <a:endParaRPr lang="en-US" sz="900" dirty="0"/>
           </a:p>
@@ -24181,14 +24488,14 @@
       </p:sp>
       <p:sp>
         <p:nvSpPr>
-          <p:cNvPr id="46" name="Shape 44"/>
-          <p:cNvSpPr/>
-          <p:nvPr/>
-        </p:nvSpPr>
-        <p:spPr>
-          <a:xfrm>
-            <a:off x="4447032" y="4169664"/>
-            <a:ext cx="685800" cy="384048"/>
+          <p:cNvPr id="52" name="Shape 50"/>
+          <p:cNvSpPr/>
+          <p:nvPr/>
+        </p:nvSpPr>
+        <p:spPr>
+          <a:xfrm>
+            <a:off x="4129430" y="4169664"/>
+            <a:ext cx="676656" cy="384048"/>
           </a:xfrm>
           <a:prstGeom prst="rect">
             <a:avLst>
@@ -24208,14 +24515,14 @@
       </p:sp>
       <p:sp>
         <p:nvSpPr>
-          <p:cNvPr id="47" name="Text 45"/>
-          <p:cNvSpPr/>
-          <p:nvPr/>
-        </p:nvSpPr>
-        <p:spPr>
-          <a:xfrm>
-            <a:off x="4447032" y="4169664"/>
-            <a:ext cx="685800" cy="384048"/>
+          <p:cNvPr id="53" name="Text 51"/>
+          <p:cNvSpPr/>
+          <p:nvPr/>
+        </p:nvSpPr>
+        <p:spPr>
+          <a:xfrm>
+            <a:off x="4129430" y="4169664"/>
+            <a:ext cx="676656" cy="384048"/>
           </a:xfrm>
           <a:prstGeom prst="rect">
             <a:avLst/>
@@ -24239,6 +24546,138 @@
                 <a:ea typeface="Trebuchet MS" pitchFamily="34" charset="-122"/>
                 <a:cs typeface="Trebuchet MS" pitchFamily="34" charset="-120"/>
               </a:rPr>
+              <a:t>d</a:t>
+            </a:r>
+            <a:endParaRPr lang="en-US" sz="900" dirty="0"/>
+          </a:p>
+        </p:txBody>
+      </p:sp>
+      <p:sp>
+        <p:nvSpPr>
+          <p:cNvPr id="54" name="Shape 52"/>
+          <p:cNvSpPr/>
+          <p:nvPr/>
+        </p:nvSpPr>
+        <p:spPr>
+          <a:xfrm>
+            <a:off x="4855464" y="4169664"/>
+            <a:ext cx="676656" cy="384048"/>
+          </a:xfrm>
+          <a:prstGeom prst="rect">
+            <a:avLst>
+              <a:gd name="adj" fmla="val 9524"/>
+            </a:avLst>
+          </a:prstGeom>
+          <a:solidFill>
+            <a:srgbClr val="FFFFFF"/>
+          </a:solidFill>
+          <a:ln w="12700">
+            <a:solidFill>
+              <a:srgbClr val="DB2777"/>
+            </a:solidFill>
+            <a:prstDash val="solid"/>
+          </a:ln>
+        </p:spPr>
+      </p:sp>
+      <p:sp>
+        <p:nvSpPr>
+          <p:cNvPr id="55" name="Text 53"/>
+          <p:cNvSpPr/>
+          <p:nvPr/>
+        </p:nvSpPr>
+        <p:spPr>
+          <a:xfrm>
+            <a:off x="4855464" y="4169664"/>
+            <a:ext cx="676656" cy="384048"/>
+          </a:xfrm>
+          <a:prstGeom prst="rect">
+            <a:avLst/>
+          </a:prstGeom>
+          <a:noFill/>
+          <a:ln/>
+        </p:spPr>
+        <p:txBody>
+          <a:bodyPr wrap="square" lIns="0" tIns="0" rIns="0" bIns="0" rtlCol="0" anchor="ctr"/>
+          <a:lstStyle/>
+          <a:p>
+            <a:pPr algn="ctr" indent="0" marL="0">
+              <a:buNone/>
+            </a:pPr>
+            <a:r>
+              <a:rPr lang="en-US" sz="900" b="1" dirty="0">
+                <a:solidFill>
+                  <a:srgbClr val="9D174D"/>
+                </a:solidFill>
+                <a:latin typeface="Trebuchet MS" pitchFamily="34" charset="0"/>
+                <a:ea typeface="Trebuchet MS" pitchFamily="34" charset="-122"/>
+                <a:cs typeface="Trebuchet MS" pitchFamily="34" charset="-120"/>
+              </a:rPr>
+              <a:t>u</a:t>
+            </a:r>
+            <a:endParaRPr lang="en-US" sz="900" dirty="0"/>
+          </a:p>
+        </p:txBody>
+      </p:sp>
+      <p:sp>
+        <p:nvSpPr>
+          <p:cNvPr id="56" name="Shape 54"/>
+          <p:cNvSpPr/>
+          <p:nvPr/>
+        </p:nvSpPr>
+        <p:spPr>
+          <a:xfrm>
+            <a:off x="5581498" y="4169664"/>
+            <a:ext cx="676656" cy="384048"/>
+          </a:xfrm>
+          <a:prstGeom prst="rect">
+            <a:avLst>
+              <a:gd name="adj" fmla="val 9524"/>
+            </a:avLst>
+          </a:prstGeom>
+          <a:solidFill>
+            <a:srgbClr val="FFFFFF"/>
+          </a:solidFill>
+          <a:ln w="12700">
+            <a:solidFill>
+              <a:srgbClr val="DB2777"/>
+            </a:solidFill>
+            <a:prstDash val="solid"/>
+          </a:ln>
+        </p:spPr>
+      </p:sp>
+      <p:sp>
+        <p:nvSpPr>
+          <p:cNvPr id="57" name="Text 55"/>
+          <p:cNvSpPr/>
+          <p:nvPr/>
+        </p:nvSpPr>
+        <p:spPr>
+          <a:xfrm>
+            <a:off x="5581498" y="4169664"/>
+            <a:ext cx="676656" cy="384048"/>
+          </a:xfrm>
+          <a:prstGeom prst="rect">
+            <a:avLst/>
+          </a:prstGeom>
+          <a:noFill/>
+          <a:ln/>
+        </p:spPr>
+        <p:txBody>
+          <a:bodyPr wrap="square" lIns="0" tIns="0" rIns="0" bIns="0" rtlCol="0" anchor="ctr"/>
+          <a:lstStyle/>
+          <a:p>
+            <a:pPr algn="ctr" indent="0" marL="0">
+              <a:buNone/>
+            </a:pPr>
+            <a:r>
+              <a:rPr lang="en-US" sz="900" b="1" dirty="0">
+                <a:solidFill>
+                  <a:srgbClr val="9D174D"/>
+                </a:solidFill>
+                <a:latin typeface="Trebuchet MS" pitchFamily="34" charset="0"/>
+                <a:ea typeface="Trebuchet MS" pitchFamily="34" charset="-122"/>
+                <a:cs typeface="Trebuchet MS" pitchFamily="34" charset="-120"/>
+              </a:rPr>
               <a:t>c</a:t>
             </a:r>
             <a:endParaRPr lang="en-US" sz="900" dirty="0"/>
@@ -24247,14 +24686,14 @@
       </p:sp>
       <p:sp>
         <p:nvSpPr>
-          <p:cNvPr id="48" name="Text 46"/>
-          <p:cNvSpPr/>
-          <p:nvPr/>
-        </p:nvSpPr>
-        <p:spPr>
-          <a:xfrm>
-            <a:off x="4447032" y="4572000"/>
-            <a:ext cx="685800" cy="219456"/>
+          <p:cNvPr id="58" name="Text 56"/>
+          <p:cNvSpPr/>
+          <p:nvPr/>
+        </p:nvSpPr>
+        <p:spPr>
+          <a:xfrm>
+            <a:off x="5581498" y="4572000"/>
+            <a:ext cx="676656" cy="219456"/>
           </a:xfrm>
           <a:prstGeom prst="rect">
             <a:avLst/>
@@ -24286,14 +24725,14 @@
       </p:sp>
       <p:sp>
         <p:nvSpPr>
-          <p:cNvPr id="49" name="Shape 47"/>
-          <p:cNvSpPr/>
-          <p:nvPr/>
-        </p:nvSpPr>
-        <p:spPr>
-          <a:xfrm>
-            <a:off x="5254752" y="4169664"/>
-            <a:ext cx="685800" cy="384048"/>
+          <p:cNvPr id="59" name="Shape 57"/>
+          <p:cNvSpPr/>
+          <p:nvPr/>
+        </p:nvSpPr>
+        <p:spPr>
+          <a:xfrm>
+            <a:off x="6307531" y="4169664"/>
+            <a:ext cx="676656" cy="384048"/>
           </a:xfrm>
           <a:prstGeom prst="rect">
             <a:avLst>
@@ -24313,14 +24752,14 @@
       </p:sp>
       <p:sp>
         <p:nvSpPr>
-          <p:cNvPr id="50" name="Text 48"/>
-          <p:cNvSpPr/>
-          <p:nvPr/>
-        </p:nvSpPr>
-        <p:spPr>
-          <a:xfrm>
-            <a:off x="5254752" y="4169664"/>
-            <a:ext cx="685800" cy="384048"/>
+          <p:cNvPr id="60" name="Text 58"/>
+          <p:cNvSpPr/>
+          <p:nvPr/>
+        </p:nvSpPr>
+        <p:spPr>
+          <a:xfrm>
+            <a:off x="6307531" y="4169664"/>
+            <a:ext cx="676656" cy="384048"/>
           </a:xfrm>
           <a:prstGeom prst="rect">
             <a:avLst/>
@@ -24352,14 +24791,14 @@
       </p:sp>
       <p:sp>
         <p:nvSpPr>
-          <p:cNvPr id="51" name="Shape 49"/>
-          <p:cNvSpPr/>
-          <p:nvPr/>
-        </p:nvSpPr>
-        <p:spPr>
-          <a:xfrm>
-            <a:off x="6062472" y="4169664"/>
-            <a:ext cx="685800" cy="384048"/>
+          <p:cNvPr id="61" name="Shape 59"/>
+          <p:cNvSpPr/>
+          <p:nvPr/>
+        </p:nvSpPr>
+        <p:spPr>
+          <a:xfrm>
+            <a:off x="7033565" y="4169664"/>
+            <a:ext cx="676656" cy="384048"/>
           </a:xfrm>
           <a:prstGeom prst="rect">
             <a:avLst>
@@ -24379,14 +24818,14 @@
       </p:sp>
       <p:sp>
         <p:nvSpPr>
-          <p:cNvPr id="52" name="Text 50"/>
-          <p:cNvSpPr/>
-          <p:nvPr/>
-        </p:nvSpPr>
-        <p:spPr>
-          <a:xfrm>
-            <a:off x="6062472" y="4169664"/>
-            <a:ext cx="685800" cy="384048"/>
+          <p:cNvPr id="62" name="Text 60"/>
+          <p:cNvSpPr/>
+          <p:nvPr/>
+        </p:nvSpPr>
+        <p:spPr>
+          <a:xfrm>
+            <a:off x="7033565" y="4169664"/>
+            <a:ext cx="676656" cy="384048"/>
           </a:xfrm>
           <a:prstGeom prst="rect">
             <a:avLst/>
@@ -24418,53 +24857,14 @@
       </p:sp>
       <p:sp>
         <p:nvSpPr>
-          <p:cNvPr id="53" name="Text 51"/>
-          <p:cNvSpPr/>
-          <p:nvPr/>
-        </p:nvSpPr>
-        <p:spPr>
-          <a:xfrm>
-            <a:off x="6062472" y="4572000"/>
-            <a:ext cx="685800" cy="219456"/>
-          </a:xfrm>
-          <a:prstGeom prst="rect">
-            <a:avLst/>
-          </a:prstGeom>
-          <a:noFill/>
-          <a:ln/>
-        </p:spPr>
-        <p:txBody>
-          <a:bodyPr wrap="square" lIns="0" tIns="0" rIns="0" bIns="0" rtlCol="0" anchor="t"/>
-          <a:lstStyle/>
-          <a:p>
-            <a:pPr algn="ctr" indent="0" marL="0">
-              <a:buNone/>
-            </a:pPr>
-            <a:r>
-              <a:rPr lang="en-US" sz="750" i="1" dirty="0">
-                <a:solidFill>
-                  <a:srgbClr val="94A3B8"/>
-                </a:solidFill>
-                <a:latin typeface="Calibri" pitchFamily="34" charset="0"/>
-                <a:ea typeface="Calibri" pitchFamily="34" charset="-122"/>
-                <a:cs typeface="Calibri" pitchFamily="34" charset="-120"/>
-              </a:rPr>
-              <a:t>/sh/</a:t>
-            </a:r>
-            <a:endParaRPr lang="en-US" sz="750" dirty="0"/>
-          </a:p>
-        </p:txBody>
-      </p:sp>
-      <p:sp>
-        <p:nvSpPr>
-          <p:cNvPr id="54" name="Shape 52"/>
-          <p:cNvSpPr/>
-          <p:nvPr/>
-        </p:nvSpPr>
-        <p:spPr>
-          <a:xfrm>
-            <a:off x="6870192" y="4169664"/>
-            <a:ext cx="685800" cy="384048"/>
+          <p:cNvPr id="63" name="Shape 61"/>
+          <p:cNvSpPr/>
+          <p:nvPr/>
+        </p:nvSpPr>
+        <p:spPr>
+          <a:xfrm>
+            <a:off x="7759598" y="4169664"/>
+            <a:ext cx="676656" cy="384048"/>
           </a:xfrm>
           <a:prstGeom prst="rect">
             <a:avLst>
@@ -24484,14 +24884,14 @@
       </p:sp>
       <p:sp>
         <p:nvSpPr>
-          <p:cNvPr id="55" name="Text 53"/>
-          <p:cNvSpPr/>
-          <p:nvPr/>
-        </p:nvSpPr>
-        <p:spPr>
-          <a:xfrm>
-            <a:off x="6870192" y="4169664"/>
-            <a:ext cx="685800" cy="384048"/>
+          <p:cNvPr id="64" name="Text 62"/>
+          <p:cNvSpPr/>
+          <p:nvPr/>
+        </p:nvSpPr>
+        <p:spPr>
+          <a:xfrm>
+            <a:off x="7759598" y="4169664"/>
+            <a:ext cx="676656" cy="384048"/>
           </a:xfrm>
           <a:prstGeom prst="rect">
             <a:avLst/>
@@ -24515,73 +24915,7 @@
                 <a:ea typeface="Trebuchet MS" pitchFamily="34" charset="-122"/>
                 <a:cs typeface="Trebuchet MS" pitchFamily="34" charset="-120"/>
               </a:rPr>
-              <a:t>io</a:t>
-            </a:r>
-            <a:endParaRPr lang="en-US" sz="900" dirty="0"/>
-          </a:p>
-        </p:txBody>
-      </p:sp>
-      <p:sp>
-        <p:nvSpPr>
-          <p:cNvPr id="56" name="Shape 54"/>
-          <p:cNvSpPr/>
-          <p:nvPr/>
-        </p:nvSpPr>
-        <p:spPr>
-          <a:xfrm>
-            <a:off x="7677912" y="4169664"/>
-            <a:ext cx="685800" cy="384048"/>
-          </a:xfrm>
-          <a:prstGeom prst="rect">
-            <a:avLst>
-              <a:gd name="adj" fmla="val 9524"/>
-            </a:avLst>
-          </a:prstGeom>
-          <a:solidFill>
-            <a:srgbClr val="FFFFFF"/>
-          </a:solidFill>
-          <a:ln w="12700">
-            <a:solidFill>
-              <a:srgbClr val="DB2777"/>
-            </a:solidFill>
-            <a:prstDash val="solid"/>
-          </a:ln>
-        </p:spPr>
-      </p:sp>
-      <p:sp>
-        <p:nvSpPr>
-          <p:cNvPr id="57" name="Text 55"/>
-          <p:cNvSpPr/>
-          <p:nvPr/>
-        </p:nvSpPr>
-        <p:spPr>
-          <a:xfrm>
-            <a:off x="7677912" y="4169664"/>
-            <a:ext cx="685800" cy="384048"/>
-          </a:xfrm>
-          <a:prstGeom prst="rect">
-            <a:avLst/>
-          </a:prstGeom>
-          <a:noFill/>
-          <a:ln/>
-        </p:spPr>
-        <p:txBody>
-          <a:bodyPr wrap="square" lIns="0" tIns="0" rIns="0" bIns="0" rtlCol="0" anchor="ctr"/>
-          <a:lstStyle/>
-          <a:p>
-            <a:pPr algn="ctr" indent="0" marL="0">
-              <a:buNone/>
-            </a:pPr>
-            <a:r>
-              <a:rPr lang="en-US" sz="900" b="1" dirty="0">
-                <a:solidFill>
-                  <a:srgbClr val="9D174D"/>
-                </a:solidFill>
-                <a:latin typeface="Trebuchet MS" pitchFamily="34" charset="0"/>
-                <a:ea typeface="Trebuchet MS" pitchFamily="34" charset="-122"/>
-                <a:cs typeface="Trebuchet MS" pitchFamily="34" charset="-120"/>
-              </a:rPr>
-              <a:t>n</a:t>
+              <a:t>ing</a:t>
             </a:r>
             <a:endParaRPr lang="en-US" sz="900" dirty="0"/>
           </a:p>
@@ -24873,7 +25207,7 @@
                 <a:ea typeface="Calibri" pitchFamily="34" charset="-122"/>
                 <a:cs typeface="Calibri" pitchFamily="34" charset="-120"/>
               </a:rPr>
-              <a:t>Word Labs  •  wordlabs.app  •  Root: 'educate' = to lead out knowledge</a:t>
+              <a:t>Word Labs  •  wordlabs.app  •  Root: 'educate' = to lead out, teach</a:t>
             </a:r>
             <a:endParaRPr lang="en-US" sz="800" dirty="0"/>
           </a:p>
@@ -25012,7 +25346,7 @@
                 <a:ea typeface="Trebuchet MS" pitchFamily="34" charset="-122"/>
                 <a:cs typeface="Trebuchet MS" pitchFamily="34" charset="-120"/>
               </a:rPr>
-              <a:t>reeducate</a:t>
+              <a:t>uneducated</a:t>
             </a:r>
             <a:endParaRPr lang="en-US" sz="2800" dirty="0"/>
           </a:p>
@@ -25700,7 +26034,7 @@
                 <a:ea typeface="Calibri" pitchFamily="34" charset="-122"/>
                 <a:cs typeface="Calibri" pitchFamily="34" charset="-120"/>
               </a:rPr>
-              <a:t>Word Labs  •  wordlabs.app  •  Root: 'educate' = to lead out knowledge</a:t>
+              <a:t>Word Labs  •  wordlabs.app  •  Root: 'educate' = to lead out, teach</a:t>
             </a:r>
             <a:endParaRPr lang="en-US" sz="800" dirty="0"/>
           </a:p>
@@ -25839,7 +26173,7 @@
                 <a:ea typeface="Trebuchet MS" pitchFamily="34" charset="-122"/>
                 <a:cs typeface="Trebuchet MS" pitchFamily="34" charset="-120"/>
               </a:rPr>
-              <a:t>reeducate</a:t>
+              <a:t>uneducated</a:t>
             </a:r>
             <a:endParaRPr lang="en-US" sz="2800" dirty="0"/>
           </a:p>
@@ -25919,7 +26253,7 @@
         </p:nvSpPr>
         <p:spPr>
           <a:xfrm>
-            <a:off x="2938272" y="2258568"/>
+            <a:off x="2221992" y="2258568"/>
             <a:ext cx="1828800" cy="292608"/>
           </a:xfrm>
           <a:prstGeom prst="rect">
@@ -25953,7 +26287,7 @@
         </p:nvSpPr>
         <p:spPr>
           <a:xfrm>
-            <a:off x="2938272" y="2258568"/>
+            <a:off x="2221992" y="2258568"/>
             <a:ext cx="1828800" cy="292608"/>
           </a:xfrm>
           <a:prstGeom prst="rect">
@@ -25978,7 +26312,7 @@
                 <a:ea typeface="Trebuchet MS" pitchFamily="34" charset="-122"/>
                 <a:cs typeface="Trebuchet MS" pitchFamily="34" charset="-120"/>
               </a:rPr>
-              <a:t>re</a:t>
+              <a:t>un</a:t>
             </a:r>
             <a:endParaRPr lang="en-US" sz="1300" dirty="0"/>
           </a:p>
@@ -25992,7 +26326,7 @@
         </p:nvSpPr>
         <p:spPr>
           <a:xfrm>
-            <a:off x="2938272" y="2569464"/>
+            <a:off x="2221992" y="2569464"/>
             <a:ext cx="1828800" cy="201168"/>
           </a:xfrm>
           <a:prstGeom prst="rect">
@@ -26017,7 +26351,7 @@
                 <a:ea typeface="Calibri" pitchFamily="34" charset="-122"/>
                 <a:cs typeface="Calibri" pitchFamily="34" charset="-120"/>
               </a:rPr>
-              <a:t>again</a:t>
+              <a:t>not</a:t>
             </a:r>
             <a:endParaRPr lang="en-US" sz="850" dirty="0"/>
           </a:p>
@@ -26031,7 +26365,7 @@
         </p:nvSpPr>
         <p:spPr>
           <a:xfrm>
-            <a:off x="5803392" y="2258568"/>
+            <a:off x="4370832" y="2258568"/>
             <a:ext cx="1828800" cy="292608"/>
           </a:xfrm>
           <a:prstGeom prst="rect">
@@ -26065,7 +26399,7 @@
         </p:nvSpPr>
         <p:spPr>
           <a:xfrm>
-            <a:off x="5803392" y="2258568"/>
+            <a:off x="4370832" y="2258568"/>
             <a:ext cx="1828800" cy="292608"/>
           </a:xfrm>
           <a:prstGeom prst="rect">
@@ -26104,7 +26438,7 @@
         </p:nvSpPr>
         <p:spPr>
           <a:xfrm>
-            <a:off x="5803392" y="2569464"/>
+            <a:off x="4370832" y="2569464"/>
             <a:ext cx="1828800" cy="201168"/>
           </a:xfrm>
           <a:prstGeom prst="rect">
@@ -26129,7 +26463,7 @@
                 <a:ea typeface="Calibri" pitchFamily="34" charset="-122"/>
                 <a:cs typeface="Calibri" pitchFamily="34" charset="-120"/>
               </a:rPr>
-              <a:t>to lead out knowledge</a:t>
+              <a:t>to lead out, teach</a:t>
             </a:r>
             <a:endParaRPr lang="en-US" sz="850" dirty="0"/>
           </a:p>
@@ -26137,7 +26471,158 @@
       </p:sp>
       <p:sp>
         <p:nvSpPr>
-          <p:cNvPr id="22" name="Shape 20"/>
+          <p:cNvPr id="22" name="Text 20"/>
+          <p:cNvSpPr/>
+          <p:nvPr/>
+        </p:nvSpPr>
+        <p:spPr>
+          <a:xfrm>
+            <a:off x="4370832" y="2752344"/>
+            <a:ext cx="1828800" cy="182880"/>
+          </a:xfrm>
+          <a:prstGeom prst="rect">
+            <a:avLst/>
+          </a:prstGeom>
+          <a:noFill/>
+          <a:ln/>
+        </p:spPr>
+        <p:txBody>
+          <a:bodyPr wrap="square" lIns="0" tIns="0" rIns="0" bIns="0" rtlCol="0" anchor="t"/>
+          <a:lstStyle/>
+          <a:p>
+            <a:pPr algn="ctr" indent="0" marL="0">
+              <a:buNone/>
+            </a:pPr>
+            <a:r>
+              <a:rPr lang="en-US" sz="700" i="1" dirty="0">
+                <a:solidFill>
+                  <a:srgbClr val="94A3B8"/>
+                </a:solidFill>
+                <a:latin typeface="Calibri" pitchFamily="34" charset="0"/>
+                <a:ea typeface="Calibri" pitchFamily="34" charset="-122"/>
+                <a:cs typeface="Calibri" pitchFamily="34" charset="-120"/>
+              </a:rPr>
+              <a:t>'e' dropped before vowel suffix</a:t>
+            </a:r>
+            <a:endParaRPr lang="en-US" sz="700" dirty="0"/>
+          </a:p>
+        </p:txBody>
+      </p:sp>
+      <p:sp>
+        <p:nvSpPr>
+          <p:cNvPr id="23" name="Shape 21"/>
+          <p:cNvSpPr/>
+          <p:nvPr/>
+        </p:nvSpPr>
+        <p:spPr>
+          <a:xfrm>
+            <a:off x="6519672" y="2258568"/>
+            <a:ext cx="1828800" cy="292608"/>
+          </a:xfrm>
+          <a:prstGeom prst="rect">
+            <a:avLst>
+              <a:gd name="adj" fmla="val 25000"/>
+            </a:avLst>
+          </a:prstGeom>
+          <a:solidFill>
+            <a:srgbClr val="FCE7F3"/>
+          </a:solidFill>
+          <a:ln w="19050">
+            <a:solidFill>
+              <a:srgbClr val="DB2777"/>
+            </a:solidFill>
+            <a:prstDash val="solid"/>
+          </a:ln>
+          <a:effectLst>
+            <a:outerShdw sx="100000" sy="100000" kx="0" ky="0" algn="bl" rotWithShape="0" blurRad="101600" dist="38100" dir="8100000">
+              <a:srgbClr val="000000">
+                <a:alpha val="12000"/>
+              </a:srgbClr>
+            </a:outerShdw>
+          </a:effectLst>
+        </p:spPr>
+      </p:sp>
+      <p:sp>
+        <p:nvSpPr>
+          <p:cNvPr id="24" name="Text 22"/>
+          <p:cNvSpPr/>
+          <p:nvPr/>
+        </p:nvSpPr>
+        <p:spPr>
+          <a:xfrm>
+            <a:off x="6519672" y="2258568"/>
+            <a:ext cx="1828800" cy="292608"/>
+          </a:xfrm>
+          <a:prstGeom prst="rect">
+            <a:avLst/>
+          </a:prstGeom>
+          <a:noFill/>
+          <a:ln/>
+        </p:spPr>
+        <p:txBody>
+          <a:bodyPr wrap="square" lIns="0" tIns="0" rIns="0" bIns="0" rtlCol="0" anchor="ctr"/>
+          <a:lstStyle/>
+          <a:p>
+            <a:pPr algn="ctr" indent="0" marL="0">
+              <a:buNone/>
+            </a:pPr>
+            <a:r>
+              <a:rPr lang="en-US" sz="1300" b="1" dirty="0">
+                <a:solidFill>
+                  <a:srgbClr val="9D174D"/>
+                </a:solidFill>
+                <a:latin typeface="Trebuchet MS" pitchFamily="34" charset="0"/>
+                <a:ea typeface="Trebuchet MS" pitchFamily="34" charset="-122"/>
+                <a:cs typeface="Trebuchet MS" pitchFamily="34" charset="-120"/>
+              </a:rPr>
+              <a:t>ed</a:t>
+            </a:r>
+            <a:endParaRPr lang="en-US" sz="1300" dirty="0"/>
+          </a:p>
+        </p:txBody>
+      </p:sp>
+      <p:sp>
+        <p:nvSpPr>
+          <p:cNvPr id="25" name="Text 23"/>
+          <p:cNvSpPr/>
+          <p:nvPr/>
+        </p:nvSpPr>
+        <p:spPr>
+          <a:xfrm>
+            <a:off x="6519672" y="2569464"/>
+            <a:ext cx="1828800" cy="201168"/>
+          </a:xfrm>
+          <a:prstGeom prst="rect">
+            <a:avLst/>
+          </a:prstGeom>
+          <a:noFill/>
+          <a:ln/>
+        </p:spPr>
+        <p:txBody>
+          <a:bodyPr wrap="square" lIns="0" tIns="0" rIns="0" bIns="0" rtlCol="0" anchor="t"/>
+          <a:lstStyle/>
+          <a:p>
+            <a:pPr algn="ctr" indent="0" marL="0">
+              <a:buNone/>
+            </a:pPr>
+            <a:r>
+              <a:rPr lang="en-US" sz="850" dirty="0">
+                <a:solidFill>
+                  <a:srgbClr val="475569"/>
+                </a:solidFill>
+                <a:latin typeface="Calibri" pitchFamily="34" charset="0"/>
+                <a:ea typeface="Calibri" pitchFamily="34" charset="-122"/>
+                <a:cs typeface="Calibri" pitchFamily="34" charset="-120"/>
+              </a:rPr>
+              <a:t>in a state of; past tense</a:t>
+            </a:r>
+            <a:endParaRPr lang="en-US" sz="850" dirty="0"/>
+          </a:p>
+        </p:txBody>
+      </p:sp>
+      <p:sp>
+        <p:nvSpPr>
+          <p:cNvPr id="26" name="Shape 24"/>
           <p:cNvSpPr/>
           <p:nvPr/>
         </p:nvSpPr>
@@ -26164,7 +26649,7 @@
       </p:sp>
       <p:sp>
         <p:nvSpPr>
-          <p:cNvPr id="23" name="Text 21"/>
+          <p:cNvPr id="27" name="Text 25"/>
           <p:cNvSpPr/>
           <p:nvPr/>
         </p:nvSpPr>
@@ -26203,7 +26688,7 @@
       </p:sp>
       <p:sp>
         <p:nvSpPr>
-          <p:cNvPr id="24" name="Shape 22"/>
+          <p:cNvPr id="28" name="Shape 26"/>
           <p:cNvSpPr/>
           <p:nvPr/>
         </p:nvSpPr>
@@ -26230,7 +26715,7 @@
       </p:sp>
       <p:sp>
         <p:nvSpPr>
-          <p:cNvPr id="25" name="Text 23"/>
+          <p:cNvPr id="29" name="Text 27"/>
           <p:cNvSpPr/>
           <p:nvPr/>
         </p:nvSpPr>
@@ -26269,7 +26754,7 @@
       </p:sp>
       <p:sp>
         <p:nvSpPr>
-          <p:cNvPr id="26" name="Shape 24"/>
+          <p:cNvPr id="30" name="Shape 28"/>
           <p:cNvSpPr/>
           <p:nvPr/>
         </p:nvSpPr>
@@ -26296,7 +26781,7 @@
       </p:sp>
       <p:sp>
         <p:nvSpPr>
-          <p:cNvPr id="27" name="Text 25"/>
+          <p:cNvPr id="31" name="Text 29"/>
           <p:cNvSpPr/>
           <p:nvPr/>
         </p:nvSpPr>
@@ -26335,7 +26820,7 @@
       </p:sp>
       <p:sp>
         <p:nvSpPr>
-          <p:cNvPr id="28" name="Shape 26"/>
+          <p:cNvPr id="32" name="Shape 30"/>
           <p:cNvSpPr/>
           <p:nvPr/>
         </p:nvSpPr>
@@ -26362,7 +26847,7 @@
       </p:sp>
       <p:sp>
         <p:nvSpPr>
-          <p:cNvPr id="29" name="Text 27"/>
+          <p:cNvPr id="33" name="Text 31"/>
           <p:cNvSpPr/>
           <p:nvPr/>
         </p:nvSpPr>
@@ -26685,7 +27170,7 @@
                 <a:ea typeface="Calibri" pitchFamily="34" charset="-122"/>
                 <a:cs typeface="Calibri" pitchFamily="34" charset="-120"/>
               </a:rPr>
-              <a:t>Word Labs  •  wordlabs.app  •  Root: 'educate' = to lead out knowledge</a:t>
+              <a:t>Word Labs  •  wordlabs.app  •  Root: 'educate' = to lead out, teach</a:t>
             </a:r>
             <a:endParaRPr lang="en-US" sz="800" dirty="0"/>
           </a:p>
@@ -26758,7 +27243,7 @@
                 <a:ea typeface="Trebuchet MS" pitchFamily="34" charset="-122"/>
                 <a:cs typeface="Trebuchet MS" pitchFamily="34" charset="-120"/>
               </a:rPr>
-              <a:t>We are learning that the root 'educate' means 'to lead out knowledge'.</a:t>
+              <a:t>We are learning that the root 'educate' means 'to lead out, teach'.</a:t>
             </a:r>
             <a:endParaRPr lang="en-US" sz="2000" dirty="0"/>
           </a:p>
@@ -27404,7 +27889,7 @@
                 <a:ea typeface="Calibri" pitchFamily="34" charset="-122"/>
                 <a:cs typeface="Calibri" pitchFamily="34" charset="-120"/>
               </a:rPr>
-              <a:t>Word Labs  •  wordlabs.app  •  Root: 'educate' = to lead out knowledge</a:t>
+              <a:t>Word Labs  •  wordlabs.app  •  Root: 'educate' = to lead out, teach</a:t>
             </a:r>
             <a:endParaRPr lang="en-US" sz="800" dirty="0"/>
           </a:p>
@@ -27543,7 +28028,7 @@
                 <a:ea typeface="Trebuchet MS" pitchFamily="34" charset="-122"/>
                 <a:cs typeface="Trebuchet MS" pitchFamily="34" charset="-120"/>
               </a:rPr>
-              <a:t>reeducate</a:t>
+              <a:t>uneducated</a:t>
             </a:r>
             <a:endParaRPr lang="en-US" sz="2800" dirty="0"/>
           </a:p>
@@ -27623,7 +28108,7 @@
         </p:nvSpPr>
         <p:spPr>
           <a:xfrm>
-            <a:off x="2938272" y="2258568"/>
+            <a:off x="2221992" y="2258568"/>
             <a:ext cx="1828800" cy="292608"/>
           </a:xfrm>
           <a:prstGeom prst="rect">
@@ -27657,7 +28142,7 @@
         </p:nvSpPr>
         <p:spPr>
           <a:xfrm>
-            <a:off x="2938272" y="2258568"/>
+            <a:off x="2221992" y="2258568"/>
             <a:ext cx="1828800" cy="292608"/>
           </a:xfrm>
           <a:prstGeom prst="rect">
@@ -27682,7 +28167,7 @@
                 <a:ea typeface="Trebuchet MS" pitchFamily="34" charset="-122"/>
                 <a:cs typeface="Trebuchet MS" pitchFamily="34" charset="-120"/>
               </a:rPr>
-              <a:t>re</a:t>
+              <a:t>un</a:t>
             </a:r>
             <a:endParaRPr lang="en-US" sz="1300" dirty="0"/>
           </a:p>
@@ -27696,7 +28181,7 @@
         </p:nvSpPr>
         <p:spPr>
           <a:xfrm>
-            <a:off x="2938272" y="2569464"/>
+            <a:off x="2221992" y="2569464"/>
             <a:ext cx="1828800" cy="201168"/>
           </a:xfrm>
           <a:prstGeom prst="rect">
@@ -27721,7 +28206,7 @@
                 <a:ea typeface="Calibri" pitchFamily="34" charset="-122"/>
                 <a:cs typeface="Calibri" pitchFamily="34" charset="-120"/>
               </a:rPr>
-              <a:t>again</a:t>
+              <a:t>not</a:t>
             </a:r>
             <a:endParaRPr lang="en-US" sz="850" dirty="0"/>
           </a:p>
@@ -27735,7 +28220,7 @@
         </p:nvSpPr>
         <p:spPr>
           <a:xfrm>
-            <a:off x="5803392" y="2258568"/>
+            <a:off x="4370832" y="2258568"/>
             <a:ext cx="1828800" cy="292608"/>
           </a:xfrm>
           <a:prstGeom prst="rect">
@@ -27769,7 +28254,7 @@
         </p:nvSpPr>
         <p:spPr>
           <a:xfrm>
-            <a:off x="5803392" y="2258568"/>
+            <a:off x="4370832" y="2258568"/>
             <a:ext cx="1828800" cy="292608"/>
           </a:xfrm>
           <a:prstGeom prst="rect">
@@ -27808,7 +28293,7 @@
         </p:nvSpPr>
         <p:spPr>
           <a:xfrm>
-            <a:off x="5803392" y="2569464"/>
+            <a:off x="4370832" y="2569464"/>
             <a:ext cx="1828800" cy="201168"/>
           </a:xfrm>
           <a:prstGeom prst="rect">
@@ -27833,7 +28318,7 @@
                 <a:ea typeface="Calibri" pitchFamily="34" charset="-122"/>
                 <a:cs typeface="Calibri" pitchFamily="34" charset="-120"/>
               </a:rPr>
-              <a:t>to lead out knowledge</a:t>
+              <a:t>to lead out, teach</a:t>
             </a:r>
             <a:endParaRPr lang="en-US" sz="850" dirty="0"/>
           </a:p>
@@ -27841,7 +28326,158 @@
       </p:sp>
       <p:sp>
         <p:nvSpPr>
-          <p:cNvPr id="22" name="Shape 20"/>
+          <p:cNvPr id="22" name="Text 20"/>
+          <p:cNvSpPr/>
+          <p:nvPr/>
+        </p:nvSpPr>
+        <p:spPr>
+          <a:xfrm>
+            <a:off x="4370832" y="2752344"/>
+            <a:ext cx="1828800" cy="182880"/>
+          </a:xfrm>
+          <a:prstGeom prst="rect">
+            <a:avLst/>
+          </a:prstGeom>
+          <a:noFill/>
+          <a:ln/>
+        </p:spPr>
+        <p:txBody>
+          <a:bodyPr wrap="square" lIns="0" tIns="0" rIns="0" bIns="0" rtlCol="0" anchor="t"/>
+          <a:lstStyle/>
+          <a:p>
+            <a:pPr algn="ctr" indent="0" marL="0">
+              <a:buNone/>
+            </a:pPr>
+            <a:r>
+              <a:rPr lang="en-US" sz="700" i="1" dirty="0">
+                <a:solidFill>
+                  <a:srgbClr val="94A3B8"/>
+                </a:solidFill>
+                <a:latin typeface="Calibri" pitchFamily="34" charset="0"/>
+                <a:ea typeface="Calibri" pitchFamily="34" charset="-122"/>
+                <a:cs typeface="Calibri" pitchFamily="34" charset="-120"/>
+              </a:rPr>
+              <a:t>'e' dropped before vowel suffix</a:t>
+            </a:r>
+            <a:endParaRPr lang="en-US" sz="700" dirty="0"/>
+          </a:p>
+        </p:txBody>
+      </p:sp>
+      <p:sp>
+        <p:nvSpPr>
+          <p:cNvPr id="23" name="Shape 21"/>
+          <p:cNvSpPr/>
+          <p:nvPr/>
+        </p:nvSpPr>
+        <p:spPr>
+          <a:xfrm>
+            <a:off x="6519672" y="2258568"/>
+            <a:ext cx="1828800" cy="292608"/>
+          </a:xfrm>
+          <a:prstGeom prst="rect">
+            <a:avLst>
+              <a:gd name="adj" fmla="val 25000"/>
+            </a:avLst>
+          </a:prstGeom>
+          <a:solidFill>
+            <a:srgbClr val="FCE7F3"/>
+          </a:solidFill>
+          <a:ln w="19050">
+            <a:solidFill>
+              <a:srgbClr val="DB2777"/>
+            </a:solidFill>
+            <a:prstDash val="solid"/>
+          </a:ln>
+          <a:effectLst>
+            <a:outerShdw sx="100000" sy="100000" kx="0" ky="0" algn="bl" rotWithShape="0" blurRad="101600" dist="38100" dir="8100000">
+              <a:srgbClr val="000000">
+                <a:alpha val="12000"/>
+              </a:srgbClr>
+            </a:outerShdw>
+          </a:effectLst>
+        </p:spPr>
+      </p:sp>
+      <p:sp>
+        <p:nvSpPr>
+          <p:cNvPr id="24" name="Text 22"/>
+          <p:cNvSpPr/>
+          <p:nvPr/>
+        </p:nvSpPr>
+        <p:spPr>
+          <a:xfrm>
+            <a:off x="6519672" y="2258568"/>
+            <a:ext cx="1828800" cy="292608"/>
+          </a:xfrm>
+          <a:prstGeom prst="rect">
+            <a:avLst/>
+          </a:prstGeom>
+          <a:noFill/>
+          <a:ln/>
+        </p:spPr>
+        <p:txBody>
+          <a:bodyPr wrap="square" lIns="0" tIns="0" rIns="0" bIns="0" rtlCol="0" anchor="ctr"/>
+          <a:lstStyle/>
+          <a:p>
+            <a:pPr algn="ctr" indent="0" marL="0">
+              <a:buNone/>
+            </a:pPr>
+            <a:r>
+              <a:rPr lang="en-US" sz="1300" b="1" dirty="0">
+                <a:solidFill>
+                  <a:srgbClr val="9D174D"/>
+                </a:solidFill>
+                <a:latin typeface="Trebuchet MS" pitchFamily="34" charset="0"/>
+                <a:ea typeface="Trebuchet MS" pitchFamily="34" charset="-122"/>
+                <a:cs typeface="Trebuchet MS" pitchFamily="34" charset="-120"/>
+              </a:rPr>
+              <a:t>ed</a:t>
+            </a:r>
+            <a:endParaRPr lang="en-US" sz="1300" dirty="0"/>
+          </a:p>
+        </p:txBody>
+      </p:sp>
+      <p:sp>
+        <p:nvSpPr>
+          <p:cNvPr id="25" name="Text 23"/>
+          <p:cNvSpPr/>
+          <p:nvPr/>
+        </p:nvSpPr>
+        <p:spPr>
+          <a:xfrm>
+            <a:off x="6519672" y="2569464"/>
+            <a:ext cx="1828800" cy="201168"/>
+          </a:xfrm>
+          <a:prstGeom prst="rect">
+            <a:avLst/>
+          </a:prstGeom>
+          <a:noFill/>
+          <a:ln/>
+        </p:spPr>
+        <p:txBody>
+          <a:bodyPr wrap="square" lIns="0" tIns="0" rIns="0" bIns="0" rtlCol="0" anchor="t"/>
+          <a:lstStyle/>
+          <a:p>
+            <a:pPr algn="ctr" indent="0" marL="0">
+              <a:buNone/>
+            </a:pPr>
+            <a:r>
+              <a:rPr lang="en-US" sz="850" dirty="0">
+                <a:solidFill>
+                  <a:srgbClr val="475569"/>
+                </a:solidFill>
+                <a:latin typeface="Calibri" pitchFamily="34" charset="0"/>
+                <a:ea typeface="Calibri" pitchFamily="34" charset="-122"/>
+                <a:cs typeface="Calibri" pitchFamily="34" charset="-120"/>
+              </a:rPr>
+              <a:t>in a state of; past tense</a:t>
+            </a:r>
+            <a:endParaRPr lang="en-US" sz="850" dirty="0"/>
+          </a:p>
+        </p:txBody>
+      </p:sp>
+      <p:sp>
+        <p:nvSpPr>
+          <p:cNvPr id="26" name="Shape 24"/>
           <p:cNvSpPr/>
           <p:nvPr/>
         </p:nvSpPr>
@@ -27868,7 +28504,7 @@
       </p:sp>
       <p:sp>
         <p:nvSpPr>
-          <p:cNvPr id="23" name="Text 21"/>
+          <p:cNvPr id="27" name="Text 25"/>
           <p:cNvSpPr/>
           <p:nvPr/>
         </p:nvSpPr>
@@ -27907,7 +28543,7 @@
       </p:sp>
       <p:sp>
         <p:nvSpPr>
-          <p:cNvPr id="24" name="Shape 22"/>
+          <p:cNvPr id="28" name="Shape 26"/>
           <p:cNvSpPr/>
           <p:nvPr/>
         </p:nvSpPr>
@@ -27934,14 +28570,14 @@
       </p:sp>
       <p:sp>
         <p:nvSpPr>
-          <p:cNvPr id="25" name="Shape 23"/>
-          <p:cNvSpPr/>
-          <p:nvPr/>
-        </p:nvSpPr>
-        <p:spPr>
-          <a:xfrm>
-            <a:off x="1975104" y="3364992"/>
-            <a:ext cx="1554480" cy="475488"/>
+          <p:cNvPr id="29" name="Shape 27"/>
+          <p:cNvSpPr/>
+          <p:nvPr/>
+        </p:nvSpPr>
+        <p:spPr>
+          <a:xfrm>
+            <a:off x="1978152" y="3364992"/>
+            <a:ext cx="1225296" cy="475488"/>
           </a:xfrm>
           <a:prstGeom prst="rect">
             <a:avLst>
@@ -27961,14 +28597,14 @@
       </p:sp>
       <p:sp>
         <p:nvSpPr>
-          <p:cNvPr id="26" name="Text 24"/>
-          <p:cNvSpPr/>
-          <p:nvPr/>
-        </p:nvSpPr>
-        <p:spPr>
-          <a:xfrm>
-            <a:off x="1975104" y="3364992"/>
-            <a:ext cx="1554480" cy="475488"/>
+          <p:cNvPr id="30" name="Text 28"/>
+          <p:cNvSpPr/>
+          <p:nvPr/>
+        </p:nvSpPr>
+        <p:spPr>
+          <a:xfrm>
+            <a:off x="1978152" y="3364992"/>
+            <a:ext cx="1225296" cy="475488"/>
           </a:xfrm>
           <a:prstGeom prst="rect">
             <a:avLst/>
@@ -27992,7 +28628,7 @@
                 <a:ea typeface="Trebuchet MS" pitchFamily="34" charset="-122"/>
                 <a:cs typeface="Trebuchet MS" pitchFamily="34" charset="-120"/>
               </a:rPr>
-              <a:t>re</a:t>
+              <a:t>un</a:t>
             </a:r>
             <a:endParaRPr lang="en-US" sz="1400" dirty="0"/>
           </a:p>
@@ -28000,14 +28636,14 @@
       </p:sp>
       <p:sp>
         <p:nvSpPr>
-          <p:cNvPr id="27" name="Text 25"/>
-          <p:cNvSpPr/>
-          <p:nvPr/>
-        </p:nvSpPr>
-        <p:spPr>
-          <a:xfrm>
-            <a:off x="3529584" y="3364992"/>
-            <a:ext cx="73152" cy="475488"/>
+          <p:cNvPr id="31" name="Text 29"/>
+          <p:cNvSpPr/>
+          <p:nvPr/>
+        </p:nvSpPr>
+        <p:spPr>
+          <a:xfrm>
+            <a:off x="3203448" y="3364992"/>
+            <a:ext cx="76200" cy="475488"/>
           </a:xfrm>
           <a:prstGeom prst="rect">
             <a:avLst/>
@@ -28039,14 +28675,14 @@
       </p:sp>
       <p:sp>
         <p:nvSpPr>
-          <p:cNvPr id="28" name="Shape 26"/>
-          <p:cNvSpPr/>
-          <p:nvPr/>
-        </p:nvSpPr>
-        <p:spPr>
-          <a:xfrm>
-            <a:off x="3602736" y="3364992"/>
-            <a:ext cx="1554480" cy="475488"/>
+          <p:cNvPr id="32" name="Shape 30"/>
+          <p:cNvSpPr/>
+          <p:nvPr/>
+        </p:nvSpPr>
+        <p:spPr>
+          <a:xfrm>
+            <a:off x="3279648" y="3364992"/>
+            <a:ext cx="1225296" cy="475488"/>
           </a:xfrm>
           <a:prstGeom prst="rect">
             <a:avLst>
@@ -28066,14 +28702,14 @@
       </p:sp>
       <p:sp>
         <p:nvSpPr>
-          <p:cNvPr id="29" name="Text 27"/>
-          <p:cNvSpPr/>
-          <p:nvPr/>
-        </p:nvSpPr>
-        <p:spPr>
-          <a:xfrm>
-            <a:off x="3602736" y="3364992"/>
-            <a:ext cx="1554480" cy="475488"/>
+          <p:cNvPr id="33" name="Text 31"/>
+          <p:cNvSpPr/>
+          <p:nvPr/>
+        </p:nvSpPr>
+        <p:spPr>
+          <a:xfrm>
+            <a:off x="3279648" y="3364992"/>
+            <a:ext cx="1225296" cy="475488"/>
           </a:xfrm>
           <a:prstGeom prst="rect">
             <a:avLst/>
@@ -28105,14 +28741,14 @@
       </p:sp>
       <p:sp>
         <p:nvSpPr>
-          <p:cNvPr id="30" name="Text 28"/>
-          <p:cNvSpPr/>
-          <p:nvPr/>
-        </p:nvSpPr>
-        <p:spPr>
-          <a:xfrm>
-            <a:off x="5157216" y="3364992"/>
-            <a:ext cx="73152" cy="475488"/>
+          <p:cNvPr id="34" name="Text 32"/>
+          <p:cNvSpPr/>
+          <p:nvPr/>
+        </p:nvSpPr>
+        <p:spPr>
+          <a:xfrm>
+            <a:off x="4504944" y="3364992"/>
+            <a:ext cx="76200" cy="475488"/>
           </a:xfrm>
           <a:prstGeom prst="rect">
             <a:avLst/>
@@ -28144,14 +28780,14 @@
       </p:sp>
       <p:sp>
         <p:nvSpPr>
-          <p:cNvPr id="31" name="Shape 29"/>
-          <p:cNvSpPr/>
-          <p:nvPr/>
-        </p:nvSpPr>
-        <p:spPr>
-          <a:xfrm>
-            <a:off x="5230368" y="3364992"/>
-            <a:ext cx="1554480" cy="475488"/>
+          <p:cNvPr id="35" name="Shape 33"/>
+          <p:cNvSpPr/>
+          <p:nvPr/>
+        </p:nvSpPr>
+        <p:spPr>
+          <a:xfrm>
+            <a:off x="4581144" y="3364992"/>
+            <a:ext cx="1225296" cy="475488"/>
           </a:xfrm>
           <a:prstGeom prst="rect">
             <a:avLst>
@@ -28171,14 +28807,14 @@
       </p:sp>
       <p:sp>
         <p:nvSpPr>
-          <p:cNvPr id="32" name="Text 30"/>
-          <p:cNvSpPr/>
-          <p:nvPr/>
-        </p:nvSpPr>
-        <p:spPr>
-          <a:xfrm>
-            <a:off x="5230368" y="3364992"/>
-            <a:ext cx="1554480" cy="475488"/>
+          <p:cNvPr id="36" name="Text 34"/>
+          <p:cNvSpPr/>
+          <p:nvPr/>
+        </p:nvSpPr>
+        <p:spPr>
+          <a:xfrm>
+            <a:off x="4581144" y="3364992"/>
+            <a:ext cx="1225296" cy="475488"/>
           </a:xfrm>
           <a:prstGeom prst="rect">
             <a:avLst/>
@@ -28210,14 +28846,14 @@
       </p:sp>
       <p:sp>
         <p:nvSpPr>
-          <p:cNvPr id="33" name="Text 31"/>
-          <p:cNvSpPr/>
-          <p:nvPr/>
-        </p:nvSpPr>
-        <p:spPr>
-          <a:xfrm>
-            <a:off x="6784848" y="3364992"/>
-            <a:ext cx="73152" cy="475488"/>
+          <p:cNvPr id="37" name="Text 35"/>
+          <p:cNvSpPr/>
+          <p:nvPr/>
+        </p:nvSpPr>
+        <p:spPr>
+          <a:xfrm>
+            <a:off x="5806440" y="3364992"/>
+            <a:ext cx="76200" cy="475488"/>
           </a:xfrm>
           <a:prstGeom prst="rect">
             <a:avLst/>
@@ -28249,14 +28885,14 @@
       </p:sp>
       <p:sp>
         <p:nvSpPr>
-          <p:cNvPr id="34" name="Shape 32"/>
-          <p:cNvSpPr/>
-          <p:nvPr/>
-        </p:nvSpPr>
-        <p:spPr>
-          <a:xfrm>
-            <a:off x="6858000" y="3364992"/>
-            <a:ext cx="1554480" cy="475488"/>
+          <p:cNvPr id="38" name="Shape 36"/>
+          <p:cNvSpPr/>
+          <p:nvPr/>
+        </p:nvSpPr>
+        <p:spPr>
+          <a:xfrm>
+            <a:off x="5882640" y="3364992"/>
+            <a:ext cx="1225296" cy="475488"/>
           </a:xfrm>
           <a:prstGeom prst="rect">
             <a:avLst>
@@ -28276,14 +28912,14 @@
       </p:sp>
       <p:sp>
         <p:nvSpPr>
-          <p:cNvPr id="35" name="Text 33"/>
-          <p:cNvSpPr/>
-          <p:nvPr/>
-        </p:nvSpPr>
-        <p:spPr>
-          <a:xfrm>
-            <a:off x="6858000" y="3364992"/>
-            <a:ext cx="1554480" cy="475488"/>
+          <p:cNvPr id="39" name="Text 37"/>
+          <p:cNvSpPr/>
+          <p:nvPr/>
+        </p:nvSpPr>
+        <p:spPr>
+          <a:xfrm>
+            <a:off x="5882640" y="3364992"/>
+            <a:ext cx="1225296" cy="475488"/>
           </a:xfrm>
           <a:prstGeom prst="rect">
             <a:avLst/>
@@ -28307,7 +28943,7 @@
                 <a:ea typeface="Trebuchet MS" pitchFamily="34" charset="-122"/>
                 <a:cs typeface="Trebuchet MS" pitchFamily="34" charset="-120"/>
               </a:rPr>
-              <a:t>cate</a:t>
+              <a:t>ca</a:t>
             </a:r>
             <a:endParaRPr lang="en-US" sz="1400" dirty="0"/>
           </a:p>
@@ -28315,7 +28951,112 @@
       </p:sp>
       <p:sp>
         <p:nvSpPr>
-          <p:cNvPr id="36" name="Shape 34"/>
+          <p:cNvPr id="40" name="Text 38"/>
+          <p:cNvSpPr/>
+          <p:nvPr/>
+        </p:nvSpPr>
+        <p:spPr>
+          <a:xfrm>
+            <a:off x="7107936" y="3364992"/>
+            <a:ext cx="76200" cy="475488"/>
+          </a:xfrm>
+          <a:prstGeom prst="rect">
+            <a:avLst/>
+          </a:prstGeom>
+          <a:noFill/>
+          <a:ln/>
+        </p:spPr>
+        <p:txBody>
+          <a:bodyPr wrap="square" lIns="0" tIns="0" rIns="0" bIns="0" rtlCol="0" anchor="ctr"/>
+          <a:lstStyle/>
+          <a:p>
+            <a:pPr algn="ctr" indent="0" marL="0">
+              <a:buNone/>
+            </a:pPr>
+            <a:r>
+              <a:rPr lang="en-US" sz="1600" b="1" dirty="0">
+                <a:solidFill>
+                  <a:srgbClr val="0D9488"/>
+                </a:solidFill>
+                <a:latin typeface="Trebuchet MS" pitchFamily="34" charset="0"/>
+                <a:ea typeface="Trebuchet MS" pitchFamily="34" charset="-122"/>
+                <a:cs typeface="Trebuchet MS" pitchFamily="34" charset="-120"/>
+              </a:rPr>
+              <a:t>·</a:t>
+            </a:r>
+            <a:endParaRPr lang="en-US" sz="1600" dirty="0"/>
+          </a:p>
+        </p:txBody>
+      </p:sp>
+      <p:sp>
+        <p:nvSpPr>
+          <p:cNvPr id="41" name="Shape 39"/>
+          <p:cNvSpPr/>
+          <p:nvPr/>
+        </p:nvSpPr>
+        <p:spPr>
+          <a:xfrm>
+            <a:off x="7184136" y="3364992"/>
+            <a:ext cx="1225296" cy="475488"/>
+          </a:xfrm>
+          <a:prstGeom prst="rect">
+            <a:avLst>
+              <a:gd name="adj" fmla="val 9615"/>
+            </a:avLst>
+          </a:prstGeom>
+          <a:solidFill>
+            <a:srgbClr val="FFFFFF"/>
+          </a:solidFill>
+          <a:ln w="12700">
+            <a:solidFill>
+              <a:srgbClr val="0D9488"/>
+            </a:solidFill>
+            <a:prstDash val="solid"/>
+          </a:ln>
+        </p:spPr>
+      </p:sp>
+      <p:sp>
+        <p:nvSpPr>
+          <p:cNvPr id="42" name="Text 40"/>
+          <p:cNvSpPr/>
+          <p:nvPr/>
+        </p:nvSpPr>
+        <p:spPr>
+          <a:xfrm>
+            <a:off x="7184136" y="3364992"/>
+            <a:ext cx="1225296" cy="475488"/>
+          </a:xfrm>
+          <a:prstGeom prst="rect">
+            <a:avLst/>
+          </a:prstGeom>
+          <a:noFill/>
+          <a:ln/>
+        </p:spPr>
+        <p:txBody>
+          <a:bodyPr wrap="square" lIns="0" tIns="0" rIns="0" bIns="0" rtlCol="0" anchor="ctr"/>
+          <a:lstStyle/>
+          <a:p>
+            <a:pPr algn="ctr" indent="0" marL="0">
+              <a:buNone/>
+            </a:pPr>
+            <a:r>
+              <a:rPr lang="en-US" sz="1400" b="1" dirty="0">
+                <a:solidFill>
+                  <a:srgbClr val="0D9488"/>
+                </a:solidFill>
+                <a:latin typeface="Trebuchet MS" pitchFamily="34" charset="0"/>
+                <a:ea typeface="Trebuchet MS" pitchFamily="34" charset="-122"/>
+                <a:cs typeface="Trebuchet MS" pitchFamily="34" charset="-120"/>
+              </a:rPr>
+              <a:t>ted</a:t>
+            </a:r>
+            <a:endParaRPr lang="en-US" sz="1400" dirty="0"/>
+          </a:p>
+        </p:txBody>
+      </p:sp>
+      <p:sp>
+        <p:nvSpPr>
+          <p:cNvPr id="43" name="Shape 41"/>
           <p:cNvSpPr/>
           <p:nvPr/>
         </p:nvSpPr>
@@ -28342,7 +29083,7 @@
       </p:sp>
       <p:sp>
         <p:nvSpPr>
-          <p:cNvPr id="37" name="Text 35"/>
+          <p:cNvPr id="44" name="Text 42"/>
           <p:cNvSpPr/>
           <p:nvPr/>
         </p:nvSpPr>
@@ -28381,7 +29122,7 @@
       </p:sp>
       <p:sp>
         <p:nvSpPr>
-          <p:cNvPr id="38" name="Shape 36"/>
+          <p:cNvPr id="45" name="Shape 43"/>
           <p:cNvSpPr/>
           <p:nvPr/>
         </p:nvSpPr>
@@ -28408,7 +29149,7 @@
       </p:sp>
       <p:sp>
         <p:nvSpPr>
-          <p:cNvPr id="39" name="Text 37"/>
+          <p:cNvPr id="46" name="Text 44"/>
           <p:cNvSpPr/>
           <p:nvPr/>
         </p:nvSpPr>
@@ -28731,7 +29472,7 @@
                 <a:ea typeface="Calibri" pitchFamily="34" charset="-122"/>
                 <a:cs typeface="Calibri" pitchFamily="34" charset="-120"/>
               </a:rPr>
-              <a:t>Word Labs  •  wordlabs.app  •  Root: 'educate' = to lead out knowledge</a:t>
+              <a:t>Word Labs  •  wordlabs.app  •  Root: 'educate' = to lead out, teach</a:t>
             </a:r>
             <a:endParaRPr lang="en-US" sz="800" dirty="0"/>
           </a:p>
@@ -28870,7 +29611,7 @@
                 <a:ea typeface="Trebuchet MS" pitchFamily="34" charset="-122"/>
                 <a:cs typeface="Trebuchet MS" pitchFamily="34" charset="-120"/>
               </a:rPr>
-              <a:t>reeducate</a:t>
+              <a:t>uneducated</a:t>
             </a:r>
             <a:endParaRPr lang="en-US" sz="2800" dirty="0"/>
           </a:p>
@@ -28950,7 +29691,7 @@
         </p:nvSpPr>
         <p:spPr>
           <a:xfrm>
-            <a:off x="2938272" y="2258568"/>
+            <a:off x="2221992" y="2258568"/>
             <a:ext cx="1828800" cy="292608"/>
           </a:xfrm>
           <a:prstGeom prst="rect">
@@ -28984,7 +29725,7 @@
         </p:nvSpPr>
         <p:spPr>
           <a:xfrm>
-            <a:off x="2938272" y="2258568"/>
+            <a:off x="2221992" y="2258568"/>
             <a:ext cx="1828800" cy="292608"/>
           </a:xfrm>
           <a:prstGeom prst="rect">
@@ -29009,7 +29750,7 @@
                 <a:ea typeface="Trebuchet MS" pitchFamily="34" charset="-122"/>
                 <a:cs typeface="Trebuchet MS" pitchFamily="34" charset="-120"/>
               </a:rPr>
-              <a:t>re</a:t>
+              <a:t>un</a:t>
             </a:r>
             <a:endParaRPr lang="en-US" sz="1300" dirty="0"/>
           </a:p>
@@ -29023,7 +29764,7 @@
         </p:nvSpPr>
         <p:spPr>
           <a:xfrm>
-            <a:off x="2938272" y="2569464"/>
+            <a:off x="2221992" y="2569464"/>
             <a:ext cx="1828800" cy="201168"/>
           </a:xfrm>
           <a:prstGeom prst="rect">
@@ -29048,7 +29789,7 @@
                 <a:ea typeface="Calibri" pitchFamily="34" charset="-122"/>
                 <a:cs typeface="Calibri" pitchFamily="34" charset="-120"/>
               </a:rPr>
-              <a:t>again</a:t>
+              <a:t>not</a:t>
             </a:r>
             <a:endParaRPr lang="en-US" sz="850" dirty="0"/>
           </a:p>
@@ -29062,7 +29803,7 @@
         </p:nvSpPr>
         <p:spPr>
           <a:xfrm>
-            <a:off x="5803392" y="2258568"/>
+            <a:off x="4370832" y="2258568"/>
             <a:ext cx="1828800" cy="292608"/>
           </a:xfrm>
           <a:prstGeom prst="rect">
@@ -29096,7 +29837,7 @@
         </p:nvSpPr>
         <p:spPr>
           <a:xfrm>
-            <a:off x="5803392" y="2258568"/>
+            <a:off x="4370832" y="2258568"/>
             <a:ext cx="1828800" cy="292608"/>
           </a:xfrm>
           <a:prstGeom prst="rect">
@@ -29135,7 +29876,7 @@
         </p:nvSpPr>
         <p:spPr>
           <a:xfrm>
-            <a:off x="5803392" y="2569464"/>
+            <a:off x="4370832" y="2569464"/>
             <a:ext cx="1828800" cy="201168"/>
           </a:xfrm>
           <a:prstGeom prst="rect">
@@ -29160,7 +29901,7 @@
                 <a:ea typeface="Calibri" pitchFamily="34" charset="-122"/>
                 <a:cs typeface="Calibri" pitchFamily="34" charset="-120"/>
               </a:rPr>
-              <a:t>to lead out knowledge</a:t>
+              <a:t>to lead out, teach</a:t>
             </a:r>
             <a:endParaRPr lang="en-US" sz="850" dirty="0"/>
           </a:p>
@@ -29168,7 +29909,158 @@
       </p:sp>
       <p:sp>
         <p:nvSpPr>
-          <p:cNvPr id="22" name="Shape 20"/>
+          <p:cNvPr id="22" name="Text 20"/>
+          <p:cNvSpPr/>
+          <p:nvPr/>
+        </p:nvSpPr>
+        <p:spPr>
+          <a:xfrm>
+            <a:off x="4370832" y="2752344"/>
+            <a:ext cx="1828800" cy="182880"/>
+          </a:xfrm>
+          <a:prstGeom prst="rect">
+            <a:avLst/>
+          </a:prstGeom>
+          <a:noFill/>
+          <a:ln/>
+        </p:spPr>
+        <p:txBody>
+          <a:bodyPr wrap="square" lIns="0" tIns="0" rIns="0" bIns="0" rtlCol="0" anchor="t"/>
+          <a:lstStyle/>
+          <a:p>
+            <a:pPr algn="ctr" indent="0" marL="0">
+              <a:buNone/>
+            </a:pPr>
+            <a:r>
+              <a:rPr lang="en-US" sz="700" i="1" dirty="0">
+                <a:solidFill>
+                  <a:srgbClr val="94A3B8"/>
+                </a:solidFill>
+                <a:latin typeface="Calibri" pitchFamily="34" charset="0"/>
+                <a:ea typeface="Calibri" pitchFamily="34" charset="-122"/>
+                <a:cs typeface="Calibri" pitchFamily="34" charset="-120"/>
+              </a:rPr>
+              <a:t>'e' dropped before vowel suffix</a:t>
+            </a:r>
+            <a:endParaRPr lang="en-US" sz="700" dirty="0"/>
+          </a:p>
+        </p:txBody>
+      </p:sp>
+      <p:sp>
+        <p:nvSpPr>
+          <p:cNvPr id="23" name="Shape 21"/>
+          <p:cNvSpPr/>
+          <p:nvPr/>
+        </p:nvSpPr>
+        <p:spPr>
+          <a:xfrm>
+            <a:off x="6519672" y="2258568"/>
+            <a:ext cx="1828800" cy="292608"/>
+          </a:xfrm>
+          <a:prstGeom prst="rect">
+            <a:avLst>
+              <a:gd name="adj" fmla="val 25000"/>
+            </a:avLst>
+          </a:prstGeom>
+          <a:solidFill>
+            <a:srgbClr val="FCE7F3"/>
+          </a:solidFill>
+          <a:ln w="19050">
+            <a:solidFill>
+              <a:srgbClr val="DB2777"/>
+            </a:solidFill>
+            <a:prstDash val="solid"/>
+          </a:ln>
+          <a:effectLst>
+            <a:outerShdw sx="100000" sy="100000" kx="0" ky="0" algn="bl" rotWithShape="0" blurRad="101600" dist="38100" dir="8100000">
+              <a:srgbClr val="000000">
+                <a:alpha val="12000"/>
+              </a:srgbClr>
+            </a:outerShdw>
+          </a:effectLst>
+        </p:spPr>
+      </p:sp>
+      <p:sp>
+        <p:nvSpPr>
+          <p:cNvPr id="24" name="Text 22"/>
+          <p:cNvSpPr/>
+          <p:nvPr/>
+        </p:nvSpPr>
+        <p:spPr>
+          <a:xfrm>
+            <a:off x="6519672" y="2258568"/>
+            <a:ext cx="1828800" cy="292608"/>
+          </a:xfrm>
+          <a:prstGeom prst="rect">
+            <a:avLst/>
+          </a:prstGeom>
+          <a:noFill/>
+          <a:ln/>
+        </p:spPr>
+        <p:txBody>
+          <a:bodyPr wrap="square" lIns="0" tIns="0" rIns="0" bIns="0" rtlCol="0" anchor="ctr"/>
+          <a:lstStyle/>
+          <a:p>
+            <a:pPr algn="ctr" indent="0" marL="0">
+              <a:buNone/>
+            </a:pPr>
+            <a:r>
+              <a:rPr lang="en-US" sz="1300" b="1" dirty="0">
+                <a:solidFill>
+                  <a:srgbClr val="9D174D"/>
+                </a:solidFill>
+                <a:latin typeface="Trebuchet MS" pitchFamily="34" charset="0"/>
+                <a:ea typeface="Trebuchet MS" pitchFamily="34" charset="-122"/>
+                <a:cs typeface="Trebuchet MS" pitchFamily="34" charset="-120"/>
+              </a:rPr>
+              <a:t>ed</a:t>
+            </a:r>
+            <a:endParaRPr lang="en-US" sz="1300" dirty="0"/>
+          </a:p>
+        </p:txBody>
+      </p:sp>
+      <p:sp>
+        <p:nvSpPr>
+          <p:cNvPr id="25" name="Text 23"/>
+          <p:cNvSpPr/>
+          <p:nvPr/>
+        </p:nvSpPr>
+        <p:spPr>
+          <a:xfrm>
+            <a:off x="6519672" y="2569464"/>
+            <a:ext cx="1828800" cy="201168"/>
+          </a:xfrm>
+          <a:prstGeom prst="rect">
+            <a:avLst/>
+          </a:prstGeom>
+          <a:noFill/>
+          <a:ln/>
+        </p:spPr>
+        <p:txBody>
+          <a:bodyPr wrap="square" lIns="0" tIns="0" rIns="0" bIns="0" rtlCol="0" anchor="t"/>
+          <a:lstStyle/>
+          <a:p>
+            <a:pPr algn="ctr" indent="0" marL="0">
+              <a:buNone/>
+            </a:pPr>
+            <a:r>
+              <a:rPr lang="en-US" sz="850" dirty="0">
+                <a:solidFill>
+                  <a:srgbClr val="475569"/>
+                </a:solidFill>
+                <a:latin typeface="Calibri" pitchFamily="34" charset="0"/>
+                <a:ea typeface="Calibri" pitchFamily="34" charset="-122"/>
+                <a:cs typeface="Calibri" pitchFamily="34" charset="-120"/>
+              </a:rPr>
+              <a:t>in a state of; past tense</a:t>
+            </a:r>
+            <a:endParaRPr lang="en-US" sz="850" dirty="0"/>
+          </a:p>
+        </p:txBody>
+      </p:sp>
+      <p:sp>
+        <p:nvSpPr>
+          <p:cNvPr id="26" name="Shape 24"/>
           <p:cNvSpPr/>
           <p:nvPr/>
         </p:nvSpPr>
@@ -29195,7 +30087,7 @@
       </p:sp>
       <p:sp>
         <p:nvSpPr>
-          <p:cNvPr id="23" name="Text 21"/>
+          <p:cNvPr id="27" name="Text 25"/>
           <p:cNvSpPr/>
           <p:nvPr/>
         </p:nvSpPr>
@@ -29234,7 +30126,7 @@
       </p:sp>
       <p:sp>
         <p:nvSpPr>
-          <p:cNvPr id="24" name="Shape 22"/>
+          <p:cNvPr id="28" name="Shape 26"/>
           <p:cNvSpPr/>
           <p:nvPr/>
         </p:nvSpPr>
@@ -29261,14 +30153,14 @@
       </p:sp>
       <p:sp>
         <p:nvSpPr>
-          <p:cNvPr id="25" name="Shape 23"/>
-          <p:cNvSpPr/>
-          <p:nvPr/>
-        </p:nvSpPr>
-        <p:spPr>
-          <a:xfrm>
-            <a:off x="1975104" y="3364992"/>
-            <a:ext cx="1554480" cy="475488"/>
+          <p:cNvPr id="29" name="Shape 27"/>
+          <p:cNvSpPr/>
+          <p:nvPr/>
+        </p:nvSpPr>
+        <p:spPr>
+          <a:xfrm>
+            <a:off x="1978152" y="3364992"/>
+            <a:ext cx="1225296" cy="475488"/>
           </a:xfrm>
           <a:prstGeom prst="rect">
             <a:avLst>
@@ -29288,14 +30180,14 @@
       </p:sp>
       <p:sp>
         <p:nvSpPr>
-          <p:cNvPr id="26" name="Text 24"/>
-          <p:cNvSpPr/>
-          <p:nvPr/>
-        </p:nvSpPr>
-        <p:spPr>
-          <a:xfrm>
-            <a:off x="1975104" y="3364992"/>
-            <a:ext cx="1554480" cy="475488"/>
+          <p:cNvPr id="30" name="Text 28"/>
+          <p:cNvSpPr/>
+          <p:nvPr/>
+        </p:nvSpPr>
+        <p:spPr>
+          <a:xfrm>
+            <a:off x="1978152" y="3364992"/>
+            <a:ext cx="1225296" cy="475488"/>
           </a:xfrm>
           <a:prstGeom prst="rect">
             <a:avLst/>
@@ -29319,7 +30211,7 @@
                 <a:ea typeface="Trebuchet MS" pitchFamily="34" charset="-122"/>
                 <a:cs typeface="Trebuchet MS" pitchFamily="34" charset="-120"/>
               </a:rPr>
-              <a:t>re</a:t>
+              <a:t>un</a:t>
             </a:r>
             <a:endParaRPr lang="en-US" sz="1400" dirty="0"/>
           </a:p>
@@ -29327,14 +30219,14 @@
       </p:sp>
       <p:sp>
         <p:nvSpPr>
-          <p:cNvPr id="27" name="Text 25"/>
-          <p:cNvSpPr/>
-          <p:nvPr/>
-        </p:nvSpPr>
-        <p:spPr>
-          <a:xfrm>
-            <a:off x="3529584" y="3364992"/>
-            <a:ext cx="73152" cy="475488"/>
+          <p:cNvPr id="31" name="Text 29"/>
+          <p:cNvSpPr/>
+          <p:nvPr/>
+        </p:nvSpPr>
+        <p:spPr>
+          <a:xfrm>
+            <a:off x="3203448" y="3364992"/>
+            <a:ext cx="76200" cy="475488"/>
           </a:xfrm>
           <a:prstGeom prst="rect">
             <a:avLst/>
@@ -29366,14 +30258,14 @@
       </p:sp>
       <p:sp>
         <p:nvSpPr>
-          <p:cNvPr id="28" name="Shape 26"/>
-          <p:cNvSpPr/>
-          <p:nvPr/>
-        </p:nvSpPr>
-        <p:spPr>
-          <a:xfrm>
-            <a:off x="3602736" y="3364992"/>
-            <a:ext cx="1554480" cy="475488"/>
+          <p:cNvPr id="32" name="Shape 30"/>
+          <p:cNvSpPr/>
+          <p:nvPr/>
+        </p:nvSpPr>
+        <p:spPr>
+          <a:xfrm>
+            <a:off x="3279648" y="3364992"/>
+            <a:ext cx="1225296" cy="475488"/>
           </a:xfrm>
           <a:prstGeom prst="rect">
             <a:avLst>
@@ -29393,14 +30285,14 @@
       </p:sp>
       <p:sp>
         <p:nvSpPr>
-          <p:cNvPr id="29" name="Text 27"/>
-          <p:cNvSpPr/>
-          <p:nvPr/>
-        </p:nvSpPr>
-        <p:spPr>
-          <a:xfrm>
-            <a:off x="3602736" y="3364992"/>
-            <a:ext cx="1554480" cy="475488"/>
+          <p:cNvPr id="33" name="Text 31"/>
+          <p:cNvSpPr/>
+          <p:nvPr/>
+        </p:nvSpPr>
+        <p:spPr>
+          <a:xfrm>
+            <a:off x="3279648" y="3364992"/>
+            <a:ext cx="1225296" cy="475488"/>
           </a:xfrm>
           <a:prstGeom prst="rect">
             <a:avLst/>
@@ -29432,14 +30324,14 @@
       </p:sp>
       <p:sp>
         <p:nvSpPr>
-          <p:cNvPr id="30" name="Text 28"/>
-          <p:cNvSpPr/>
-          <p:nvPr/>
-        </p:nvSpPr>
-        <p:spPr>
-          <a:xfrm>
-            <a:off x="5157216" y="3364992"/>
-            <a:ext cx="73152" cy="475488"/>
+          <p:cNvPr id="34" name="Text 32"/>
+          <p:cNvSpPr/>
+          <p:nvPr/>
+        </p:nvSpPr>
+        <p:spPr>
+          <a:xfrm>
+            <a:off x="4504944" y="3364992"/>
+            <a:ext cx="76200" cy="475488"/>
           </a:xfrm>
           <a:prstGeom prst="rect">
             <a:avLst/>
@@ -29471,14 +30363,14 @@
       </p:sp>
       <p:sp>
         <p:nvSpPr>
-          <p:cNvPr id="31" name="Shape 29"/>
-          <p:cNvSpPr/>
-          <p:nvPr/>
-        </p:nvSpPr>
-        <p:spPr>
-          <a:xfrm>
-            <a:off x="5230368" y="3364992"/>
-            <a:ext cx="1554480" cy="475488"/>
+          <p:cNvPr id="35" name="Shape 33"/>
+          <p:cNvSpPr/>
+          <p:nvPr/>
+        </p:nvSpPr>
+        <p:spPr>
+          <a:xfrm>
+            <a:off x="4581144" y="3364992"/>
+            <a:ext cx="1225296" cy="475488"/>
           </a:xfrm>
           <a:prstGeom prst="rect">
             <a:avLst>
@@ -29498,14 +30390,14 @@
       </p:sp>
       <p:sp>
         <p:nvSpPr>
-          <p:cNvPr id="32" name="Text 30"/>
-          <p:cNvSpPr/>
-          <p:nvPr/>
-        </p:nvSpPr>
-        <p:spPr>
-          <a:xfrm>
-            <a:off x="5230368" y="3364992"/>
-            <a:ext cx="1554480" cy="475488"/>
+          <p:cNvPr id="36" name="Text 34"/>
+          <p:cNvSpPr/>
+          <p:nvPr/>
+        </p:nvSpPr>
+        <p:spPr>
+          <a:xfrm>
+            <a:off x="4581144" y="3364992"/>
+            <a:ext cx="1225296" cy="475488"/>
           </a:xfrm>
           <a:prstGeom prst="rect">
             <a:avLst/>
@@ -29537,14 +30429,14 @@
       </p:sp>
       <p:sp>
         <p:nvSpPr>
-          <p:cNvPr id="33" name="Text 31"/>
-          <p:cNvSpPr/>
-          <p:nvPr/>
-        </p:nvSpPr>
-        <p:spPr>
-          <a:xfrm>
-            <a:off x="6784848" y="3364992"/>
-            <a:ext cx="73152" cy="475488"/>
+          <p:cNvPr id="37" name="Text 35"/>
+          <p:cNvSpPr/>
+          <p:nvPr/>
+        </p:nvSpPr>
+        <p:spPr>
+          <a:xfrm>
+            <a:off x="5806440" y="3364992"/>
+            <a:ext cx="76200" cy="475488"/>
           </a:xfrm>
           <a:prstGeom prst="rect">
             <a:avLst/>
@@ -29576,14 +30468,14 @@
       </p:sp>
       <p:sp>
         <p:nvSpPr>
-          <p:cNvPr id="34" name="Shape 32"/>
-          <p:cNvSpPr/>
-          <p:nvPr/>
-        </p:nvSpPr>
-        <p:spPr>
-          <a:xfrm>
-            <a:off x="6858000" y="3364992"/>
-            <a:ext cx="1554480" cy="475488"/>
+          <p:cNvPr id="38" name="Shape 36"/>
+          <p:cNvSpPr/>
+          <p:nvPr/>
+        </p:nvSpPr>
+        <p:spPr>
+          <a:xfrm>
+            <a:off x="5882640" y="3364992"/>
+            <a:ext cx="1225296" cy="475488"/>
           </a:xfrm>
           <a:prstGeom prst="rect">
             <a:avLst>
@@ -29603,14 +30495,14 @@
       </p:sp>
       <p:sp>
         <p:nvSpPr>
-          <p:cNvPr id="35" name="Text 33"/>
-          <p:cNvSpPr/>
-          <p:nvPr/>
-        </p:nvSpPr>
-        <p:spPr>
-          <a:xfrm>
-            <a:off x="6858000" y="3364992"/>
-            <a:ext cx="1554480" cy="475488"/>
+          <p:cNvPr id="39" name="Text 37"/>
+          <p:cNvSpPr/>
+          <p:nvPr/>
+        </p:nvSpPr>
+        <p:spPr>
+          <a:xfrm>
+            <a:off x="5882640" y="3364992"/>
+            <a:ext cx="1225296" cy="475488"/>
           </a:xfrm>
           <a:prstGeom prst="rect">
             <a:avLst/>
@@ -29634,7 +30526,7 @@
                 <a:ea typeface="Trebuchet MS" pitchFamily="34" charset="-122"/>
                 <a:cs typeface="Trebuchet MS" pitchFamily="34" charset="-120"/>
               </a:rPr>
-              <a:t>cate</a:t>
+              <a:t>ca</a:t>
             </a:r>
             <a:endParaRPr lang="en-US" sz="1400" dirty="0"/>
           </a:p>
@@ -29642,7 +30534,112 @@
       </p:sp>
       <p:sp>
         <p:nvSpPr>
-          <p:cNvPr id="36" name="Shape 34"/>
+          <p:cNvPr id="40" name="Text 38"/>
+          <p:cNvSpPr/>
+          <p:nvPr/>
+        </p:nvSpPr>
+        <p:spPr>
+          <a:xfrm>
+            <a:off x="7107936" y="3364992"/>
+            <a:ext cx="76200" cy="475488"/>
+          </a:xfrm>
+          <a:prstGeom prst="rect">
+            <a:avLst/>
+          </a:prstGeom>
+          <a:noFill/>
+          <a:ln/>
+        </p:spPr>
+        <p:txBody>
+          <a:bodyPr wrap="square" lIns="0" tIns="0" rIns="0" bIns="0" rtlCol="0" anchor="ctr"/>
+          <a:lstStyle/>
+          <a:p>
+            <a:pPr algn="ctr" indent="0" marL="0">
+              <a:buNone/>
+            </a:pPr>
+            <a:r>
+              <a:rPr lang="en-US" sz="1600" b="1" dirty="0">
+                <a:solidFill>
+                  <a:srgbClr val="0D9488"/>
+                </a:solidFill>
+                <a:latin typeface="Trebuchet MS" pitchFamily="34" charset="0"/>
+                <a:ea typeface="Trebuchet MS" pitchFamily="34" charset="-122"/>
+                <a:cs typeface="Trebuchet MS" pitchFamily="34" charset="-120"/>
+              </a:rPr>
+              <a:t>·</a:t>
+            </a:r>
+            <a:endParaRPr lang="en-US" sz="1600" dirty="0"/>
+          </a:p>
+        </p:txBody>
+      </p:sp>
+      <p:sp>
+        <p:nvSpPr>
+          <p:cNvPr id="41" name="Shape 39"/>
+          <p:cNvSpPr/>
+          <p:nvPr/>
+        </p:nvSpPr>
+        <p:spPr>
+          <a:xfrm>
+            <a:off x="7184136" y="3364992"/>
+            <a:ext cx="1225296" cy="475488"/>
+          </a:xfrm>
+          <a:prstGeom prst="rect">
+            <a:avLst>
+              <a:gd name="adj" fmla="val 9615"/>
+            </a:avLst>
+          </a:prstGeom>
+          <a:solidFill>
+            <a:srgbClr val="FFFFFF"/>
+          </a:solidFill>
+          <a:ln w="12700">
+            <a:solidFill>
+              <a:srgbClr val="0D9488"/>
+            </a:solidFill>
+            <a:prstDash val="solid"/>
+          </a:ln>
+        </p:spPr>
+      </p:sp>
+      <p:sp>
+        <p:nvSpPr>
+          <p:cNvPr id="42" name="Text 40"/>
+          <p:cNvSpPr/>
+          <p:nvPr/>
+        </p:nvSpPr>
+        <p:spPr>
+          <a:xfrm>
+            <a:off x="7184136" y="3364992"/>
+            <a:ext cx="1225296" cy="475488"/>
+          </a:xfrm>
+          <a:prstGeom prst="rect">
+            <a:avLst/>
+          </a:prstGeom>
+          <a:noFill/>
+          <a:ln/>
+        </p:spPr>
+        <p:txBody>
+          <a:bodyPr wrap="square" lIns="0" tIns="0" rIns="0" bIns="0" rtlCol="0" anchor="ctr"/>
+          <a:lstStyle/>
+          <a:p>
+            <a:pPr algn="ctr" indent="0" marL="0">
+              <a:buNone/>
+            </a:pPr>
+            <a:r>
+              <a:rPr lang="en-US" sz="1400" b="1" dirty="0">
+                <a:solidFill>
+                  <a:srgbClr val="0D9488"/>
+                </a:solidFill>
+                <a:latin typeface="Trebuchet MS" pitchFamily="34" charset="0"/>
+                <a:ea typeface="Trebuchet MS" pitchFamily="34" charset="-122"/>
+                <a:cs typeface="Trebuchet MS" pitchFamily="34" charset="-120"/>
+              </a:rPr>
+              <a:t>ted</a:t>
+            </a:r>
+            <a:endParaRPr lang="en-US" sz="1400" dirty="0"/>
+          </a:p>
+        </p:txBody>
+      </p:sp>
+      <p:sp>
+        <p:nvSpPr>
+          <p:cNvPr id="43" name="Shape 41"/>
           <p:cNvSpPr/>
           <p:nvPr/>
         </p:nvSpPr>
@@ -29669,7 +30666,7 @@
       </p:sp>
       <p:sp>
         <p:nvSpPr>
-          <p:cNvPr id="37" name="Text 35"/>
+          <p:cNvPr id="44" name="Text 42"/>
           <p:cNvSpPr/>
           <p:nvPr/>
         </p:nvSpPr>
@@ -29708,7 +30705,7 @@
       </p:sp>
       <p:sp>
         <p:nvSpPr>
-          <p:cNvPr id="38" name="Shape 36"/>
+          <p:cNvPr id="45" name="Shape 43"/>
           <p:cNvSpPr/>
           <p:nvPr/>
         </p:nvSpPr>
@@ -29735,14 +30732,14 @@
       </p:sp>
       <p:sp>
         <p:nvSpPr>
-          <p:cNvPr id="39" name="Shape 37"/>
-          <p:cNvSpPr/>
-          <p:nvPr/>
-        </p:nvSpPr>
-        <p:spPr>
-          <a:xfrm>
-            <a:off x="1951330" y="4169664"/>
-            <a:ext cx="676656" cy="384048"/>
+          <p:cNvPr id="46" name="Shape 44"/>
+          <p:cNvSpPr/>
+          <p:nvPr/>
+        </p:nvSpPr>
+        <p:spPr>
+          <a:xfrm>
+            <a:off x="1951828" y="4169664"/>
+            <a:ext cx="603504" cy="384048"/>
           </a:xfrm>
           <a:prstGeom prst="rect">
             <a:avLst>
@@ -29762,14 +30759,14 @@
       </p:sp>
       <p:sp>
         <p:nvSpPr>
-          <p:cNvPr id="40" name="Text 38"/>
-          <p:cNvSpPr/>
-          <p:nvPr/>
-        </p:nvSpPr>
-        <p:spPr>
-          <a:xfrm>
-            <a:off x="1951330" y="4169664"/>
-            <a:ext cx="676656" cy="384048"/>
+          <p:cNvPr id="47" name="Text 45"/>
+          <p:cNvSpPr/>
+          <p:nvPr/>
+        </p:nvSpPr>
+        <p:spPr>
+          <a:xfrm>
+            <a:off x="1951828" y="4169664"/>
+            <a:ext cx="603504" cy="384048"/>
           </a:xfrm>
           <a:prstGeom prst="rect">
             <a:avLst/>
@@ -29793,7 +30790,7 @@
                 <a:ea typeface="Trebuchet MS" pitchFamily="34" charset="-122"/>
                 <a:cs typeface="Trebuchet MS" pitchFamily="34" charset="-120"/>
               </a:rPr>
-              <a:t>r</a:t>
+              <a:t>u</a:t>
             </a:r>
             <a:endParaRPr lang="en-US" sz="900" dirty="0"/>
           </a:p>
@@ -29801,14 +30798,14 @@
       </p:sp>
       <p:sp>
         <p:nvSpPr>
-          <p:cNvPr id="41" name="Shape 39"/>
-          <p:cNvSpPr/>
-          <p:nvPr/>
-        </p:nvSpPr>
-        <p:spPr>
-          <a:xfrm>
-            <a:off x="2677363" y="4169664"/>
-            <a:ext cx="676656" cy="384048"/>
+          <p:cNvPr id="48" name="Shape 46"/>
+          <p:cNvSpPr/>
+          <p:nvPr/>
+        </p:nvSpPr>
+        <p:spPr>
+          <a:xfrm>
+            <a:off x="2605209" y="4169664"/>
+            <a:ext cx="603504" cy="384048"/>
           </a:xfrm>
           <a:prstGeom prst="rect">
             <a:avLst>
@@ -29828,14 +30825,14 @@
       </p:sp>
       <p:sp>
         <p:nvSpPr>
-          <p:cNvPr id="42" name="Text 40"/>
-          <p:cNvSpPr/>
-          <p:nvPr/>
-        </p:nvSpPr>
-        <p:spPr>
-          <a:xfrm>
-            <a:off x="2677363" y="4169664"/>
-            <a:ext cx="676656" cy="384048"/>
+          <p:cNvPr id="49" name="Text 47"/>
+          <p:cNvSpPr/>
+          <p:nvPr/>
+        </p:nvSpPr>
+        <p:spPr>
+          <a:xfrm>
+            <a:off x="2605209" y="4169664"/>
+            <a:ext cx="603504" cy="384048"/>
           </a:xfrm>
           <a:prstGeom prst="rect">
             <a:avLst/>
@@ -29859,7 +30856,7 @@
                 <a:ea typeface="Trebuchet MS" pitchFamily="34" charset="-122"/>
                 <a:cs typeface="Trebuchet MS" pitchFamily="34" charset="-120"/>
               </a:rPr>
-              <a:t>e</a:t>
+              <a:t>n</a:t>
             </a:r>
             <a:endParaRPr lang="en-US" sz="900" dirty="0"/>
           </a:p>
@@ -29867,14 +30864,14 @@
       </p:sp>
       <p:sp>
         <p:nvSpPr>
-          <p:cNvPr id="43" name="Shape 41"/>
-          <p:cNvSpPr/>
-          <p:nvPr/>
-        </p:nvSpPr>
-        <p:spPr>
-          <a:xfrm>
-            <a:off x="3403397" y="4169664"/>
-            <a:ext cx="676656" cy="384048"/>
+          <p:cNvPr id="50" name="Shape 48"/>
+          <p:cNvSpPr/>
+          <p:nvPr/>
+        </p:nvSpPr>
+        <p:spPr>
+          <a:xfrm>
+            <a:off x="3258589" y="4169664"/>
+            <a:ext cx="603504" cy="384048"/>
           </a:xfrm>
           <a:prstGeom prst="rect">
             <a:avLst>
@@ -29894,14 +30891,14 @@
       </p:sp>
       <p:sp>
         <p:nvSpPr>
-          <p:cNvPr id="44" name="Text 42"/>
-          <p:cNvSpPr/>
-          <p:nvPr/>
-        </p:nvSpPr>
-        <p:spPr>
-          <a:xfrm>
-            <a:off x="3403397" y="4169664"/>
-            <a:ext cx="676656" cy="384048"/>
+          <p:cNvPr id="51" name="Text 49"/>
+          <p:cNvSpPr/>
+          <p:nvPr/>
+        </p:nvSpPr>
+        <p:spPr>
+          <a:xfrm>
+            <a:off x="3258589" y="4169664"/>
+            <a:ext cx="603504" cy="384048"/>
           </a:xfrm>
           <a:prstGeom prst="rect">
             <a:avLst/>
@@ -29933,14 +30930,14 @@
       </p:sp>
       <p:sp>
         <p:nvSpPr>
-          <p:cNvPr id="45" name="Shape 43"/>
-          <p:cNvSpPr/>
-          <p:nvPr/>
-        </p:nvSpPr>
-        <p:spPr>
-          <a:xfrm>
-            <a:off x="4129430" y="4169664"/>
-            <a:ext cx="676656" cy="384048"/>
+          <p:cNvPr id="52" name="Shape 50"/>
+          <p:cNvSpPr/>
+          <p:nvPr/>
+        </p:nvSpPr>
+        <p:spPr>
+          <a:xfrm>
+            <a:off x="3911969" y="4169664"/>
+            <a:ext cx="603504" cy="384048"/>
           </a:xfrm>
           <a:prstGeom prst="rect">
             <a:avLst>
@@ -29960,14 +30957,14 @@
       </p:sp>
       <p:sp>
         <p:nvSpPr>
-          <p:cNvPr id="46" name="Text 44"/>
-          <p:cNvSpPr/>
-          <p:nvPr/>
-        </p:nvSpPr>
-        <p:spPr>
-          <a:xfrm>
-            <a:off x="4129430" y="4169664"/>
-            <a:ext cx="676656" cy="384048"/>
+          <p:cNvPr id="53" name="Text 51"/>
+          <p:cNvSpPr/>
+          <p:nvPr/>
+        </p:nvSpPr>
+        <p:spPr>
+          <a:xfrm>
+            <a:off x="3911969" y="4169664"/>
+            <a:ext cx="603504" cy="384048"/>
           </a:xfrm>
           <a:prstGeom prst="rect">
             <a:avLst/>
@@ -29999,14 +30996,14 @@
       </p:sp>
       <p:sp>
         <p:nvSpPr>
-          <p:cNvPr id="47" name="Shape 45"/>
-          <p:cNvSpPr/>
-          <p:nvPr/>
-        </p:nvSpPr>
-        <p:spPr>
-          <a:xfrm>
-            <a:off x="4855464" y="4169664"/>
-            <a:ext cx="676656" cy="384048"/>
+          <p:cNvPr id="54" name="Shape 52"/>
+          <p:cNvSpPr/>
+          <p:nvPr/>
+        </p:nvSpPr>
+        <p:spPr>
+          <a:xfrm>
+            <a:off x="4565350" y="4169664"/>
+            <a:ext cx="603504" cy="384048"/>
           </a:xfrm>
           <a:prstGeom prst="rect">
             <a:avLst>
@@ -30026,14 +31023,14 @@
       </p:sp>
       <p:sp>
         <p:nvSpPr>
-          <p:cNvPr id="48" name="Text 46"/>
-          <p:cNvSpPr/>
-          <p:nvPr/>
-        </p:nvSpPr>
-        <p:spPr>
-          <a:xfrm>
-            <a:off x="4855464" y="4169664"/>
-            <a:ext cx="676656" cy="384048"/>
+          <p:cNvPr id="55" name="Text 53"/>
+          <p:cNvSpPr/>
+          <p:nvPr/>
+        </p:nvSpPr>
+        <p:spPr>
+          <a:xfrm>
+            <a:off x="4565350" y="4169664"/>
+            <a:ext cx="603504" cy="384048"/>
           </a:xfrm>
           <a:prstGeom prst="rect">
             <a:avLst/>
@@ -30065,14 +31062,14 @@
       </p:sp>
       <p:sp>
         <p:nvSpPr>
-          <p:cNvPr id="49" name="Shape 47"/>
-          <p:cNvSpPr/>
-          <p:nvPr/>
-        </p:nvSpPr>
-        <p:spPr>
-          <a:xfrm>
-            <a:off x="5581498" y="4169664"/>
-            <a:ext cx="676656" cy="384048"/>
+          <p:cNvPr id="56" name="Shape 54"/>
+          <p:cNvSpPr/>
+          <p:nvPr/>
+        </p:nvSpPr>
+        <p:spPr>
+          <a:xfrm>
+            <a:off x="5218730" y="4169664"/>
+            <a:ext cx="603504" cy="384048"/>
           </a:xfrm>
           <a:prstGeom prst="rect">
             <a:avLst>
@@ -30092,14 +31089,14 @@
       </p:sp>
       <p:sp>
         <p:nvSpPr>
-          <p:cNvPr id="50" name="Text 48"/>
-          <p:cNvSpPr/>
-          <p:nvPr/>
-        </p:nvSpPr>
-        <p:spPr>
-          <a:xfrm>
-            <a:off x="5581498" y="4169664"/>
-            <a:ext cx="676656" cy="384048"/>
+          <p:cNvPr id="57" name="Text 55"/>
+          <p:cNvSpPr/>
+          <p:nvPr/>
+        </p:nvSpPr>
+        <p:spPr>
+          <a:xfrm>
+            <a:off x="5218730" y="4169664"/>
+            <a:ext cx="603504" cy="384048"/>
           </a:xfrm>
           <a:prstGeom prst="rect">
             <a:avLst/>
@@ -30131,14 +31128,14 @@
       </p:sp>
       <p:sp>
         <p:nvSpPr>
-          <p:cNvPr id="51" name="Text 49"/>
-          <p:cNvSpPr/>
-          <p:nvPr/>
-        </p:nvSpPr>
-        <p:spPr>
-          <a:xfrm>
-            <a:off x="5581498" y="4572000"/>
-            <a:ext cx="676656" cy="219456"/>
+          <p:cNvPr id="58" name="Text 56"/>
+          <p:cNvSpPr/>
+          <p:nvPr/>
+        </p:nvSpPr>
+        <p:spPr>
+          <a:xfrm>
+            <a:off x="5218730" y="4572000"/>
+            <a:ext cx="603504" cy="219456"/>
           </a:xfrm>
           <a:prstGeom prst="rect">
             <a:avLst/>
@@ -30170,14 +31167,14 @@
       </p:sp>
       <p:sp>
         <p:nvSpPr>
-          <p:cNvPr id="52" name="Shape 50"/>
-          <p:cNvSpPr/>
-          <p:nvPr/>
-        </p:nvSpPr>
-        <p:spPr>
-          <a:xfrm>
-            <a:off x="6307531" y="4169664"/>
-            <a:ext cx="676656" cy="384048"/>
+          <p:cNvPr id="59" name="Shape 57"/>
+          <p:cNvSpPr/>
+          <p:nvPr/>
+        </p:nvSpPr>
+        <p:spPr>
+          <a:xfrm>
+            <a:off x="5872111" y="4169664"/>
+            <a:ext cx="603504" cy="384048"/>
           </a:xfrm>
           <a:prstGeom prst="rect">
             <a:avLst>
@@ -30197,14 +31194,14 @@
       </p:sp>
       <p:sp>
         <p:nvSpPr>
-          <p:cNvPr id="53" name="Text 51"/>
-          <p:cNvSpPr/>
-          <p:nvPr/>
-        </p:nvSpPr>
-        <p:spPr>
-          <a:xfrm>
-            <a:off x="6307531" y="4169664"/>
-            <a:ext cx="676656" cy="384048"/>
+          <p:cNvPr id="60" name="Text 58"/>
+          <p:cNvSpPr/>
+          <p:nvPr/>
+        </p:nvSpPr>
+        <p:spPr>
+          <a:xfrm>
+            <a:off x="5872111" y="4169664"/>
+            <a:ext cx="603504" cy="384048"/>
           </a:xfrm>
           <a:prstGeom prst="rect">
             <a:avLst/>
@@ -30236,14 +31233,14 @@
       </p:sp>
       <p:sp>
         <p:nvSpPr>
-          <p:cNvPr id="54" name="Shape 52"/>
-          <p:cNvSpPr/>
-          <p:nvPr/>
-        </p:nvSpPr>
-        <p:spPr>
-          <a:xfrm>
-            <a:off x="7033565" y="4169664"/>
-            <a:ext cx="676656" cy="384048"/>
+          <p:cNvPr id="61" name="Shape 59"/>
+          <p:cNvSpPr/>
+          <p:nvPr/>
+        </p:nvSpPr>
+        <p:spPr>
+          <a:xfrm>
+            <a:off x="6525491" y="4169664"/>
+            <a:ext cx="603504" cy="384048"/>
           </a:xfrm>
           <a:prstGeom prst="rect">
             <a:avLst>
@@ -30263,14 +31260,14 @@
       </p:sp>
       <p:sp>
         <p:nvSpPr>
-          <p:cNvPr id="55" name="Text 53"/>
-          <p:cNvSpPr/>
-          <p:nvPr/>
-        </p:nvSpPr>
-        <p:spPr>
-          <a:xfrm>
-            <a:off x="7033565" y="4169664"/>
-            <a:ext cx="676656" cy="384048"/>
+          <p:cNvPr id="62" name="Text 60"/>
+          <p:cNvSpPr/>
+          <p:nvPr/>
+        </p:nvSpPr>
+        <p:spPr>
+          <a:xfrm>
+            <a:off x="6525491" y="4169664"/>
+            <a:ext cx="603504" cy="384048"/>
           </a:xfrm>
           <a:prstGeom prst="rect">
             <a:avLst/>
@@ -30302,14 +31299,14 @@
       </p:sp>
       <p:sp>
         <p:nvSpPr>
-          <p:cNvPr id="56" name="Shape 54"/>
-          <p:cNvSpPr/>
-          <p:nvPr/>
-        </p:nvSpPr>
-        <p:spPr>
-          <a:xfrm>
-            <a:off x="7759598" y="4169664"/>
-            <a:ext cx="676656" cy="384048"/>
+          <p:cNvPr id="63" name="Shape 61"/>
+          <p:cNvSpPr/>
+          <p:nvPr/>
+        </p:nvSpPr>
+        <p:spPr>
+          <a:xfrm>
+            <a:off x="7178871" y="4169664"/>
+            <a:ext cx="603504" cy="384048"/>
           </a:xfrm>
           <a:prstGeom prst="rect">
             <a:avLst>
@@ -30329,14 +31326,14 @@
       </p:sp>
       <p:sp>
         <p:nvSpPr>
-          <p:cNvPr id="57" name="Text 55"/>
-          <p:cNvSpPr/>
-          <p:nvPr/>
-        </p:nvSpPr>
-        <p:spPr>
-          <a:xfrm>
-            <a:off x="7759598" y="4169664"/>
-            <a:ext cx="676656" cy="384048"/>
+          <p:cNvPr id="64" name="Text 62"/>
+          <p:cNvSpPr/>
+          <p:nvPr/>
+        </p:nvSpPr>
+        <p:spPr>
+          <a:xfrm>
+            <a:off x="7178871" y="4169664"/>
+            <a:ext cx="603504" cy="384048"/>
           </a:xfrm>
           <a:prstGeom prst="rect">
             <a:avLst/>
@@ -30361,6 +31358,72 @@
                 <a:cs typeface="Trebuchet MS" pitchFamily="34" charset="-120"/>
               </a:rPr>
               <a:t>e</a:t>
+            </a:r>
+            <a:endParaRPr lang="en-US" sz="900" dirty="0"/>
+          </a:p>
+        </p:txBody>
+      </p:sp>
+      <p:sp>
+        <p:nvSpPr>
+          <p:cNvPr id="65" name="Shape 63"/>
+          <p:cNvSpPr/>
+          <p:nvPr/>
+        </p:nvSpPr>
+        <p:spPr>
+          <a:xfrm>
+            <a:off x="7832252" y="4169664"/>
+            <a:ext cx="603504" cy="384048"/>
+          </a:xfrm>
+          <a:prstGeom prst="rect">
+            <a:avLst>
+              <a:gd name="adj" fmla="val 9524"/>
+            </a:avLst>
+          </a:prstGeom>
+          <a:solidFill>
+            <a:srgbClr val="FFFFFF"/>
+          </a:solidFill>
+          <a:ln w="12700">
+            <a:solidFill>
+              <a:srgbClr val="DB2777"/>
+            </a:solidFill>
+            <a:prstDash val="solid"/>
+          </a:ln>
+        </p:spPr>
+      </p:sp>
+      <p:sp>
+        <p:nvSpPr>
+          <p:cNvPr id="66" name="Text 64"/>
+          <p:cNvSpPr/>
+          <p:nvPr/>
+        </p:nvSpPr>
+        <p:spPr>
+          <a:xfrm>
+            <a:off x="7832252" y="4169664"/>
+            <a:ext cx="603504" cy="384048"/>
+          </a:xfrm>
+          <a:prstGeom prst="rect">
+            <a:avLst/>
+          </a:prstGeom>
+          <a:noFill/>
+          <a:ln/>
+        </p:spPr>
+        <p:txBody>
+          <a:bodyPr wrap="square" lIns="0" tIns="0" rIns="0" bIns="0" rtlCol="0" anchor="ctr"/>
+          <a:lstStyle/>
+          <a:p>
+            <a:pPr algn="ctr" indent="0" marL="0">
+              <a:buNone/>
+            </a:pPr>
+            <a:r>
+              <a:rPr lang="en-US" sz="900" b="1" dirty="0">
+                <a:solidFill>
+                  <a:srgbClr val="9D174D"/>
+                </a:solidFill>
+                <a:latin typeface="Trebuchet MS" pitchFamily="34" charset="0"/>
+                <a:ea typeface="Trebuchet MS" pitchFamily="34" charset="-122"/>
+                <a:cs typeface="Trebuchet MS" pitchFamily="34" charset="-120"/>
+              </a:rPr>
+              <a:t>d</a:t>
             </a:r>
             <a:endParaRPr lang="en-US" sz="900" dirty="0"/>
           </a:p>
@@ -30652,7 +31715,7 @@
                 <a:ea typeface="Calibri" pitchFamily="34" charset="-122"/>
                 <a:cs typeface="Calibri" pitchFamily="34" charset="-120"/>
               </a:rPr>
-              <a:t>Word Labs  •  wordlabs.app  •  Root: 'educate' = to lead out knowledge</a:t>
+              <a:t>Word Labs  •  wordlabs.app  •  Root: 'educate' = to lead out, teach</a:t>
             </a:r>
             <a:endParaRPr lang="en-US" sz="800" dirty="0"/>
           </a:p>
@@ -31479,7 +32542,7 @@
                 <a:ea typeface="Calibri" pitchFamily="34" charset="-122"/>
                 <a:cs typeface="Calibri" pitchFamily="34" charset="-120"/>
               </a:rPr>
-              <a:t>Word Labs  •  wordlabs.app  •  Root: 'educate' = to lead out knowledge</a:t>
+              <a:t>Word Labs  •  wordlabs.app  •  Root: 'educate' = to lead out, teach</a:t>
             </a:r>
             <a:endParaRPr lang="en-US" sz="800" dirty="0"/>
           </a:p>
@@ -31698,8 +32761,8 @@
         </p:nvSpPr>
         <p:spPr>
           <a:xfrm>
-            <a:off x="2221992" y="2258568"/>
-            <a:ext cx="1828800" cy="292608"/>
+            <a:off x="1989734" y="2258568"/>
+            <a:ext cx="1581912" cy="292608"/>
           </a:xfrm>
           <a:prstGeom prst="rect">
             <a:avLst>
@@ -31732,8 +32795,8 @@
         </p:nvSpPr>
         <p:spPr>
           <a:xfrm>
-            <a:off x="2221992" y="2258568"/>
-            <a:ext cx="1828800" cy="292608"/>
+            <a:off x="1989734" y="2258568"/>
+            <a:ext cx="1581912" cy="292608"/>
           </a:xfrm>
           <a:prstGeom prst="rect">
             <a:avLst/>
@@ -31771,8 +32834,8 @@
         </p:nvSpPr>
         <p:spPr>
           <a:xfrm>
-            <a:off x="2221992" y="2569464"/>
-            <a:ext cx="1828800" cy="201168"/>
+            <a:off x="1989734" y="2569464"/>
+            <a:ext cx="1581912" cy="201168"/>
           </a:xfrm>
           <a:prstGeom prst="rect">
             <a:avLst/>
@@ -31796,7 +32859,7 @@
                 <a:ea typeface="Calibri" pitchFamily="34" charset="-122"/>
                 <a:cs typeface="Calibri" pitchFamily="34" charset="-120"/>
               </a:rPr>
-              <a:t>to lead out knowledge</a:t>
+              <a:t>to lead out, teach</a:t>
             </a:r>
             <a:endParaRPr lang="en-US" sz="850" dirty="0"/>
           </a:p>
@@ -31810,8 +32873,8 @@
         </p:nvSpPr>
         <p:spPr>
           <a:xfrm>
-            <a:off x="2221992" y="2752344"/>
-            <a:ext cx="1828800" cy="182880"/>
+            <a:off x="1989734" y="2752344"/>
+            <a:ext cx="1581912" cy="182880"/>
           </a:xfrm>
           <a:prstGeom prst="rect">
             <a:avLst/>
@@ -31849,8 +32912,8 @@
         </p:nvSpPr>
         <p:spPr>
           <a:xfrm>
-            <a:off x="4370832" y="2258568"/>
-            <a:ext cx="1828800" cy="292608"/>
+            <a:off x="3659429" y="2258568"/>
+            <a:ext cx="1581912" cy="292608"/>
           </a:xfrm>
           <a:prstGeom prst="rect">
             <a:avLst>
@@ -31883,8 +32946,8 @@
         </p:nvSpPr>
         <p:spPr>
           <a:xfrm>
-            <a:off x="4370832" y="2258568"/>
-            <a:ext cx="1828800" cy="292608"/>
+            <a:off x="3659429" y="2258568"/>
+            <a:ext cx="1581912" cy="292608"/>
           </a:xfrm>
           <a:prstGeom prst="rect">
             <a:avLst/>
@@ -31908,7 +32971,7 @@
                 <a:ea typeface="Trebuchet MS" pitchFamily="34" charset="-122"/>
                 <a:cs typeface="Trebuchet MS" pitchFamily="34" charset="-120"/>
               </a:rPr>
-              <a:t>ion</a:t>
+              <a:t>a</a:t>
             </a:r>
             <a:endParaRPr lang="en-US" sz="1300" dirty="0"/>
           </a:p>
@@ -31922,8 +32985,8 @@
         </p:nvSpPr>
         <p:spPr>
           <a:xfrm>
-            <a:off x="4370832" y="2569464"/>
-            <a:ext cx="1828800" cy="201168"/>
+            <a:off x="3659429" y="2569464"/>
+            <a:ext cx="1581912" cy="201168"/>
           </a:xfrm>
           <a:prstGeom prst="rect">
             <a:avLst/>
@@ -31947,7 +33010,7 @@
                 <a:ea typeface="Calibri" pitchFamily="34" charset="-122"/>
                 <a:cs typeface="Calibri" pitchFamily="34" charset="-120"/>
               </a:rPr>
-              <a:t>act or process of</a:t>
+              <a:t>connecting vowel</a:t>
             </a:r>
             <a:endParaRPr lang="en-US" sz="850" dirty="0"/>
           </a:p>
@@ -31955,14 +33018,53 @@
       </p:sp>
       <p:sp>
         <p:nvSpPr>
-          <p:cNvPr id="23" name="Shape 21"/>
-          <p:cNvSpPr/>
-          <p:nvPr/>
-        </p:nvSpPr>
-        <p:spPr>
-          <a:xfrm>
-            <a:off x="6519672" y="2258568"/>
-            <a:ext cx="1828800" cy="292608"/>
+          <p:cNvPr id="23" name="Text 21"/>
+          <p:cNvSpPr/>
+          <p:nvPr/>
+        </p:nvSpPr>
+        <p:spPr>
+          <a:xfrm>
+            <a:off x="3659429" y="2752344"/>
+            <a:ext cx="1581912" cy="182880"/>
+          </a:xfrm>
+          <a:prstGeom prst="rect">
+            <a:avLst/>
+          </a:prstGeom>
+          <a:noFill/>
+          <a:ln/>
+        </p:spPr>
+        <p:txBody>
+          <a:bodyPr wrap="square" lIns="0" tIns="0" rIns="0" bIns="0" rtlCol="0" anchor="t"/>
+          <a:lstStyle/>
+          <a:p>
+            <a:pPr algn="ctr" indent="0" marL="0">
+              <a:buNone/>
+            </a:pPr>
+            <a:r>
+              <a:rPr lang="en-US" sz="700" i="1" dirty="0">
+                <a:solidFill>
+                  <a:srgbClr val="94A3B8"/>
+                </a:solidFill>
+                <a:latin typeface="Calibri" pitchFamily="34" charset="0"/>
+                <a:ea typeface="Calibri" pitchFamily="34" charset="-122"/>
+                <a:cs typeface="Calibri" pitchFamily="34" charset="-120"/>
+              </a:rPr>
+              <a:t>links base to suffix</a:t>
+            </a:r>
+            <a:endParaRPr lang="en-US" sz="700" dirty="0"/>
+          </a:p>
+        </p:txBody>
+      </p:sp>
+      <p:sp>
+        <p:nvSpPr>
+          <p:cNvPr id="24" name="Shape 22"/>
+          <p:cNvSpPr/>
+          <p:nvPr/>
+        </p:nvSpPr>
+        <p:spPr>
+          <a:xfrm>
+            <a:off x="5329123" y="2258568"/>
+            <a:ext cx="1581912" cy="292608"/>
           </a:xfrm>
           <a:prstGeom prst="rect">
             <a:avLst>
@@ -31989,14 +33091,14 @@
       </p:sp>
       <p:sp>
         <p:nvSpPr>
-          <p:cNvPr id="24" name="Text 22"/>
-          <p:cNvSpPr/>
-          <p:nvPr/>
-        </p:nvSpPr>
-        <p:spPr>
-          <a:xfrm>
-            <a:off x="6519672" y="2258568"/>
-            <a:ext cx="1828800" cy="292608"/>
+          <p:cNvPr id="25" name="Text 23"/>
+          <p:cNvSpPr/>
+          <p:nvPr/>
+        </p:nvSpPr>
+        <p:spPr>
+          <a:xfrm>
+            <a:off x="5329123" y="2258568"/>
+            <a:ext cx="1581912" cy="292608"/>
           </a:xfrm>
           <a:prstGeom prst="rect">
             <a:avLst/>
@@ -32020,7 +33122,7 @@
                 <a:ea typeface="Trebuchet MS" pitchFamily="34" charset="-122"/>
                 <a:cs typeface="Trebuchet MS" pitchFamily="34" charset="-120"/>
               </a:rPr>
-              <a:t>al</a:t>
+              <a:t>tion</a:t>
             </a:r>
             <a:endParaRPr lang="en-US" sz="1300" dirty="0"/>
           </a:p>
@@ -32028,14 +33130,14 @@
       </p:sp>
       <p:sp>
         <p:nvSpPr>
-          <p:cNvPr id="25" name="Text 23"/>
-          <p:cNvSpPr/>
-          <p:nvPr/>
-        </p:nvSpPr>
-        <p:spPr>
-          <a:xfrm>
-            <a:off x="6519672" y="2569464"/>
-            <a:ext cx="1828800" cy="201168"/>
+          <p:cNvPr id="26" name="Text 24"/>
+          <p:cNvSpPr/>
+          <p:nvPr/>
+        </p:nvSpPr>
+        <p:spPr>
+          <a:xfrm>
+            <a:off x="5329123" y="2569464"/>
+            <a:ext cx="1581912" cy="201168"/>
           </a:xfrm>
           <a:prstGeom prst="rect">
             <a:avLst/>
@@ -32059,6 +33161,118 @@
                 <a:ea typeface="Calibri" pitchFamily="34" charset="-122"/>
                 <a:cs typeface="Calibri" pitchFamily="34" charset="-120"/>
               </a:rPr>
+              <a:t>act or process of</a:t>
+            </a:r>
+            <a:endParaRPr lang="en-US" sz="850" dirty="0"/>
+          </a:p>
+        </p:txBody>
+      </p:sp>
+      <p:sp>
+        <p:nvSpPr>
+          <p:cNvPr id="27" name="Shape 25"/>
+          <p:cNvSpPr/>
+          <p:nvPr/>
+        </p:nvSpPr>
+        <p:spPr>
+          <a:xfrm>
+            <a:off x="6998818" y="2258568"/>
+            <a:ext cx="1581912" cy="292608"/>
+          </a:xfrm>
+          <a:prstGeom prst="rect">
+            <a:avLst>
+              <a:gd name="adj" fmla="val 25000"/>
+            </a:avLst>
+          </a:prstGeom>
+          <a:solidFill>
+            <a:srgbClr val="FCE7F3"/>
+          </a:solidFill>
+          <a:ln w="19050">
+            <a:solidFill>
+              <a:srgbClr val="DB2777"/>
+            </a:solidFill>
+            <a:prstDash val="solid"/>
+          </a:ln>
+          <a:effectLst>
+            <a:outerShdw sx="100000" sy="100000" kx="0" ky="0" algn="bl" rotWithShape="0" blurRad="101600" dist="38100" dir="8100000">
+              <a:srgbClr val="000000">
+                <a:alpha val="12000"/>
+              </a:srgbClr>
+            </a:outerShdw>
+          </a:effectLst>
+        </p:spPr>
+      </p:sp>
+      <p:sp>
+        <p:nvSpPr>
+          <p:cNvPr id="28" name="Text 26"/>
+          <p:cNvSpPr/>
+          <p:nvPr/>
+        </p:nvSpPr>
+        <p:spPr>
+          <a:xfrm>
+            <a:off x="6998818" y="2258568"/>
+            <a:ext cx="1581912" cy="292608"/>
+          </a:xfrm>
+          <a:prstGeom prst="rect">
+            <a:avLst/>
+          </a:prstGeom>
+          <a:noFill/>
+          <a:ln/>
+        </p:spPr>
+        <p:txBody>
+          <a:bodyPr wrap="square" lIns="0" tIns="0" rIns="0" bIns="0" rtlCol="0" anchor="ctr"/>
+          <a:lstStyle/>
+          <a:p>
+            <a:pPr algn="ctr" indent="0" marL="0">
+              <a:buNone/>
+            </a:pPr>
+            <a:r>
+              <a:rPr lang="en-US" sz="1300" b="1" dirty="0">
+                <a:solidFill>
+                  <a:srgbClr val="9D174D"/>
+                </a:solidFill>
+                <a:latin typeface="Trebuchet MS" pitchFamily="34" charset="0"/>
+                <a:ea typeface="Trebuchet MS" pitchFamily="34" charset="-122"/>
+                <a:cs typeface="Trebuchet MS" pitchFamily="34" charset="-120"/>
+              </a:rPr>
+              <a:t>al</a:t>
+            </a:r>
+            <a:endParaRPr lang="en-US" sz="1300" dirty="0"/>
+          </a:p>
+        </p:txBody>
+      </p:sp>
+      <p:sp>
+        <p:nvSpPr>
+          <p:cNvPr id="29" name="Text 27"/>
+          <p:cNvSpPr/>
+          <p:nvPr/>
+        </p:nvSpPr>
+        <p:spPr>
+          <a:xfrm>
+            <a:off x="6998818" y="2569464"/>
+            <a:ext cx="1581912" cy="201168"/>
+          </a:xfrm>
+          <a:prstGeom prst="rect">
+            <a:avLst/>
+          </a:prstGeom>
+          <a:noFill/>
+          <a:ln/>
+        </p:spPr>
+        <p:txBody>
+          <a:bodyPr wrap="square" lIns="0" tIns="0" rIns="0" bIns="0" rtlCol="0" anchor="t"/>
+          <a:lstStyle/>
+          <a:p>
+            <a:pPr algn="ctr" indent="0" marL="0">
+              <a:buNone/>
+            </a:pPr>
+            <a:r>
+              <a:rPr lang="en-US" sz="850" dirty="0">
+                <a:solidFill>
+                  <a:srgbClr val="475569"/>
+                </a:solidFill>
+                <a:latin typeface="Calibri" pitchFamily="34" charset="0"/>
+                <a:ea typeface="Calibri" pitchFamily="34" charset="-122"/>
+                <a:cs typeface="Calibri" pitchFamily="34" charset="-120"/>
+              </a:rPr>
               <a:t>relating to</a:t>
             </a:r>
             <a:endParaRPr lang="en-US" sz="850" dirty="0"/>
@@ -32067,7 +33281,7 @@
       </p:sp>
       <p:sp>
         <p:nvSpPr>
-          <p:cNvPr id="26" name="Shape 24"/>
+          <p:cNvPr id="30" name="Shape 28"/>
           <p:cNvSpPr/>
           <p:nvPr/>
         </p:nvSpPr>
@@ -32094,7 +33308,7 @@
       </p:sp>
       <p:sp>
         <p:nvSpPr>
-          <p:cNvPr id="27" name="Text 25"/>
+          <p:cNvPr id="31" name="Text 29"/>
           <p:cNvSpPr/>
           <p:nvPr/>
         </p:nvSpPr>
@@ -32133,7 +33347,7 @@
       </p:sp>
       <p:sp>
         <p:nvSpPr>
-          <p:cNvPr id="28" name="Shape 26"/>
+          <p:cNvPr id="32" name="Shape 30"/>
           <p:cNvSpPr/>
           <p:nvPr/>
         </p:nvSpPr>
@@ -32160,7 +33374,7 @@
       </p:sp>
       <p:sp>
         <p:nvSpPr>
-          <p:cNvPr id="29" name="Text 27"/>
+          <p:cNvPr id="33" name="Text 31"/>
           <p:cNvSpPr/>
           <p:nvPr/>
         </p:nvSpPr>
@@ -32199,7 +33413,7 @@
       </p:sp>
       <p:sp>
         <p:nvSpPr>
-          <p:cNvPr id="30" name="Shape 28"/>
+          <p:cNvPr id="34" name="Shape 32"/>
           <p:cNvSpPr/>
           <p:nvPr/>
         </p:nvSpPr>
@@ -32226,7 +33440,7 @@
       </p:sp>
       <p:sp>
         <p:nvSpPr>
-          <p:cNvPr id="31" name="Text 29"/>
+          <p:cNvPr id="35" name="Text 33"/>
           <p:cNvSpPr/>
           <p:nvPr/>
         </p:nvSpPr>
@@ -32265,7 +33479,7 @@
       </p:sp>
       <p:sp>
         <p:nvSpPr>
-          <p:cNvPr id="32" name="Shape 30"/>
+          <p:cNvPr id="36" name="Shape 34"/>
           <p:cNvSpPr/>
           <p:nvPr/>
         </p:nvSpPr>
@@ -32292,7 +33506,7 @@
       </p:sp>
       <p:sp>
         <p:nvSpPr>
-          <p:cNvPr id="33" name="Text 31"/>
+          <p:cNvPr id="37" name="Text 35"/>
           <p:cNvSpPr/>
           <p:nvPr/>
         </p:nvSpPr>
@@ -32615,7 +33829,7 @@
                 <a:ea typeface="Calibri" pitchFamily="34" charset="-122"/>
                 <a:cs typeface="Calibri" pitchFamily="34" charset="-120"/>
               </a:rPr>
-              <a:t>Word Labs  •  wordlabs.app  •  Root: 'educate' = to lead out knowledge</a:t>
+              <a:t>Word Labs  •  wordlabs.app  •  Root: 'educate' = to lead out, teach</a:t>
             </a:r>
             <a:endParaRPr lang="en-US" sz="800" dirty="0"/>
           </a:p>
@@ -32834,8 +34048,8 @@
         </p:nvSpPr>
         <p:spPr>
           <a:xfrm>
-            <a:off x="2221992" y="2258568"/>
-            <a:ext cx="1828800" cy="292608"/>
+            <a:off x="1989734" y="2258568"/>
+            <a:ext cx="1581912" cy="292608"/>
           </a:xfrm>
           <a:prstGeom prst="rect">
             <a:avLst>
@@ -32868,8 +34082,8 @@
         </p:nvSpPr>
         <p:spPr>
           <a:xfrm>
-            <a:off x="2221992" y="2258568"/>
-            <a:ext cx="1828800" cy="292608"/>
+            <a:off x="1989734" y="2258568"/>
+            <a:ext cx="1581912" cy="292608"/>
           </a:xfrm>
           <a:prstGeom prst="rect">
             <a:avLst/>
@@ -32907,8 +34121,8 @@
         </p:nvSpPr>
         <p:spPr>
           <a:xfrm>
-            <a:off x="2221992" y="2569464"/>
-            <a:ext cx="1828800" cy="201168"/>
+            <a:off x="1989734" y="2569464"/>
+            <a:ext cx="1581912" cy="201168"/>
           </a:xfrm>
           <a:prstGeom prst="rect">
             <a:avLst/>
@@ -32932,7 +34146,7 @@
                 <a:ea typeface="Calibri" pitchFamily="34" charset="-122"/>
                 <a:cs typeface="Calibri" pitchFamily="34" charset="-120"/>
               </a:rPr>
-              <a:t>to lead out knowledge</a:t>
+              <a:t>to lead out, teach</a:t>
             </a:r>
             <a:endParaRPr lang="en-US" sz="850" dirty="0"/>
           </a:p>
@@ -32946,8 +34160,8 @@
         </p:nvSpPr>
         <p:spPr>
           <a:xfrm>
-            <a:off x="2221992" y="2752344"/>
-            <a:ext cx="1828800" cy="182880"/>
+            <a:off x="1989734" y="2752344"/>
+            <a:ext cx="1581912" cy="182880"/>
           </a:xfrm>
           <a:prstGeom prst="rect">
             <a:avLst/>
@@ -32985,8 +34199,8 @@
         </p:nvSpPr>
         <p:spPr>
           <a:xfrm>
-            <a:off x="4370832" y="2258568"/>
-            <a:ext cx="1828800" cy="292608"/>
+            <a:off x="3659429" y="2258568"/>
+            <a:ext cx="1581912" cy="292608"/>
           </a:xfrm>
           <a:prstGeom prst="rect">
             <a:avLst>
@@ -33019,8 +34233,8 @@
         </p:nvSpPr>
         <p:spPr>
           <a:xfrm>
-            <a:off x="4370832" y="2258568"/>
-            <a:ext cx="1828800" cy="292608"/>
+            <a:off x="3659429" y="2258568"/>
+            <a:ext cx="1581912" cy="292608"/>
           </a:xfrm>
           <a:prstGeom prst="rect">
             <a:avLst/>
@@ -33044,7 +34258,7 @@
                 <a:ea typeface="Trebuchet MS" pitchFamily="34" charset="-122"/>
                 <a:cs typeface="Trebuchet MS" pitchFamily="34" charset="-120"/>
               </a:rPr>
-              <a:t>ion</a:t>
+              <a:t>a</a:t>
             </a:r>
             <a:endParaRPr lang="en-US" sz="1300" dirty="0"/>
           </a:p>
@@ -33058,8 +34272,8 @@
         </p:nvSpPr>
         <p:spPr>
           <a:xfrm>
-            <a:off x="4370832" y="2569464"/>
-            <a:ext cx="1828800" cy="201168"/>
+            <a:off x="3659429" y="2569464"/>
+            <a:ext cx="1581912" cy="201168"/>
           </a:xfrm>
           <a:prstGeom prst="rect">
             <a:avLst/>
@@ -33083,7 +34297,7 @@
                 <a:ea typeface="Calibri" pitchFamily="34" charset="-122"/>
                 <a:cs typeface="Calibri" pitchFamily="34" charset="-120"/>
               </a:rPr>
-              <a:t>act or process of</a:t>
+              <a:t>connecting vowel</a:t>
             </a:r>
             <a:endParaRPr lang="en-US" sz="850" dirty="0"/>
           </a:p>
@@ -33091,14 +34305,53 @@
       </p:sp>
       <p:sp>
         <p:nvSpPr>
-          <p:cNvPr id="23" name="Shape 21"/>
-          <p:cNvSpPr/>
-          <p:nvPr/>
-        </p:nvSpPr>
-        <p:spPr>
-          <a:xfrm>
-            <a:off x="6519672" y="2258568"/>
-            <a:ext cx="1828800" cy="292608"/>
+          <p:cNvPr id="23" name="Text 21"/>
+          <p:cNvSpPr/>
+          <p:nvPr/>
+        </p:nvSpPr>
+        <p:spPr>
+          <a:xfrm>
+            <a:off x="3659429" y="2752344"/>
+            <a:ext cx="1581912" cy="182880"/>
+          </a:xfrm>
+          <a:prstGeom prst="rect">
+            <a:avLst/>
+          </a:prstGeom>
+          <a:noFill/>
+          <a:ln/>
+        </p:spPr>
+        <p:txBody>
+          <a:bodyPr wrap="square" lIns="0" tIns="0" rIns="0" bIns="0" rtlCol="0" anchor="t"/>
+          <a:lstStyle/>
+          <a:p>
+            <a:pPr algn="ctr" indent="0" marL="0">
+              <a:buNone/>
+            </a:pPr>
+            <a:r>
+              <a:rPr lang="en-US" sz="700" i="1" dirty="0">
+                <a:solidFill>
+                  <a:srgbClr val="94A3B8"/>
+                </a:solidFill>
+                <a:latin typeface="Calibri" pitchFamily="34" charset="0"/>
+                <a:ea typeface="Calibri" pitchFamily="34" charset="-122"/>
+                <a:cs typeface="Calibri" pitchFamily="34" charset="-120"/>
+              </a:rPr>
+              <a:t>links base to suffix</a:t>
+            </a:r>
+            <a:endParaRPr lang="en-US" sz="700" dirty="0"/>
+          </a:p>
+        </p:txBody>
+      </p:sp>
+      <p:sp>
+        <p:nvSpPr>
+          <p:cNvPr id="24" name="Shape 22"/>
+          <p:cNvSpPr/>
+          <p:nvPr/>
+        </p:nvSpPr>
+        <p:spPr>
+          <a:xfrm>
+            <a:off x="5329123" y="2258568"/>
+            <a:ext cx="1581912" cy="292608"/>
           </a:xfrm>
           <a:prstGeom prst="rect">
             <a:avLst>
@@ -33125,14 +34378,14 @@
       </p:sp>
       <p:sp>
         <p:nvSpPr>
-          <p:cNvPr id="24" name="Text 22"/>
-          <p:cNvSpPr/>
-          <p:nvPr/>
-        </p:nvSpPr>
-        <p:spPr>
-          <a:xfrm>
-            <a:off x="6519672" y="2258568"/>
-            <a:ext cx="1828800" cy="292608"/>
+          <p:cNvPr id="25" name="Text 23"/>
+          <p:cNvSpPr/>
+          <p:nvPr/>
+        </p:nvSpPr>
+        <p:spPr>
+          <a:xfrm>
+            <a:off x="5329123" y="2258568"/>
+            <a:ext cx="1581912" cy="292608"/>
           </a:xfrm>
           <a:prstGeom prst="rect">
             <a:avLst/>
@@ -33156,7 +34409,7 @@
                 <a:ea typeface="Trebuchet MS" pitchFamily="34" charset="-122"/>
                 <a:cs typeface="Trebuchet MS" pitchFamily="34" charset="-120"/>
               </a:rPr>
-              <a:t>al</a:t>
+              <a:t>tion</a:t>
             </a:r>
             <a:endParaRPr lang="en-US" sz="1300" dirty="0"/>
           </a:p>
@@ -33164,14 +34417,14 @@
       </p:sp>
       <p:sp>
         <p:nvSpPr>
-          <p:cNvPr id="25" name="Text 23"/>
-          <p:cNvSpPr/>
-          <p:nvPr/>
-        </p:nvSpPr>
-        <p:spPr>
-          <a:xfrm>
-            <a:off x="6519672" y="2569464"/>
-            <a:ext cx="1828800" cy="201168"/>
+          <p:cNvPr id="26" name="Text 24"/>
+          <p:cNvSpPr/>
+          <p:nvPr/>
+        </p:nvSpPr>
+        <p:spPr>
+          <a:xfrm>
+            <a:off x="5329123" y="2569464"/>
+            <a:ext cx="1581912" cy="201168"/>
           </a:xfrm>
           <a:prstGeom prst="rect">
             <a:avLst/>
@@ -33195,6 +34448,118 @@
                 <a:ea typeface="Calibri" pitchFamily="34" charset="-122"/>
                 <a:cs typeface="Calibri" pitchFamily="34" charset="-120"/>
               </a:rPr>
+              <a:t>act or process of</a:t>
+            </a:r>
+            <a:endParaRPr lang="en-US" sz="850" dirty="0"/>
+          </a:p>
+        </p:txBody>
+      </p:sp>
+      <p:sp>
+        <p:nvSpPr>
+          <p:cNvPr id="27" name="Shape 25"/>
+          <p:cNvSpPr/>
+          <p:nvPr/>
+        </p:nvSpPr>
+        <p:spPr>
+          <a:xfrm>
+            <a:off x="6998818" y="2258568"/>
+            <a:ext cx="1581912" cy="292608"/>
+          </a:xfrm>
+          <a:prstGeom prst="rect">
+            <a:avLst>
+              <a:gd name="adj" fmla="val 25000"/>
+            </a:avLst>
+          </a:prstGeom>
+          <a:solidFill>
+            <a:srgbClr val="FCE7F3"/>
+          </a:solidFill>
+          <a:ln w="19050">
+            <a:solidFill>
+              <a:srgbClr val="DB2777"/>
+            </a:solidFill>
+            <a:prstDash val="solid"/>
+          </a:ln>
+          <a:effectLst>
+            <a:outerShdw sx="100000" sy="100000" kx="0" ky="0" algn="bl" rotWithShape="0" blurRad="101600" dist="38100" dir="8100000">
+              <a:srgbClr val="000000">
+                <a:alpha val="12000"/>
+              </a:srgbClr>
+            </a:outerShdw>
+          </a:effectLst>
+        </p:spPr>
+      </p:sp>
+      <p:sp>
+        <p:nvSpPr>
+          <p:cNvPr id="28" name="Text 26"/>
+          <p:cNvSpPr/>
+          <p:nvPr/>
+        </p:nvSpPr>
+        <p:spPr>
+          <a:xfrm>
+            <a:off x="6998818" y="2258568"/>
+            <a:ext cx="1581912" cy="292608"/>
+          </a:xfrm>
+          <a:prstGeom prst="rect">
+            <a:avLst/>
+          </a:prstGeom>
+          <a:noFill/>
+          <a:ln/>
+        </p:spPr>
+        <p:txBody>
+          <a:bodyPr wrap="square" lIns="0" tIns="0" rIns="0" bIns="0" rtlCol="0" anchor="ctr"/>
+          <a:lstStyle/>
+          <a:p>
+            <a:pPr algn="ctr" indent="0" marL="0">
+              <a:buNone/>
+            </a:pPr>
+            <a:r>
+              <a:rPr lang="en-US" sz="1300" b="1" dirty="0">
+                <a:solidFill>
+                  <a:srgbClr val="9D174D"/>
+                </a:solidFill>
+                <a:latin typeface="Trebuchet MS" pitchFamily="34" charset="0"/>
+                <a:ea typeface="Trebuchet MS" pitchFamily="34" charset="-122"/>
+                <a:cs typeface="Trebuchet MS" pitchFamily="34" charset="-120"/>
+              </a:rPr>
+              <a:t>al</a:t>
+            </a:r>
+            <a:endParaRPr lang="en-US" sz="1300" dirty="0"/>
+          </a:p>
+        </p:txBody>
+      </p:sp>
+      <p:sp>
+        <p:nvSpPr>
+          <p:cNvPr id="29" name="Text 27"/>
+          <p:cNvSpPr/>
+          <p:nvPr/>
+        </p:nvSpPr>
+        <p:spPr>
+          <a:xfrm>
+            <a:off x="6998818" y="2569464"/>
+            <a:ext cx="1581912" cy="201168"/>
+          </a:xfrm>
+          <a:prstGeom prst="rect">
+            <a:avLst/>
+          </a:prstGeom>
+          <a:noFill/>
+          <a:ln/>
+        </p:spPr>
+        <p:txBody>
+          <a:bodyPr wrap="square" lIns="0" tIns="0" rIns="0" bIns="0" rtlCol="0" anchor="t"/>
+          <a:lstStyle/>
+          <a:p>
+            <a:pPr algn="ctr" indent="0" marL="0">
+              <a:buNone/>
+            </a:pPr>
+            <a:r>
+              <a:rPr lang="en-US" sz="850" dirty="0">
+                <a:solidFill>
+                  <a:srgbClr val="475569"/>
+                </a:solidFill>
+                <a:latin typeface="Calibri" pitchFamily="34" charset="0"/>
+                <a:ea typeface="Calibri" pitchFamily="34" charset="-122"/>
+                <a:cs typeface="Calibri" pitchFamily="34" charset="-120"/>
+              </a:rPr>
               <a:t>relating to</a:t>
             </a:r>
             <a:endParaRPr lang="en-US" sz="850" dirty="0"/>
@@ -33203,7 +34568,7 @@
       </p:sp>
       <p:sp>
         <p:nvSpPr>
-          <p:cNvPr id="26" name="Shape 24"/>
+          <p:cNvPr id="30" name="Shape 28"/>
           <p:cNvSpPr/>
           <p:nvPr/>
         </p:nvSpPr>
@@ -33230,7 +34595,7 @@
       </p:sp>
       <p:sp>
         <p:nvSpPr>
-          <p:cNvPr id="27" name="Text 25"/>
+          <p:cNvPr id="31" name="Text 29"/>
           <p:cNvSpPr/>
           <p:nvPr/>
         </p:nvSpPr>
@@ -33269,7 +34634,7 @@
       </p:sp>
       <p:sp>
         <p:nvSpPr>
-          <p:cNvPr id="28" name="Shape 26"/>
+          <p:cNvPr id="32" name="Shape 30"/>
           <p:cNvSpPr/>
           <p:nvPr/>
         </p:nvSpPr>
@@ -33296,7 +34661,7 @@
       </p:sp>
       <p:sp>
         <p:nvSpPr>
-          <p:cNvPr id="29" name="Shape 27"/>
+          <p:cNvPr id="33" name="Shape 31"/>
           <p:cNvSpPr/>
           <p:nvPr/>
         </p:nvSpPr>
@@ -33323,7 +34688,7 @@
       </p:sp>
       <p:sp>
         <p:nvSpPr>
-          <p:cNvPr id="30" name="Text 28"/>
+          <p:cNvPr id="34" name="Text 32"/>
           <p:cNvSpPr/>
           <p:nvPr/>
         </p:nvSpPr>
@@ -33362,7 +34727,7 @@
       </p:sp>
       <p:sp>
         <p:nvSpPr>
-          <p:cNvPr id="31" name="Text 29"/>
+          <p:cNvPr id="35" name="Text 33"/>
           <p:cNvSpPr/>
           <p:nvPr/>
         </p:nvSpPr>
@@ -33401,7 +34766,7 @@
       </p:sp>
       <p:sp>
         <p:nvSpPr>
-          <p:cNvPr id="32" name="Shape 30"/>
+          <p:cNvPr id="36" name="Shape 34"/>
           <p:cNvSpPr/>
           <p:nvPr/>
         </p:nvSpPr>
@@ -33428,7 +34793,7 @@
       </p:sp>
       <p:sp>
         <p:nvSpPr>
-          <p:cNvPr id="33" name="Text 31"/>
+          <p:cNvPr id="37" name="Text 35"/>
           <p:cNvSpPr/>
           <p:nvPr/>
         </p:nvSpPr>
@@ -33467,7 +34832,7 @@
       </p:sp>
       <p:sp>
         <p:nvSpPr>
-          <p:cNvPr id="34" name="Text 32"/>
+          <p:cNvPr id="38" name="Text 36"/>
           <p:cNvSpPr/>
           <p:nvPr/>
         </p:nvSpPr>
@@ -33506,7 +34871,7 @@
       </p:sp>
       <p:sp>
         <p:nvSpPr>
-          <p:cNvPr id="35" name="Shape 33"/>
+          <p:cNvPr id="39" name="Shape 37"/>
           <p:cNvSpPr/>
           <p:nvPr/>
         </p:nvSpPr>
@@ -33533,7 +34898,7 @@
       </p:sp>
       <p:sp>
         <p:nvSpPr>
-          <p:cNvPr id="36" name="Text 34"/>
+          <p:cNvPr id="40" name="Text 38"/>
           <p:cNvSpPr/>
           <p:nvPr/>
         </p:nvSpPr>
@@ -33572,7 +34937,7 @@
       </p:sp>
       <p:sp>
         <p:nvSpPr>
-          <p:cNvPr id="37" name="Text 35"/>
+          <p:cNvPr id="41" name="Text 39"/>
           <p:cNvSpPr/>
           <p:nvPr/>
         </p:nvSpPr>
@@ -33611,7 +34976,7 @@
       </p:sp>
       <p:sp>
         <p:nvSpPr>
-          <p:cNvPr id="38" name="Shape 36"/>
+          <p:cNvPr id="42" name="Shape 40"/>
           <p:cNvSpPr/>
           <p:nvPr/>
         </p:nvSpPr>
@@ -33638,7 +35003,7 @@
       </p:sp>
       <p:sp>
         <p:nvSpPr>
-          <p:cNvPr id="39" name="Text 37"/>
+          <p:cNvPr id="43" name="Text 41"/>
           <p:cNvSpPr/>
           <p:nvPr/>
         </p:nvSpPr>
@@ -33677,7 +35042,7 @@
       </p:sp>
       <p:sp>
         <p:nvSpPr>
-          <p:cNvPr id="40" name="Text 38"/>
+          <p:cNvPr id="44" name="Text 42"/>
           <p:cNvSpPr/>
           <p:nvPr/>
         </p:nvSpPr>
@@ -33716,7 +35081,7 @@
       </p:sp>
       <p:sp>
         <p:nvSpPr>
-          <p:cNvPr id="41" name="Shape 39"/>
+          <p:cNvPr id="45" name="Shape 43"/>
           <p:cNvSpPr/>
           <p:nvPr/>
         </p:nvSpPr>
@@ -33743,7 +35108,7 @@
       </p:sp>
       <p:sp>
         <p:nvSpPr>
-          <p:cNvPr id="42" name="Text 40"/>
+          <p:cNvPr id="46" name="Text 44"/>
           <p:cNvSpPr/>
           <p:nvPr/>
         </p:nvSpPr>
@@ -33782,7 +35147,7 @@
       </p:sp>
       <p:sp>
         <p:nvSpPr>
-          <p:cNvPr id="43" name="Shape 41"/>
+          <p:cNvPr id="47" name="Shape 45"/>
           <p:cNvSpPr/>
           <p:nvPr/>
         </p:nvSpPr>
@@ -33809,7 +35174,7 @@
       </p:sp>
       <p:sp>
         <p:nvSpPr>
-          <p:cNvPr id="44" name="Text 42"/>
+          <p:cNvPr id="48" name="Text 46"/>
           <p:cNvSpPr/>
           <p:nvPr/>
         </p:nvSpPr>
@@ -33848,7 +35213,7 @@
       </p:sp>
       <p:sp>
         <p:nvSpPr>
-          <p:cNvPr id="45" name="Shape 43"/>
+          <p:cNvPr id="49" name="Shape 47"/>
           <p:cNvSpPr/>
           <p:nvPr/>
         </p:nvSpPr>
@@ -33875,7 +35240,7 @@
       </p:sp>
       <p:sp>
         <p:nvSpPr>
-          <p:cNvPr id="46" name="Text 44"/>
+          <p:cNvPr id="50" name="Text 48"/>
           <p:cNvSpPr/>
           <p:nvPr/>
         </p:nvSpPr>
@@ -34198,7 +35563,7 @@
                 <a:ea typeface="Calibri" pitchFamily="34" charset="-122"/>
                 <a:cs typeface="Calibri" pitchFamily="34" charset="-120"/>
               </a:rPr>
-              <a:t>Word Labs  •  wordlabs.app  •  Root: 'educate' = to lead out knowledge</a:t>
+              <a:t>Word Labs  •  wordlabs.app  •  Root: 'educate' = to lead out, teach</a:t>
             </a:r>
             <a:endParaRPr lang="en-US" sz="800" dirty="0"/>
           </a:p>
@@ -34417,8 +35782,8 @@
         </p:nvSpPr>
         <p:spPr>
           <a:xfrm>
-            <a:off x="2221992" y="2258568"/>
-            <a:ext cx="1828800" cy="292608"/>
+            <a:off x="1989734" y="2258568"/>
+            <a:ext cx="1581912" cy="292608"/>
           </a:xfrm>
           <a:prstGeom prst="rect">
             <a:avLst>
@@ -34451,8 +35816,8 @@
         </p:nvSpPr>
         <p:spPr>
           <a:xfrm>
-            <a:off x="2221992" y="2258568"/>
-            <a:ext cx="1828800" cy="292608"/>
+            <a:off x="1989734" y="2258568"/>
+            <a:ext cx="1581912" cy="292608"/>
           </a:xfrm>
           <a:prstGeom prst="rect">
             <a:avLst/>
@@ -34490,8 +35855,8 @@
         </p:nvSpPr>
         <p:spPr>
           <a:xfrm>
-            <a:off x="2221992" y="2569464"/>
-            <a:ext cx="1828800" cy="201168"/>
+            <a:off x="1989734" y="2569464"/>
+            <a:ext cx="1581912" cy="201168"/>
           </a:xfrm>
           <a:prstGeom prst="rect">
             <a:avLst/>
@@ -34515,7 +35880,7 @@
                 <a:ea typeface="Calibri" pitchFamily="34" charset="-122"/>
                 <a:cs typeface="Calibri" pitchFamily="34" charset="-120"/>
               </a:rPr>
-              <a:t>to lead out knowledge</a:t>
+              <a:t>to lead out, teach</a:t>
             </a:r>
             <a:endParaRPr lang="en-US" sz="850" dirty="0"/>
           </a:p>
@@ -34529,8 +35894,8 @@
         </p:nvSpPr>
         <p:spPr>
           <a:xfrm>
-            <a:off x="2221992" y="2752344"/>
-            <a:ext cx="1828800" cy="182880"/>
+            <a:off x="1989734" y="2752344"/>
+            <a:ext cx="1581912" cy="182880"/>
           </a:xfrm>
           <a:prstGeom prst="rect">
             <a:avLst/>
@@ -34568,8 +35933,8 @@
         </p:nvSpPr>
         <p:spPr>
           <a:xfrm>
-            <a:off x="4370832" y="2258568"/>
-            <a:ext cx="1828800" cy="292608"/>
+            <a:off x="3659429" y="2258568"/>
+            <a:ext cx="1581912" cy="292608"/>
           </a:xfrm>
           <a:prstGeom prst="rect">
             <a:avLst>
@@ -34602,8 +35967,8 @@
         </p:nvSpPr>
         <p:spPr>
           <a:xfrm>
-            <a:off x="4370832" y="2258568"/>
-            <a:ext cx="1828800" cy="292608"/>
+            <a:off x="3659429" y="2258568"/>
+            <a:ext cx="1581912" cy="292608"/>
           </a:xfrm>
           <a:prstGeom prst="rect">
             <a:avLst/>
@@ -34627,7 +35992,7 @@
                 <a:ea typeface="Trebuchet MS" pitchFamily="34" charset="-122"/>
                 <a:cs typeface="Trebuchet MS" pitchFamily="34" charset="-120"/>
               </a:rPr>
-              <a:t>ion</a:t>
+              <a:t>a</a:t>
             </a:r>
             <a:endParaRPr lang="en-US" sz="1300" dirty="0"/>
           </a:p>
@@ -34641,8 +36006,8 @@
         </p:nvSpPr>
         <p:spPr>
           <a:xfrm>
-            <a:off x="4370832" y="2569464"/>
-            <a:ext cx="1828800" cy="201168"/>
+            <a:off x="3659429" y="2569464"/>
+            <a:ext cx="1581912" cy="201168"/>
           </a:xfrm>
           <a:prstGeom prst="rect">
             <a:avLst/>
@@ -34666,7 +36031,7 @@
                 <a:ea typeface="Calibri" pitchFamily="34" charset="-122"/>
                 <a:cs typeface="Calibri" pitchFamily="34" charset="-120"/>
               </a:rPr>
-              <a:t>act or process of</a:t>
+              <a:t>connecting vowel</a:t>
             </a:r>
             <a:endParaRPr lang="en-US" sz="850" dirty="0"/>
           </a:p>
@@ -34674,14 +36039,53 @@
       </p:sp>
       <p:sp>
         <p:nvSpPr>
-          <p:cNvPr id="23" name="Shape 21"/>
-          <p:cNvSpPr/>
-          <p:nvPr/>
-        </p:nvSpPr>
-        <p:spPr>
-          <a:xfrm>
-            <a:off x="6519672" y="2258568"/>
-            <a:ext cx="1828800" cy="292608"/>
+          <p:cNvPr id="23" name="Text 21"/>
+          <p:cNvSpPr/>
+          <p:nvPr/>
+        </p:nvSpPr>
+        <p:spPr>
+          <a:xfrm>
+            <a:off x="3659429" y="2752344"/>
+            <a:ext cx="1581912" cy="182880"/>
+          </a:xfrm>
+          <a:prstGeom prst="rect">
+            <a:avLst/>
+          </a:prstGeom>
+          <a:noFill/>
+          <a:ln/>
+        </p:spPr>
+        <p:txBody>
+          <a:bodyPr wrap="square" lIns="0" tIns="0" rIns="0" bIns="0" rtlCol="0" anchor="t"/>
+          <a:lstStyle/>
+          <a:p>
+            <a:pPr algn="ctr" indent="0" marL="0">
+              <a:buNone/>
+            </a:pPr>
+            <a:r>
+              <a:rPr lang="en-US" sz="700" i="1" dirty="0">
+                <a:solidFill>
+                  <a:srgbClr val="94A3B8"/>
+                </a:solidFill>
+                <a:latin typeface="Calibri" pitchFamily="34" charset="0"/>
+                <a:ea typeface="Calibri" pitchFamily="34" charset="-122"/>
+                <a:cs typeface="Calibri" pitchFamily="34" charset="-120"/>
+              </a:rPr>
+              <a:t>links base to suffix</a:t>
+            </a:r>
+            <a:endParaRPr lang="en-US" sz="700" dirty="0"/>
+          </a:p>
+        </p:txBody>
+      </p:sp>
+      <p:sp>
+        <p:nvSpPr>
+          <p:cNvPr id="24" name="Shape 22"/>
+          <p:cNvSpPr/>
+          <p:nvPr/>
+        </p:nvSpPr>
+        <p:spPr>
+          <a:xfrm>
+            <a:off x="5329123" y="2258568"/>
+            <a:ext cx="1581912" cy="292608"/>
           </a:xfrm>
           <a:prstGeom prst="rect">
             <a:avLst>
@@ -34708,14 +36112,14 @@
       </p:sp>
       <p:sp>
         <p:nvSpPr>
-          <p:cNvPr id="24" name="Text 22"/>
-          <p:cNvSpPr/>
-          <p:nvPr/>
-        </p:nvSpPr>
-        <p:spPr>
-          <a:xfrm>
-            <a:off x="6519672" y="2258568"/>
-            <a:ext cx="1828800" cy="292608"/>
+          <p:cNvPr id="25" name="Text 23"/>
+          <p:cNvSpPr/>
+          <p:nvPr/>
+        </p:nvSpPr>
+        <p:spPr>
+          <a:xfrm>
+            <a:off x="5329123" y="2258568"/>
+            <a:ext cx="1581912" cy="292608"/>
           </a:xfrm>
           <a:prstGeom prst="rect">
             <a:avLst/>
@@ -34739,7 +36143,7 @@
                 <a:ea typeface="Trebuchet MS" pitchFamily="34" charset="-122"/>
                 <a:cs typeface="Trebuchet MS" pitchFamily="34" charset="-120"/>
               </a:rPr>
-              <a:t>al</a:t>
+              <a:t>tion</a:t>
             </a:r>
             <a:endParaRPr lang="en-US" sz="1300" dirty="0"/>
           </a:p>
@@ -34747,14 +36151,14 @@
       </p:sp>
       <p:sp>
         <p:nvSpPr>
-          <p:cNvPr id="25" name="Text 23"/>
-          <p:cNvSpPr/>
-          <p:nvPr/>
-        </p:nvSpPr>
-        <p:spPr>
-          <a:xfrm>
-            <a:off x="6519672" y="2569464"/>
-            <a:ext cx="1828800" cy="201168"/>
+          <p:cNvPr id="26" name="Text 24"/>
+          <p:cNvSpPr/>
+          <p:nvPr/>
+        </p:nvSpPr>
+        <p:spPr>
+          <a:xfrm>
+            <a:off x="5329123" y="2569464"/>
+            <a:ext cx="1581912" cy="201168"/>
           </a:xfrm>
           <a:prstGeom prst="rect">
             <a:avLst/>
@@ -34778,6 +36182,118 @@
                 <a:ea typeface="Calibri" pitchFamily="34" charset="-122"/>
                 <a:cs typeface="Calibri" pitchFamily="34" charset="-120"/>
               </a:rPr>
+              <a:t>act or process of</a:t>
+            </a:r>
+            <a:endParaRPr lang="en-US" sz="850" dirty="0"/>
+          </a:p>
+        </p:txBody>
+      </p:sp>
+      <p:sp>
+        <p:nvSpPr>
+          <p:cNvPr id="27" name="Shape 25"/>
+          <p:cNvSpPr/>
+          <p:nvPr/>
+        </p:nvSpPr>
+        <p:spPr>
+          <a:xfrm>
+            <a:off x="6998818" y="2258568"/>
+            <a:ext cx="1581912" cy="292608"/>
+          </a:xfrm>
+          <a:prstGeom prst="rect">
+            <a:avLst>
+              <a:gd name="adj" fmla="val 25000"/>
+            </a:avLst>
+          </a:prstGeom>
+          <a:solidFill>
+            <a:srgbClr val="FCE7F3"/>
+          </a:solidFill>
+          <a:ln w="19050">
+            <a:solidFill>
+              <a:srgbClr val="DB2777"/>
+            </a:solidFill>
+            <a:prstDash val="solid"/>
+          </a:ln>
+          <a:effectLst>
+            <a:outerShdw sx="100000" sy="100000" kx="0" ky="0" algn="bl" rotWithShape="0" blurRad="101600" dist="38100" dir="8100000">
+              <a:srgbClr val="000000">
+                <a:alpha val="12000"/>
+              </a:srgbClr>
+            </a:outerShdw>
+          </a:effectLst>
+        </p:spPr>
+      </p:sp>
+      <p:sp>
+        <p:nvSpPr>
+          <p:cNvPr id="28" name="Text 26"/>
+          <p:cNvSpPr/>
+          <p:nvPr/>
+        </p:nvSpPr>
+        <p:spPr>
+          <a:xfrm>
+            <a:off x="6998818" y="2258568"/>
+            <a:ext cx="1581912" cy="292608"/>
+          </a:xfrm>
+          <a:prstGeom prst="rect">
+            <a:avLst/>
+          </a:prstGeom>
+          <a:noFill/>
+          <a:ln/>
+        </p:spPr>
+        <p:txBody>
+          <a:bodyPr wrap="square" lIns="0" tIns="0" rIns="0" bIns="0" rtlCol="0" anchor="ctr"/>
+          <a:lstStyle/>
+          <a:p>
+            <a:pPr algn="ctr" indent="0" marL="0">
+              <a:buNone/>
+            </a:pPr>
+            <a:r>
+              <a:rPr lang="en-US" sz="1300" b="1" dirty="0">
+                <a:solidFill>
+                  <a:srgbClr val="9D174D"/>
+                </a:solidFill>
+                <a:latin typeface="Trebuchet MS" pitchFamily="34" charset="0"/>
+                <a:ea typeface="Trebuchet MS" pitchFamily="34" charset="-122"/>
+                <a:cs typeface="Trebuchet MS" pitchFamily="34" charset="-120"/>
+              </a:rPr>
+              <a:t>al</a:t>
+            </a:r>
+            <a:endParaRPr lang="en-US" sz="1300" dirty="0"/>
+          </a:p>
+        </p:txBody>
+      </p:sp>
+      <p:sp>
+        <p:nvSpPr>
+          <p:cNvPr id="29" name="Text 27"/>
+          <p:cNvSpPr/>
+          <p:nvPr/>
+        </p:nvSpPr>
+        <p:spPr>
+          <a:xfrm>
+            <a:off x="6998818" y="2569464"/>
+            <a:ext cx="1581912" cy="201168"/>
+          </a:xfrm>
+          <a:prstGeom prst="rect">
+            <a:avLst/>
+          </a:prstGeom>
+          <a:noFill/>
+          <a:ln/>
+        </p:spPr>
+        <p:txBody>
+          <a:bodyPr wrap="square" lIns="0" tIns="0" rIns="0" bIns="0" rtlCol="0" anchor="t"/>
+          <a:lstStyle/>
+          <a:p>
+            <a:pPr algn="ctr" indent="0" marL="0">
+              <a:buNone/>
+            </a:pPr>
+            <a:r>
+              <a:rPr lang="en-US" sz="850" dirty="0">
+                <a:solidFill>
+                  <a:srgbClr val="475569"/>
+                </a:solidFill>
+                <a:latin typeface="Calibri" pitchFamily="34" charset="0"/>
+                <a:ea typeface="Calibri" pitchFamily="34" charset="-122"/>
+                <a:cs typeface="Calibri" pitchFamily="34" charset="-120"/>
+              </a:rPr>
               <a:t>relating to</a:t>
             </a:r>
             <a:endParaRPr lang="en-US" sz="850" dirty="0"/>
@@ -34786,7 +36302,7 @@
       </p:sp>
       <p:sp>
         <p:nvSpPr>
-          <p:cNvPr id="26" name="Shape 24"/>
+          <p:cNvPr id="30" name="Shape 28"/>
           <p:cNvSpPr/>
           <p:nvPr/>
         </p:nvSpPr>
@@ -34813,7 +36329,7 @@
       </p:sp>
       <p:sp>
         <p:nvSpPr>
-          <p:cNvPr id="27" name="Text 25"/>
+          <p:cNvPr id="31" name="Text 29"/>
           <p:cNvSpPr/>
           <p:nvPr/>
         </p:nvSpPr>
@@ -34852,7 +36368,7 @@
       </p:sp>
       <p:sp>
         <p:nvSpPr>
-          <p:cNvPr id="28" name="Shape 26"/>
+          <p:cNvPr id="32" name="Shape 30"/>
           <p:cNvSpPr/>
           <p:nvPr/>
         </p:nvSpPr>
@@ -34879,7 +36395,7 @@
       </p:sp>
       <p:sp>
         <p:nvSpPr>
-          <p:cNvPr id="29" name="Shape 27"/>
+          <p:cNvPr id="33" name="Shape 31"/>
           <p:cNvSpPr/>
           <p:nvPr/>
         </p:nvSpPr>
@@ -34906,7 +36422,7 @@
       </p:sp>
       <p:sp>
         <p:nvSpPr>
-          <p:cNvPr id="30" name="Text 28"/>
+          <p:cNvPr id="34" name="Text 32"/>
           <p:cNvSpPr/>
           <p:nvPr/>
         </p:nvSpPr>
@@ -34945,7 +36461,7 @@
       </p:sp>
       <p:sp>
         <p:nvSpPr>
-          <p:cNvPr id="31" name="Text 29"/>
+          <p:cNvPr id="35" name="Text 33"/>
           <p:cNvSpPr/>
           <p:nvPr/>
         </p:nvSpPr>
@@ -34984,7 +36500,7 @@
       </p:sp>
       <p:sp>
         <p:nvSpPr>
-          <p:cNvPr id="32" name="Shape 30"/>
+          <p:cNvPr id="36" name="Shape 34"/>
           <p:cNvSpPr/>
           <p:nvPr/>
         </p:nvSpPr>
@@ -35011,7 +36527,7 @@
       </p:sp>
       <p:sp>
         <p:nvSpPr>
-          <p:cNvPr id="33" name="Text 31"/>
+          <p:cNvPr id="37" name="Text 35"/>
           <p:cNvSpPr/>
           <p:nvPr/>
         </p:nvSpPr>
@@ -35050,7 +36566,7 @@
       </p:sp>
       <p:sp>
         <p:nvSpPr>
-          <p:cNvPr id="34" name="Text 32"/>
+          <p:cNvPr id="38" name="Text 36"/>
           <p:cNvSpPr/>
           <p:nvPr/>
         </p:nvSpPr>
@@ -35089,7 +36605,7 @@
       </p:sp>
       <p:sp>
         <p:nvSpPr>
-          <p:cNvPr id="35" name="Shape 33"/>
+          <p:cNvPr id="39" name="Shape 37"/>
           <p:cNvSpPr/>
           <p:nvPr/>
         </p:nvSpPr>
@@ -35116,7 +36632,7 @@
       </p:sp>
       <p:sp>
         <p:nvSpPr>
-          <p:cNvPr id="36" name="Text 34"/>
+          <p:cNvPr id="40" name="Text 38"/>
           <p:cNvSpPr/>
           <p:nvPr/>
         </p:nvSpPr>
@@ -35155,7 +36671,7 @@
       </p:sp>
       <p:sp>
         <p:nvSpPr>
-          <p:cNvPr id="37" name="Text 35"/>
+          <p:cNvPr id="41" name="Text 39"/>
           <p:cNvSpPr/>
           <p:nvPr/>
         </p:nvSpPr>
@@ -35194,7 +36710,7 @@
       </p:sp>
       <p:sp>
         <p:nvSpPr>
-          <p:cNvPr id="38" name="Shape 36"/>
+          <p:cNvPr id="42" name="Shape 40"/>
           <p:cNvSpPr/>
           <p:nvPr/>
         </p:nvSpPr>
@@ -35221,7 +36737,7 @@
       </p:sp>
       <p:sp>
         <p:nvSpPr>
-          <p:cNvPr id="39" name="Text 37"/>
+          <p:cNvPr id="43" name="Text 41"/>
           <p:cNvSpPr/>
           <p:nvPr/>
         </p:nvSpPr>
@@ -35260,7 +36776,7 @@
       </p:sp>
       <p:sp>
         <p:nvSpPr>
-          <p:cNvPr id="40" name="Text 38"/>
+          <p:cNvPr id="44" name="Text 42"/>
           <p:cNvSpPr/>
           <p:nvPr/>
         </p:nvSpPr>
@@ -35299,7 +36815,7 @@
       </p:sp>
       <p:sp>
         <p:nvSpPr>
-          <p:cNvPr id="41" name="Shape 39"/>
+          <p:cNvPr id="45" name="Shape 43"/>
           <p:cNvSpPr/>
           <p:nvPr/>
         </p:nvSpPr>
@@ -35326,7 +36842,7 @@
       </p:sp>
       <p:sp>
         <p:nvSpPr>
-          <p:cNvPr id="42" name="Text 40"/>
+          <p:cNvPr id="46" name="Text 44"/>
           <p:cNvSpPr/>
           <p:nvPr/>
         </p:nvSpPr>
@@ -35365,7 +36881,7 @@
       </p:sp>
       <p:sp>
         <p:nvSpPr>
-          <p:cNvPr id="43" name="Shape 41"/>
+          <p:cNvPr id="47" name="Shape 45"/>
           <p:cNvSpPr/>
           <p:nvPr/>
         </p:nvSpPr>
@@ -35392,7 +36908,7 @@
       </p:sp>
       <p:sp>
         <p:nvSpPr>
-          <p:cNvPr id="44" name="Text 42"/>
+          <p:cNvPr id="48" name="Text 46"/>
           <p:cNvSpPr/>
           <p:nvPr/>
         </p:nvSpPr>
@@ -35431,7 +36947,7 @@
       </p:sp>
       <p:sp>
         <p:nvSpPr>
-          <p:cNvPr id="45" name="Shape 43"/>
+          <p:cNvPr id="49" name="Shape 47"/>
           <p:cNvSpPr/>
           <p:nvPr/>
         </p:nvSpPr>
@@ -35458,7 +36974,7 @@
       </p:sp>
       <p:sp>
         <p:nvSpPr>
-          <p:cNvPr id="46" name="Shape 44"/>
+          <p:cNvPr id="50" name="Shape 48"/>
           <p:cNvSpPr/>
           <p:nvPr/>
         </p:nvSpPr>
@@ -35485,7 +37001,7 @@
       </p:sp>
       <p:sp>
         <p:nvSpPr>
-          <p:cNvPr id="47" name="Text 45"/>
+          <p:cNvPr id="51" name="Text 49"/>
           <p:cNvSpPr/>
           <p:nvPr/>
         </p:nvSpPr>
@@ -35524,7 +37040,7 @@
       </p:sp>
       <p:sp>
         <p:nvSpPr>
-          <p:cNvPr id="48" name="Shape 46"/>
+          <p:cNvPr id="52" name="Shape 50"/>
           <p:cNvSpPr/>
           <p:nvPr/>
         </p:nvSpPr>
@@ -35551,7 +37067,7 @@
       </p:sp>
       <p:sp>
         <p:nvSpPr>
-          <p:cNvPr id="49" name="Text 47"/>
+          <p:cNvPr id="53" name="Text 51"/>
           <p:cNvSpPr/>
           <p:nvPr/>
         </p:nvSpPr>
@@ -35590,7 +37106,7 @@
       </p:sp>
       <p:sp>
         <p:nvSpPr>
-          <p:cNvPr id="50" name="Shape 48"/>
+          <p:cNvPr id="54" name="Shape 52"/>
           <p:cNvSpPr/>
           <p:nvPr/>
         </p:nvSpPr>
@@ -35617,7 +37133,7 @@
       </p:sp>
       <p:sp>
         <p:nvSpPr>
-          <p:cNvPr id="51" name="Text 49"/>
+          <p:cNvPr id="55" name="Text 53"/>
           <p:cNvSpPr/>
           <p:nvPr/>
         </p:nvSpPr>
@@ -35656,7 +37172,7 @@
       </p:sp>
       <p:sp>
         <p:nvSpPr>
-          <p:cNvPr id="52" name="Shape 50"/>
+          <p:cNvPr id="56" name="Shape 54"/>
           <p:cNvSpPr/>
           <p:nvPr/>
         </p:nvSpPr>
@@ -35683,7 +37199,7 @@
       </p:sp>
       <p:sp>
         <p:nvSpPr>
-          <p:cNvPr id="53" name="Text 51"/>
+          <p:cNvPr id="57" name="Text 55"/>
           <p:cNvSpPr/>
           <p:nvPr/>
         </p:nvSpPr>
@@ -35722,7 +37238,7 @@
       </p:sp>
       <p:sp>
         <p:nvSpPr>
-          <p:cNvPr id="54" name="Text 52"/>
+          <p:cNvPr id="58" name="Text 56"/>
           <p:cNvSpPr/>
           <p:nvPr/>
         </p:nvSpPr>
@@ -35761,7 +37277,7 @@
       </p:sp>
       <p:sp>
         <p:nvSpPr>
-          <p:cNvPr id="55" name="Shape 53"/>
+          <p:cNvPr id="59" name="Shape 57"/>
           <p:cNvSpPr/>
           <p:nvPr/>
         </p:nvSpPr>
@@ -35788,7 +37304,7 @@
       </p:sp>
       <p:sp>
         <p:nvSpPr>
-          <p:cNvPr id="56" name="Text 54"/>
+          <p:cNvPr id="60" name="Text 58"/>
           <p:cNvSpPr/>
           <p:nvPr/>
         </p:nvSpPr>
@@ -35827,7 +37343,7 @@
       </p:sp>
       <p:sp>
         <p:nvSpPr>
-          <p:cNvPr id="57" name="Shape 55"/>
+          <p:cNvPr id="61" name="Shape 59"/>
           <p:cNvSpPr/>
           <p:nvPr/>
         </p:nvSpPr>
@@ -35854,7 +37370,7 @@
       </p:sp>
       <p:sp>
         <p:nvSpPr>
-          <p:cNvPr id="58" name="Text 56"/>
+          <p:cNvPr id="62" name="Text 60"/>
           <p:cNvSpPr/>
           <p:nvPr/>
         </p:nvSpPr>
@@ -35893,7 +37409,7 @@
       </p:sp>
       <p:sp>
         <p:nvSpPr>
-          <p:cNvPr id="59" name="Text 57"/>
+          <p:cNvPr id="63" name="Text 61"/>
           <p:cNvSpPr/>
           <p:nvPr/>
         </p:nvSpPr>
@@ -35932,7 +37448,7 @@
       </p:sp>
       <p:sp>
         <p:nvSpPr>
-          <p:cNvPr id="60" name="Shape 58"/>
+          <p:cNvPr id="64" name="Shape 62"/>
           <p:cNvSpPr/>
           <p:nvPr/>
         </p:nvSpPr>
@@ -35959,7 +37475,7 @@
       </p:sp>
       <p:sp>
         <p:nvSpPr>
-          <p:cNvPr id="61" name="Text 59"/>
+          <p:cNvPr id="65" name="Text 63"/>
           <p:cNvSpPr/>
           <p:nvPr/>
         </p:nvSpPr>
@@ -35998,7 +37514,7 @@
       </p:sp>
       <p:sp>
         <p:nvSpPr>
-          <p:cNvPr id="62" name="Shape 60"/>
+          <p:cNvPr id="66" name="Shape 64"/>
           <p:cNvSpPr/>
           <p:nvPr/>
         </p:nvSpPr>
@@ -36025,7 +37541,7 @@
       </p:sp>
       <p:sp>
         <p:nvSpPr>
-          <p:cNvPr id="63" name="Text 61"/>
+          <p:cNvPr id="67" name="Text 65"/>
           <p:cNvSpPr/>
           <p:nvPr/>
         </p:nvSpPr>
@@ -36064,7 +37580,7 @@
       </p:sp>
       <p:sp>
         <p:nvSpPr>
-          <p:cNvPr id="64" name="Shape 62"/>
+          <p:cNvPr id="68" name="Shape 66"/>
           <p:cNvSpPr/>
           <p:nvPr/>
         </p:nvSpPr>
@@ -36091,7 +37607,7 @@
       </p:sp>
       <p:sp>
         <p:nvSpPr>
-          <p:cNvPr id="65" name="Text 63"/>
+          <p:cNvPr id="69" name="Text 67"/>
           <p:cNvSpPr/>
           <p:nvPr/>
         </p:nvSpPr>
@@ -36130,7 +37646,7 @@
       </p:sp>
       <p:sp>
         <p:nvSpPr>
-          <p:cNvPr id="66" name="Shape 64"/>
+          <p:cNvPr id="70" name="Shape 68"/>
           <p:cNvSpPr/>
           <p:nvPr/>
         </p:nvSpPr>
@@ -36157,7 +37673,7 @@
       </p:sp>
       <p:sp>
         <p:nvSpPr>
-          <p:cNvPr id="67" name="Text 65"/>
+          <p:cNvPr id="71" name="Text 69"/>
           <p:cNvSpPr/>
           <p:nvPr/>
         </p:nvSpPr>
@@ -36480,7 +37996,7 @@
                 <a:ea typeface="Calibri" pitchFamily="34" charset="-122"/>
                 <a:cs typeface="Calibri" pitchFamily="34" charset="-120"/>
               </a:rPr>
-              <a:t>Word Labs  •  wordlabs.app  •  Root: 'educate' = to lead out knowledge</a:t>
+              <a:t>Word Labs  •  wordlabs.app  •  Root: 'educate' = to lead out, teach</a:t>
             </a:r>
             <a:endParaRPr lang="en-US" sz="800" dirty="0"/>
           </a:p>
@@ -37649,7 +39165,7 @@
                 <a:ea typeface="Calibri" pitchFamily="34" charset="-122"/>
                 <a:cs typeface="Calibri" pitchFamily="34" charset="-120"/>
               </a:rPr>
-              <a:t>Word Labs  •  wordlabs.app  •  Root: 'educate' = to lead out knowledge</a:t>
+              <a:t>Word Labs  •  wordlabs.app  •  Root: 'educate' = to lead out, teach</a:t>
             </a:r>
             <a:endParaRPr lang="en-US" sz="800" dirty="0"/>
           </a:p>
@@ -38142,7 +39658,7 @@
                 <a:ea typeface="Trebuchet MS" pitchFamily="34" charset="-122"/>
                 <a:cs typeface="Trebuchet MS" pitchFamily="34" charset="-120"/>
               </a:rPr>
-              <a:t>un-</a:t>
+              <a:t>co-</a:t>
             </a:r>
             <a:endParaRPr lang="en-US" sz="1300" dirty="0"/>
           </a:p>
@@ -38295,7 +39811,7 @@
                 <a:ea typeface="Trebuchet MS" pitchFamily="34" charset="-122"/>
                 <a:cs typeface="Trebuchet MS" pitchFamily="34" charset="-120"/>
               </a:rPr>
-              <a:t>co-</a:t>
+              <a:t>mis-</a:t>
             </a:r>
             <a:endParaRPr lang="en-US" sz="1300" dirty="0"/>
           </a:p>
@@ -38601,7 +40117,7 @@
                 <a:ea typeface="Trebuchet MS" pitchFamily="34" charset="-122"/>
                 <a:cs typeface="Trebuchet MS" pitchFamily="34" charset="-120"/>
               </a:rPr>
-              <a:t>mis-</a:t>
+              <a:t>un-</a:t>
             </a:r>
             <a:endParaRPr lang="en-US" sz="1300" dirty="0"/>
           </a:p>
@@ -38795,7 +40311,7 @@
                 <a:ea typeface="Trebuchet MS" pitchFamily="34" charset="-122"/>
                 <a:cs typeface="Trebuchet MS" pitchFamily="34" charset="-120"/>
               </a:rPr>
-              <a:t>educated</a:t>
+              <a:t>education</a:t>
             </a:r>
             <a:endParaRPr lang="en-US" sz="1200" dirty="0"/>
           </a:p>
@@ -38861,7 +40377,7 @@
                 <a:ea typeface="Trebuchet MS" pitchFamily="34" charset="-122"/>
                 <a:cs typeface="Trebuchet MS" pitchFamily="34" charset="-120"/>
               </a:rPr>
-              <a:t>education</a:t>
+              <a:t>educator</a:t>
             </a:r>
             <a:endParaRPr lang="en-US" sz="1200" dirty="0"/>
           </a:p>
@@ -38927,7 +40443,7 @@
                 <a:ea typeface="Trebuchet MS" pitchFamily="34" charset="-122"/>
                 <a:cs typeface="Trebuchet MS" pitchFamily="34" charset="-120"/>
               </a:rPr>
-              <a:t>educator</a:t>
+              <a:t>educated</a:t>
             </a:r>
             <a:endParaRPr lang="en-US" sz="1200" dirty="0"/>
           </a:p>
@@ -39059,7 +40575,7 @@
                 <a:ea typeface="Trebuchet MS" pitchFamily="34" charset="-122"/>
                 <a:cs typeface="Trebuchet MS" pitchFamily="34" charset="-120"/>
               </a:rPr>
-              <a:t>reeducate</a:t>
+              <a:t>educational</a:t>
             </a:r>
             <a:endParaRPr lang="en-US" sz="1200" dirty="0"/>
           </a:p>
@@ -39125,7 +40641,7 @@
                 <a:ea typeface="Trebuchet MS" pitchFamily="34" charset="-122"/>
                 <a:cs typeface="Trebuchet MS" pitchFamily="34" charset="-120"/>
               </a:rPr>
-              <a:t>uneducated</a:t>
+              <a:t>reeducate</a:t>
             </a:r>
             <a:endParaRPr lang="en-US" sz="1200" dirty="0"/>
           </a:p>
@@ -39191,7 +40707,7 @@
                 <a:ea typeface="Trebuchet MS" pitchFamily="34" charset="-122"/>
                 <a:cs typeface="Trebuchet MS" pitchFamily="34" charset="-120"/>
               </a:rPr>
-              <a:t>educational</a:t>
+              <a:t>uneducated</a:t>
             </a:r>
             <a:endParaRPr lang="en-US" sz="1200" dirty="0"/>
           </a:p>
@@ -39549,7 +41065,7 @@
                 <a:ea typeface="Calibri" pitchFamily="34" charset="-122"/>
                 <a:cs typeface="Calibri" pitchFamily="34" charset="-120"/>
               </a:rPr>
-              <a:t>Word Labs  •  wordlabs.app  •  Root: 'educate' = to lead out knowledge</a:t>
+              <a:t>Word Labs  •  wordlabs.app  •  Root: 'educate' = to lead out, teach</a:t>
             </a:r>
             <a:endParaRPr lang="en-US" sz="800" dirty="0"/>
           </a:p>
@@ -39713,7 +41229,7 @@
                 <a:ea typeface="Calibri" pitchFamily="34" charset="-122"/>
                 <a:cs typeface="Calibri" pitchFamily="34" charset="-120"/>
               </a:rPr>
-              <a:t>The core part of a word carrying its basic meaning. For example, 'educate' means 'to lead out knowledge'.</a:t>
+              <a:t>The core part of a word carrying its basic meaning. For example, 'educate' means 'to lead out, teach'.</a:t>
             </a:r>
             <a:endParaRPr lang="en-US" sz="1350" dirty="0"/>
           </a:p>
@@ -40333,7 +41849,7 @@
                 <a:ea typeface="Calibri" pitchFamily="34" charset="-122"/>
                 <a:cs typeface="Calibri" pitchFamily="34" charset="-120"/>
               </a:rPr>
-              <a:t>Word Labs  •  wordlabs.app  •  Root: 'educate' = to lead out knowledge</a:t>
+              <a:t>Word Labs  •  wordlabs.app  •  Root: 'educate' = to lead out, teach</a:t>
             </a:r>
             <a:endParaRPr lang="en-US" sz="800" dirty="0"/>
           </a:p>
@@ -40445,7 +41961,7 @@
                 <a:ea typeface="Calibri" pitchFamily="34" charset="-122"/>
                 <a:cs typeface="Calibri" pitchFamily="34" charset="-120"/>
               </a:rPr>
-              <a:t>1.  The root 'educate' comes from Latin.</a:t>
+              <a:t>1.  The word 'educator' means a student who is learning at school.</a:t>
             </a:r>
             <a:endParaRPr lang="en-US" sz="1300" dirty="0"/>
           </a:p>
@@ -40468,11 +41984,11 @@
             </a:avLst>
           </a:prstGeom>
           <a:solidFill>
-            <a:srgbClr val="DCFCE7"/>
-          </a:solidFill>
-          <a:ln w="12700">
-            <a:solidFill>
-              <a:srgbClr val="16A34A"/>
+            <a:srgbClr val="FEE2E2"/>
+          </a:solidFill>
+          <a:ln w="12700">
+            <a:solidFill>
+              <a:srgbClr val="DC2626"/>
             </a:solidFill>
             <a:prstDash val="solid"/>
           </a:ln>
@@ -40505,13 +42021,13 @@
             <a:r>
               <a:rPr lang="en-US" sz="1100" b="1" dirty="0">
                 <a:solidFill>
-                  <a:srgbClr val="16A34A"/>
+                  <a:srgbClr val="DC2626"/>
                 </a:solidFill>
                 <a:latin typeface="Trebuchet MS" pitchFamily="34" charset="0"/>
                 <a:ea typeface="Trebuchet MS" pitchFamily="34" charset="-122"/>
                 <a:cs typeface="Trebuchet MS" pitchFamily="34" charset="-120"/>
               </a:rPr>
-              <a:t>TRUE</a:t>
+              <a:t>FALSE</a:t>
             </a:r>
             <a:endParaRPr lang="en-US" sz="1100" dirty="0"/>
           </a:p>
@@ -40584,7 +42100,7 @@
                 <a:ea typeface="Calibri" pitchFamily="34" charset="-122"/>
                 <a:cs typeface="Calibri" pitchFamily="34" charset="-120"/>
               </a:rPr>
-              <a:t>2.  The word 'educator' means a person who builds schools.</a:t>
+              <a:t>2.  Adding the prefix 're' to 'educate' makes the word 'reeducate', meaning to teach again.</a:t>
             </a:r>
             <a:endParaRPr lang="en-US" sz="1300" dirty="0"/>
           </a:p>
@@ -40607,11 +42123,11 @@
             </a:avLst>
           </a:prstGeom>
           <a:solidFill>
-            <a:srgbClr val="FEE2E2"/>
-          </a:solidFill>
-          <a:ln w="12700">
-            <a:solidFill>
-              <a:srgbClr val="DC2626"/>
+            <a:srgbClr val="DCFCE7"/>
+          </a:solidFill>
+          <a:ln w="12700">
+            <a:solidFill>
+              <a:srgbClr val="16A34A"/>
             </a:solidFill>
             <a:prstDash val="solid"/>
           </a:ln>
@@ -40644,13 +42160,13 @@
             <a:r>
               <a:rPr lang="en-US" sz="1100" b="1" dirty="0">
                 <a:solidFill>
-                  <a:srgbClr val="DC2626"/>
+                  <a:srgbClr val="16A34A"/>
                 </a:solidFill>
                 <a:latin typeface="Trebuchet MS" pitchFamily="34" charset="0"/>
                 <a:ea typeface="Trebuchet MS" pitchFamily="34" charset="-122"/>
                 <a:cs typeface="Trebuchet MS" pitchFamily="34" charset="-120"/>
               </a:rPr>
-              <a:t>FALSE</a:t>
+              <a:t>TRUE</a:t>
             </a:r>
             <a:endParaRPr lang="en-US" sz="1100" dirty="0"/>
           </a:p>
@@ -40723,7 +42239,7 @@
                 <a:ea typeface="Calibri" pitchFamily="34" charset="-122"/>
                 <a:cs typeface="Calibri" pitchFamily="34" charset="-120"/>
               </a:rPr>
-              <a:t>3.  The word 'educational' contains the root 'educate'.</a:t>
+              <a:t>3.  An 'educational' programme is one that helps people learn something.</a:t>
             </a:r>
             <a:endParaRPr lang="en-US" sz="1300" dirty="0"/>
           </a:p>
@@ -40862,7 +42378,7 @@
                 <a:ea typeface="Calibri" pitchFamily="34" charset="-122"/>
                 <a:cs typeface="Calibri" pitchFamily="34" charset="-120"/>
               </a:rPr>
-              <a:t>4.  Adding 're-' to 'educate' makes a word meaning to teach again.</a:t>
+              <a:t>4.  The root 'educate' comes from a Latin word meaning to lead out or bring up.</a:t>
             </a:r>
             <a:endParaRPr lang="en-US" sz="1300" dirty="0"/>
           </a:p>
@@ -41001,7 +42517,7 @@
                 <a:ea typeface="Calibri" pitchFamily="34" charset="-122"/>
                 <a:cs typeface="Calibri" pitchFamily="34" charset="-120"/>
               </a:rPr>
-              <a:t>5.  The suffix '-ion' in 'education' means 'without'.</a:t>
+              <a:t>5.  The root 'educate' originally comes from a Greek word.</a:t>
             </a:r>
             <a:endParaRPr lang="en-US" sz="1300" dirty="0"/>
           </a:p>
@@ -41359,7 +42875,7 @@
                 <a:ea typeface="Calibri" pitchFamily="34" charset="-122"/>
                 <a:cs typeface="Calibri" pitchFamily="34" charset="-120"/>
               </a:rPr>
-              <a:t>Word Labs  •  wordlabs.app  •  Root: 'educate' = to lead out knowledge</a:t>
+              <a:t>Word Labs  •  wordlabs.app  •  Root: 'educate' = to lead out, teach</a:t>
             </a:r>
             <a:endParaRPr lang="en-US" sz="800" dirty="0"/>
           </a:p>
@@ -41496,7 +43012,7 @@
                 <a:ea typeface="Trebuchet MS" pitchFamily="34" charset="-122"/>
                 <a:cs typeface="Trebuchet MS" pitchFamily="34" charset="-120"/>
               </a:rPr>
-              <a:t>to lead out knowledge</a:t>
+              <a:t>to lead out, teach</a:t>
             </a:r>
             <a:endParaRPr lang="en-US" sz="2000" dirty="0"/>
           </a:p>
@@ -41640,7 +43156,7 @@
                 <a:ea typeface="Trebuchet MS" pitchFamily="34" charset="-122"/>
                 <a:cs typeface="Trebuchet MS" pitchFamily="34" charset="-120"/>
               </a:rPr>
-              <a:t>educated</a:t>
+              <a:t>education</a:t>
             </a:r>
             <a:endParaRPr lang="en-US" sz="1300" dirty="0"/>
           </a:p>
@@ -41706,7 +43222,7 @@
                 <a:ea typeface="Trebuchet MS" pitchFamily="34" charset="-122"/>
                 <a:cs typeface="Trebuchet MS" pitchFamily="34" charset="-120"/>
               </a:rPr>
-              <a:t>education</a:t>
+              <a:t>educator</a:t>
             </a:r>
             <a:endParaRPr lang="en-US" sz="1300" dirty="0"/>
           </a:p>
@@ -41772,7 +43288,7 @@
                 <a:ea typeface="Trebuchet MS" pitchFamily="34" charset="-122"/>
                 <a:cs typeface="Trebuchet MS" pitchFamily="34" charset="-120"/>
               </a:rPr>
-              <a:t>educator</a:t>
+              <a:t>educated</a:t>
             </a:r>
             <a:endParaRPr lang="en-US" sz="1300" dirty="0"/>
           </a:p>
@@ -41904,7 +43420,7 @@
                 <a:ea typeface="Trebuchet MS" pitchFamily="34" charset="-122"/>
                 <a:cs typeface="Trebuchet MS" pitchFamily="34" charset="-120"/>
               </a:rPr>
-              <a:t>reeducate</a:t>
+              <a:t>educational</a:t>
             </a:r>
             <a:endParaRPr lang="en-US" sz="1300" dirty="0"/>
           </a:p>
@@ -41970,7 +43486,7 @@
                 <a:ea typeface="Trebuchet MS" pitchFamily="34" charset="-122"/>
                 <a:cs typeface="Trebuchet MS" pitchFamily="34" charset="-120"/>
               </a:rPr>
-              <a:t>uneducated</a:t>
+              <a:t>reeducate</a:t>
             </a:r>
             <a:endParaRPr lang="en-US" sz="1300" dirty="0"/>
           </a:p>
@@ -42036,7 +43552,7 @@
                 <a:ea typeface="Trebuchet MS" pitchFamily="34" charset="-122"/>
                 <a:cs typeface="Trebuchet MS" pitchFamily="34" charset="-120"/>
               </a:rPr>
-              <a:t>educational</a:t>
+              <a:t>uneducated</a:t>
             </a:r>
             <a:endParaRPr lang="en-US" sz="1300" dirty="0"/>
           </a:p>
@@ -42328,7 +43844,7 @@
                 <a:ea typeface="Calibri" pitchFamily="34" charset="-122"/>
                 <a:cs typeface="Calibri" pitchFamily="34" charset="-120"/>
               </a:rPr>
-              <a:t>Word Labs  •  wordlabs.app  •  Root: 'educate' = to lead out knowledge</a:t>
+              <a:t>Word Labs  •  wordlabs.app  •  Root: 'educate' = to lead out, teach</a:t>
             </a:r>
             <a:endParaRPr lang="en-US" sz="800" dirty="0"/>
           </a:p>
@@ -42821,7 +44337,7 @@
                 <a:ea typeface="Trebuchet MS" pitchFamily="34" charset="-122"/>
                 <a:cs typeface="Trebuchet MS" pitchFamily="34" charset="-120"/>
               </a:rPr>
-              <a:t>un-</a:t>
+              <a:t>co-</a:t>
             </a:r>
             <a:endParaRPr lang="en-US" sz="1300" dirty="0"/>
           </a:p>
@@ -42974,7 +44490,7 @@
                 <a:ea typeface="Trebuchet MS" pitchFamily="34" charset="-122"/>
                 <a:cs typeface="Trebuchet MS" pitchFamily="34" charset="-120"/>
               </a:rPr>
-              <a:t>co-</a:t>
+              <a:t>mis-</a:t>
             </a:r>
             <a:endParaRPr lang="en-US" sz="1300" dirty="0"/>
           </a:p>
@@ -43280,7 +44796,7 @@
                 <a:ea typeface="Trebuchet MS" pitchFamily="34" charset="-122"/>
                 <a:cs typeface="Trebuchet MS" pitchFamily="34" charset="-120"/>
               </a:rPr>
-              <a:t>mis-</a:t>
+              <a:t>un-</a:t>
             </a:r>
             <a:endParaRPr lang="en-US" sz="1300" dirty="0"/>
           </a:p>
@@ -43810,7 +45326,7 @@
                 <a:ea typeface="Trebuchet MS" pitchFamily="34" charset="-122"/>
                 <a:cs typeface="Trebuchet MS" pitchFamily="34" charset="-120"/>
               </a:rPr>
-              <a:t>educated</a:t>
+              <a:t>education</a:t>
             </a:r>
             <a:endParaRPr lang="en-US" sz="1400" dirty="0"/>
           </a:p>
@@ -44102,7 +45618,7 @@
                 <a:ea typeface="Calibri" pitchFamily="34" charset="-122"/>
                 <a:cs typeface="Calibri" pitchFamily="34" charset="-120"/>
               </a:rPr>
-              <a:t>Word Labs  •  wordlabs.app  •  Root: 'educate' = to lead out knowledge</a:t>
+              <a:t>Word Labs  •  wordlabs.app  •  Root: 'educate' = to lead out, teach</a:t>
             </a:r>
             <a:endParaRPr lang="en-US" sz="800" dirty="0"/>
           </a:p>
@@ -44214,7 +45730,7 @@
                 <a:ea typeface="Trebuchet MS" pitchFamily="34" charset="-122"/>
                 <a:cs typeface="Trebuchet MS" pitchFamily="34" charset="-120"/>
               </a:rPr>
-              <a:t>educated</a:t>
+              <a:t>education</a:t>
             </a:r>
             <a:endParaRPr lang="en-US" sz="1200" dirty="0"/>
           </a:p>
@@ -44280,7 +45796,7 @@
                 <a:ea typeface="Calibri" pitchFamily="34" charset="-122"/>
                 <a:cs typeface="Calibri" pitchFamily="34" charset="-120"/>
               </a:rPr>
-              <a:t>The act of teaching someone or helping them learn.</a:t>
+              <a:t>The act of teaching someone right now.</a:t>
             </a:r>
             <a:endParaRPr lang="en-US" sz="1200" dirty="0"/>
           </a:p>
@@ -44353,7 +45869,7 @@
                 <a:ea typeface="Trebuchet MS" pitchFamily="34" charset="-122"/>
                 <a:cs typeface="Trebuchet MS" pitchFamily="34" charset="-120"/>
               </a:rPr>
-              <a:t>education</a:t>
+              <a:t>educator</a:t>
             </a:r>
             <a:endParaRPr lang="en-US" sz="1200" dirty="0"/>
           </a:p>
@@ -44419,7 +45935,7 @@
                 <a:ea typeface="Calibri" pitchFamily="34" charset="-122"/>
                 <a:cs typeface="Calibri" pitchFamily="34" charset="-120"/>
               </a:rPr>
-              <a:t>Having learned a lot through school or study.</a:t>
+              <a:t>The process of learning and being taught at school or home.</a:t>
             </a:r>
             <a:endParaRPr lang="en-US" sz="1200" dirty="0"/>
           </a:p>
@@ -44492,7 +46008,7 @@
                 <a:ea typeface="Trebuchet MS" pitchFamily="34" charset="-122"/>
                 <a:cs typeface="Trebuchet MS" pitchFamily="34" charset="-120"/>
               </a:rPr>
-              <a:t>educator</a:t>
+              <a:t>educated</a:t>
             </a:r>
             <a:endParaRPr lang="en-US" sz="1200" dirty="0"/>
           </a:p>
@@ -44558,7 +46074,7 @@
                 <a:ea typeface="Calibri" pitchFamily="34" charset="-122"/>
                 <a:cs typeface="Calibri" pitchFamily="34" charset="-120"/>
               </a:rPr>
-              <a:t>Something that helps you learn, like a documentary or school trip.</a:t>
+              <a:t>Describing someone who has not had the chance to learn much.</a:t>
             </a:r>
             <a:endParaRPr lang="en-US" sz="1200" dirty="0"/>
           </a:p>
@@ -44697,7 +46213,7 @@
                 <a:ea typeface="Calibri" pitchFamily="34" charset="-122"/>
                 <a:cs typeface="Calibri" pitchFamily="34" charset="-120"/>
               </a:rPr>
-              <a:t>A person whose job is to teach others.</a:t>
+              <a:t>Having learned a lot through school or study.</a:t>
             </a:r>
             <a:endParaRPr lang="en-US" sz="1200" dirty="0"/>
           </a:p>
@@ -44770,7 +46286,7 @@
                 <a:ea typeface="Trebuchet MS" pitchFamily="34" charset="-122"/>
                 <a:cs typeface="Trebuchet MS" pitchFamily="34" charset="-120"/>
               </a:rPr>
-              <a:t>reeducate</a:t>
+              <a:t>educational</a:t>
             </a:r>
             <a:endParaRPr lang="en-US" sz="1200" dirty="0"/>
           </a:p>
@@ -44836,7 +46352,7 @@
                 <a:ea typeface="Calibri" pitchFamily="34" charset="-122"/>
                 <a:cs typeface="Calibri" pitchFamily="34" charset="-120"/>
               </a:rPr>
-              <a:t>Describes someone who has not had much schooling or learning.</a:t>
+              <a:t>To teach someone again, especially new ways of thinking.</a:t>
             </a:r>
             <a:endParaRPr lang="en-US" sz="1200" dirty="0"/>
           </a:p>
@@ -44909,7 +46425,7 @@
                 <a:ea typeface="Trebuchet MS" pitchFamily="34" charset="-122"/>
                 <a:cs typeface="Trebuchet MS" pitchFamily="34" charset="-120"/>
               </a:rPr>
-              <a:t>uneducated</a:t>
+              <a:t>reeducate</a:t>
             </a:r>
             <a:endParaRPr lang="en-US" sz="1200" dirty="0"/>
           </a:p>
@@ -44975,7 +46491,7 @@
                 <a:ea typeface="Calibri" pitchFamily="34" charset="-122"/>
                 <a:cs typeface="Calibri" pitchFamily="34" charset="-120"/>
               </a:rPr>
-              <a:t>To teach someone new ways of thinking or doing things again.</a:t>
+              <a:t>Something that helps you learn, like an educational video.</a:t>
             </a:r>
             <a:endParaRPr lang="en-US" sz="1200" dirty="0"/>
           </a:p>
@@ -45048,7 +46564,7 @@
                 <a:ea typeface="Trebuchet MS" pitchFamily="34" charset="-122"/>
                 <a:cs typeface="Trebuchet MS" pitchFamily="34" charset="-120"/>
               </a:rPr>
-              <a:t>educational</a:t>
+              <a:t>uneducated</a:t>
             </a:r>
             <a:endParaRPr lang="en-US" sz="1200" dirty="0"/>
           </a:p>
@@ -45114,7 +46630,7 @@
                 <a:ea typeface="Calibri" pitchFamily="34" charset="-122"/>
                 <a:cs typeface="Calibri" pitchFamily="34" charset="-120"/>
               </a:rPr>
-              <a:t>The process of learning and being taught at school or elsewhere.</a:t>
+              <a:t>A person whose job is to teach others.</a:t>
             </a:r>
             <a:endParaRPr lang="en-US" sz="1200" dirty="0"/>
           </a:p>
@@ -45406,7 +46922,7 @@
                 <a:ea typeface="Calibri" pitchFamily="34" charset="-122"/>
                 <a:cs typeface="Calibri" pitchFamily="34" charset="-120"/>
               </a:rPr>
-              <a:t>Word Labs  •  wordlabs.app  •  Root: 'educate' = to lead out knowledge</a:t>
+              <a:t>Word Labs  •  wordlabs.app  •  Root: 'educate' = to lead out, teach</a:t>
             </a:r>
             <a:endParaRPr lang="en-US" sz="800" dirty="0"/>
           </a:p>
@@ -45609,7 +47125,7 @@
                 <a:ea typeface="Calibri" pitchFamily="34" charset="-122"/>
                 <a:cs typeface="Calibri" pitchFamily="34" charset="-120"/>
               </a:rPr>
-              <a:t>Our new educator explained that every subject we study helps prepare us for the future.</a:t>
+              <a:t>Our teacher said that a good education helps you solve problems in everyday life.</a:t>
             </a:r>
             <a:endParaRPr lang="en-US" sz="1500" dirty="0"/>
           </a:p>
@@ -45773,7 +47289,7 @@
                 <a:ea typeface="Calibri" pitchFamily="34" charset="-122"/>
                 <a:cs typeface="Calibri" pitchFamily="34" charset="-120"/>
               </a:rPr>
-              <a:t>The museum visit was so educational that everyone in the class wanted to come back again.</a:t>
+              <a:t>The educator at the museum showed us how ancient Egyptians used to live.</a:t>
             </a:r>
             <a:endParaRPr lang="en-US" sz="1500" dirty="0"/>
           </a:p>
@@ -45937,7 +47453,7 @@
                 <a:ea typeface="Calibri" pitchFamily="34" charset="-122"/>
                 <a:cs typeface="Calibri" pitchFamily="34" charset="-120"/>
               </a:rPr>
-              <a:t>My parents believe that a good education is one of the most important things in life.</a:t>
+              <a:t>Watching documentaries about animals can be very educational.</a:t>
             </a:r>
             <a:endParaRPr lang="en-US" sz="1500" dirty="0"/>
           </a:p>
